--- a/tmp/pptx-build/PropLead-CRM-Presentation-draft.pptx
+++ b/tmp/pptx-build/PropLead-CRM-Presentation-draft.pptx
@@ -2,25 +2,26 @@
 <file path=ppt/presentation.xml><?xml version="1.0" encoding="utf-8"?>
 <p:presentation xmlns:p="http://schemas.openxmlformats.org/presentationml/2006/main">
   <p:sldMasterIdLst>
-    <p:sldMasterId xmlns:r="http://schemas.openxmlformats.org/officeDocument/2006/relationships" id="2147483648" r:id="R1262ee56726d4802"/>
+    <p:sldMasterId xmlns:r="http://schemas.openxmlformats.org/officeDocument/2006/relationships" id="2147483648" r:id="Rdfa3956eb132408d"/>
   </p:sldMasterIdLst>
   <p:notesMasterIdLst>
-    <p:notesMasterId xmlns:r="http://schemas.openxmlformats.org/officeDocument/2006/relationships" r:id="R629dab1ffe154e08"/>
+    <p:notesMasterId xmlns:r="http://schemas.openxmlformats.org/officeDocument/2006/relationships" r:id="R833cd36c74764db8"/>
   </p:notesMasterIdLst>
   <p:sldIdLst>
-    <p:sldId xmlns:r="http://schemas.openxmlformats.org/officeDocument/2006/relationships" id="256" r:id="R74995e88dcd04775"/>
-    <p:sldId xmlns:r="http://schemas.openxmlformats.org/officeDocument/2006/relationships" id="257" r:id="R152a3556cfa247de"/>
-    <p:sldId xmlns:r="http://schemas.openxmlformats.org/officeDocument/2006/relationships" id="258" r:id="Rf8f01849b1f74525"/>
-    <p:sldId xmlns:r="http://schemas.openxmlformats.org/officeDocument/2006/relationships" id="259" r:id="Re80d442ad48b4037"/>
-    <p:sldId xmlns:r="http://schemas.openxmlformats.org/officeDocument/2006/relationships" id="260" r:id="R8bcd0434d2e145c4"/>
-    <p:sldId xmlns:r="http://schemas.openxmlformats.org/officeDocument/2006/relationships" id="261" r:id="Re191ad1afbf04801"/>
-    <p:sldId xmlns:r="http://schemas.openxmlformats.org/officeDocument/2006/relationships" id="262" r:id="R6b6d8786b1db44db"/>
-    <p:sldId xmlns:r="http://schemas.openxmlformats.org/officeDocument/2006/relationships" id="263" r:id="R20634fd2520f441d"/>
-    <p:sldId xmlns:r="http://schemas.openxmlformats.org/officeDocument/2006/relationships" id="264" r:id="R04bfa811829245c7"/>
-    <p:sldId xmlns:r="http://schemas.openxmlformats.org/officeDocument/2006/relationships" id="265" r:id="Rf3bc01ac16cc448a"/>
-    <p:sldId xmlns:r="http://schemas.openxmlformats.org/officeDocument/2006/relationships" id="266" r:id="R0cf961721e814e58"/>
-    <p:sldId xmlns:r="http://schemas.openxmlformats.org/officeDocument/2006/relationships" id="267" r:id="R9800b02f6fd74aa5"/>
-    <p:sldId xmlns:r="http://schemas.openxmlformats.org/officeDocument/2006/relationships" id="268" r:id="Rdb77b66b01b34619"/>
+    <p:sldId xmlns:r="http://schemas.openxmlformats.org/officeDocument/2006/relationships" id="256" r:id="R522be11aecb14fba"/>
+    <p:sldId xmlns:r="http://schemas.openxmlformats.org/officeDocument/2006/relationships" id="257" r:id="R92a98fe4fea6498e"/>
+    <p:sldId xmlns:r="http://schemas.openxmlformats.org/officeDocument/2006/relationships" id="258" r:id="Re0804ebcb83144e1"/>
+    <p:sldId xmlns:r="http://schemas.openxmlformats.org/officeDocument/2006/relationships" id="259" r:id="R58190745fc9c42be"/>
+    <p:sldId xmlns:r="http://schemas.openxmlformats.org/officeDocument/2006/relationships" id="260" r:id="R2867d27f05e04660"/>
+    <p:sldId xmlns:r="http://schemas.openxmlformats.org/officeDocument/2006/relationships" id="261" r:id="Rfcadfaf37a43482a"/>
+    <p:sldId xmlns:r="http://schemas.openxmlformats.org/officeDocument/2006/relationships" id="262" r:id="R1a54a3251e27417b"/>
+    <p:sldId xmlns:r="http://schemas.openxmlformats.org/officeDocument/2006/relationships" id="263" r:id="Rdf13bcc74aaa477d"/>
+    <p:sldId xmlns:r="http://schemas.openxmlformats.org/officeDocument/2006/relationships" id="264" r:id="R6bc0ec87ff284529"/>
+    <p:sldId xmlns:r="http://schemas.openxmlformats.org/officeDocument/2006/relationships" id="265" r:id="Rd0429f80b36d4d52"/>
+    <p:sldId xmlns:r="http://schemas.openxmlformats.org/officeDocument/2006/relationships" id="266" r:id="Rc4ceae6fd5624465"/>
+    <p:sldId xmlns:r="http://schemas.openxmlformats.org/officeDocument/2006/relationships" id="267" r:id="R7f835db19d8e4676"/>
+    <p:sldId xmlns:r="http://schemas.openxmlformats.org/officeDocument/2006/relationships" id="268" r:id="Rd6f5fcdf079b4d0c"/>
+    <p:sldId xmlns:r="http://schemas.openxmlformats.org/officeDocument/2006/relationships" id="269" r:id="R6dac05f8e3be4081"/>
   </p:sldIdLst>
   <p:sldSz cx="12192000" cy="6858000"/>
   <p:notesSz cx="6858000" cy="9144000"/>
@@ -744,6 +745,72 @@
 </p:notes>
 </file>
 
+<file path=ppt/notesSlides/notesSlide14.xml><?xml version="1.0" encoding="utf-8"?>
+<p:notes xmlns:p="http://schemas.openxmlformats.org/presentationml/2006/main">
+  <p:cSld>
+    <p:spTree>
+      <p:nvGrpSpPr>
+        <p:cNvPr id="1" name=""/>
+        <p:cNvGrpSpPr/>
+        <p:nvPr/>
+      </p:nvGrpSpPr>
+      <p:grpSpPr>
+        <a:xfrm xmlns:a="http://schemas.openxmlformats.org/drawingml/2006/main"/>
+      </p:grpSpPr>
+      <p:sp>
+        <p:nvSpPr>
+          <p:cNvPr id="2" name="Slide Image Placeholder 1"/>
+          <p:cNvSpPr>
+            <a:spLocks xmlns:a="http://schemas.openxmlformats.org/drawingml/2006/main" noGrp="1"/>
+          </p:cNvSpPr>
+          <p:nvPr>
+            <p:ph type="sldImg" idx="0"/>
+          </p:nvPr>
+        </p:nvSpPr>
+        <p:spPr/>
+      </p:sp>
+      <p:sp>
+        <p:nvSpPr>
+          <p:cNvPr id="3" name="Notes Placeholder 2"/>
+          <p:cNvSpPr>
+            <a:spLocks xmlns:a="http://schemas.openxmlformats.org/drawingml/2006/main" noGrp="1"/>
+          </p:cNvSpPr>
+          <p:nvPr>
+            <p:ph type="body" idx="1"/>
+          </p:nvPr>
+        </p:nvSpPr>
+        <p:spPr/>
+        <p:txBody>
+          <a:bodyPr xmlns:a="http://schemas.openxmlformats.org/drawingml/2006/main"/>
+          <a:lstStyle xmlns:a="http://schemas.openxmlformats.org/drawingml/2006/main"/>
+          <a:p xmlns:a="http://schemas.openxmlformats.org/drawingml/2006/main"/>
+        </p:txBody>
+      </p:sp>
+      <p:sp>
+        <p:nvSpPr>
+          <p:cNvPr id="4" name="Slide Number Placeholder 3"/>
+          <p:cNvSpPr>
+            <a:spLocks xmlns:a="http://schemas.openxmlformats.org/drawingml/2006/main" noGrp="1"/>
+          </p:cNvSpPr>
+          <p:nvPr>
+            <p:ph type="sldNum" idx="5"/>
+          </p:nvPr>
+        </p:nvSpPr>
+        <p:spPr/>
+        <p:txBody>
+          <a:bodyPr xmlns:a="http://schemas.openxmlformats.org/drawingml/2006/main"/>
+          <a:lstStyle xmlns:a="http://schemas.openxmlformats.org/drawingml/2006/main"/>
+          <a:p xmlns:a="http://schemas.openxmlformats.org/drawingml/2006/main"/>
+        </p:txBody>
+      </p:sp>
+    </p:spTree>
+  </p:cSld>
+  <p:clrMapOvr>
+    <a:masterClrMapping xmlns:a="http://schemas.openxmlformats.org/drawingml/2006/main"/>
+  </p:clrMapOvr>
+</p:notes>
+</file>
+
 <file path=ppt/notesSlides/notesSlide2.xml><?xml version="1.0" encoding="utf-8"?>
 <p:notes xmlns:p="http://schemas.openxmlformats.org/presentationml/2006/main">
   <p:cSld>
@@ -1289,7 +1356,7 @@
           <p:cNvPr id="3" name="Title">
             <a:extLst xmlns:a="http://schemas.openxmlformats.org/drawingml/2006/main">
               <a:ext uri="{FF2B5EF4-FFF2-40B4-BE49-F238E27FC236}">
-                <a16:creationId xmlns:a16="http://schemas.microsoft.com/office/drawing/2014/main" id="{420217D6-D8E4-404F-8CA9-DB2890E8F53F}"/>
+                <a16:creationId xmlns:a16="http://schemas.microsoft.com/office/drawing/2014/main" id="{42124848-1869-40E8-B19E-8C132405BEEA}"/>
               </a:ext>
             </a:extLst>
           </p:cNvPr>
@@ -1446,7 +1513,7 @@
           <p:cNvPr id="2" name="Subtitle">
             <a:extLst xmlns:a="http://schemas.openxmlformats.org/drawingml/2006/main">
               <a:ext uri="{FF2B5EF4-FFF2-40B4-BE49-F238E27FC236}">
-                <a16:creationId xmlns:a16="http://schemas.microsoft.com/office/drawing/2014/main" id="{21F41855-A459-435B-880A-17D4AE63CB22}"/>
+                <a16:creationId xmlns:a16="http://schemas.microsoft.com/office/drawing/2014/main" id="{E2668080-3CB7-438A-B343-1352ED414F78}"/>
               </a:ext>
             </a:extLst>
           </p:cNvPr>
@@ -1620,7 +1687,7 @@
           <p:cNvPr id="2" name="Section title">
             <a:extLst xmlns:a="http://schemas.openxmlformats.org/drawingml/2006/main">
               <a:ext uri="{FF2B5EF4-FFF2-40B4-BE49-F238E27FC236}">
-                <a16:creationId xmlns:a16="http://schemas.microsoft.com/office/drawing/2014/main" id="{5B304433-6226-4F4F-9A94-7689B8AD7A07}"/>
+                <a16:creationId xmlns:a16="http://schemas.microsoft.com/office/drawing/2014/main" id="{162526E3-799C-48DB-9EF0-8F17777984AF}"/>
               </a:ext>
             </a:extLst>
           </p:cNvPr>
@@ -1794,7 +1861,7 @@
           <p:cNvPr id="3" name="Title">
             <a:extLst xmlns:a="http://schemas.openxmlformats.org/drawingml/2006/main">
               <a:ext uri="{FF2B5EF4-FFF2-40B4-BE49-F238E27FC236}">
-                <a16:creationId xmlns:a16="http://schemas.microsoft.com/office/drawing/2014/main" id="{9AA1AE6E-4105-4695-A43C-29B54CDDED23}"/>
+                <a16:creationId xmlns:a16="http://schemas.microsoft.com/office/drawing/2014/main" id="{A19C6A1E-B065-4B04-B1E1-E1F2B7B0B6B5}"/>
               </a:ext>
             </a:extLst>
           </p:cNvPr>
@@ -1951,7 +2018,7 @@
           <p:cNvPr id="2" name="Body">
             <a:extLst xmlns:a="http://schemas.openxmlformats.org/drawingml/2006/main">
               <a:ext uri="{FF2B5EF4-FFF2-40B4-BE49-F238E27FC236}">
-                <a16:creationId xmlns:a16="http://schemas.microsoft.com/office/drawing/2014/main" id="{4587B2E5-9BFB-467F-8097-D9B270A06B16}"/>
+                <a16:creationId xmlns:a16="http://schemas.microsoft.com/office/drawing/2014/main" id="{1D49E0E8-5E38-4CCE-A0A3-8E5668546E42}"/>
               </a:ext>
             </a:extLst>
           </p:cNvPr>
@@ -2125,7 +2192,7 @@
           <p:cNvPr id="4" name="Title">
             <a:extLst xmlns:a="http://schemas.openxmlformats.org/drawingml/2006/main">
               <a:ext uri="{FF2B5EF4-FFF2-40B4-BE49-F238E27FC236}">
-                <a16:creationId xmlns:a16="http://schemas.microsoft.com/office/drawing/2014/main" id="{6E1962FE-ACE5-4553-8224-676FCC56EF40}"/>
+                <a16:creationId xmlns:a16="http://schemas.microsoft.com/office/drawing/2014/main" id="{D02A6A15-FF97-489D-8216-F23F8D1117B1}"/>
               </a:ext>
             </a:extLst>
           </p:cNvPr>
@@ -2282,7 +2349,7 @@
           <p:cNvPr id="2" name="Left column">
             <a:extLst xmlns:a="http://schemas.openxmlformats.org/drawingml/2006/main">
               <a:ext uri="{FF2B5EF4-FFF2-40B4-BE49-F238E27FC236}">
-                <a16:creationId xmlns:a16="http://schemas.microsoft.com/office/drawing/2014/main" id="{812B8D28-ECEF-4824-A7A0-ED1F876A6EE2}"/>
+                <a16:creationId xmlns:a16="http://schemas.microsoft.com/office/drawing/2014/main" id="{FB754E3C-801A-4D83-976A-ED2D96B94627}"/>
               </a:ext>
             </a:extLst>
           </p:cNvPr>
@@ -2439,7 +2506,7 @@
           <p:cNvPr id="3" name="Right column">
             <a:extLst xmlns:a="http://schemas.openxmlformats.org/drawingml/2006/main">
               <a:ext uri="{FF2B5EF4-FFF2-40B4-BE49-F238E27FC236}">
-                <a16:creationId xmlns:a16="http://schemas.microsoft.com/office/drawing/2014/main" id="{D6B00852-BA8D-4FAC-834B-3D403618125C}"/>
+                <a16:creationId xmlns:a16="http://schemas.microsoft.com/office/drawing/2014/main" id="{196BE245-2363-4ED4-A831-1C01EB3CBA99}"/>
               </a:ext>
             </a:extLst>
           </p:cNvPr>
@@ -2613,7 +2680,7 @@
           <p:cNvPr id="3" name="Title">
             <a:extLst xmlns:a="http://schemas.openxmlformats.org/drawingml/2006/main">
               <a:ext uri="{FF2B5EF4-FFF2-40B4-BE49-F238E27FC236}">
-                <a16:creationId xmlns:a16="http://schemas.microsoft.com/office/drawing/2014/main" id="{34240B7B-868B-46E0-8CF9-D2DB1A77F473}"/>
+                <a16:creationId xmlns:a16="http://schemas.microsoft.com/office/drawing/2014/main" id="{D694B9B0-FBFA-4589-A9F0-AF56B027D2BF}"/>
               </a:ext>
             </a:extLst>
           </p:cNvPr>
@@ -2770,7 +2837,7 @@
           <p:cNvPr id="2" name="Left column">
             <a:extLst xmlns:a="http://schemas.openxmlformats.org/drawingml/2006/main">
               <a:ext uri="{FF2B5EF4-FFF2-40B4-BE49-F238E27FC236}">
-                <a16:creationId xmlns:a16="http://schemas.microsoft.com/office/drawing/2014/main" id="{FEB8586E-A5EC-40F7-999C-735DF8FD82D0}"/>
+                <a16:creationId xmlns:a16="http://schemas.microsoft.com/office/drawing/2014/main" id="{37FAF499-F98C-46F7-BE75-899136E6806F}"/>
               </a:ext>
             </a:extLst>
           </p:cNvPr>
@@ -2965,12 +3032,12 @@
   </p:cSld>
   <p:clrMap bg1="lt1" tx1="dk1" bg2="lt2" tx2="dk2" accent1="accent1" accent2="accent2" accent3="accent3" accent4="accent4" accent5="accent5" accent6="accent6" hlink="hlink" folHlink="folHlink"/>
   <p:sldLayoutIdLst>
-    <p:sldLayoutId xmlns:r="http://schemas.openxmlformats.org/officeDocument/2006/relationships" id="2147483649" r:id="Ra579c4135211435e"/>
-    <p:sldLayoutId xmlns:r="http://schemas.openxmlformats.org/officeDocument/2006/relationships" id="2147483650" r:id="Re0171e8ea11341eb"/>
-    <p:sldLayoutId xmlns:r="http://schemas.openxmlformats.org/officeDocument/2006/relationships" id="2147483651" r:id="R721327edf53b472b"/>
-    <p:sldLayoutId xmlns:r="http://schemas.openxmlformats.org/officeDocument/2006/relationships" id="2147483652" r:id="Rce4a998b6db048a7"/>
-    <p:sldLayoutId xmlns:r="http://schemas.openxmlformats.org/officeDocument/2006/relationships" id="2147483653" r:id="Rd64165753e90437e"/>
-    <p:sldLayoutId xmlns:r="http://schemas.openxmlformats.org/officeDocument/2006/relationships" id="2147483654" r:id="R2ae3068d8608431a"/>
+    <p:sldLayoutId xmlns:r="http://schemas.openxmlformats.org/officeDocument/2006/relationships" id="2147483649" r:id="R18dae30df5c14cec"/>
+    <p:sldLayoutId xmlns:r="http://schemas.openxmlformats.org/officeDocument/2006/relationships" id="2147483650" r:id="R9a5c23ec0a504558"/>
+    <p:sldLayoutId xmlns:r="http://schemas.openxmlformats.org/officeDocument/2006/relationships" id="2147483651" r:id="R6a28329b136f4534"/>
+    <p:sldLayoutId xmlns:r="http://schemas.openxmlformats.org/officeDocument/2006/relationships" id="2147483652" r:id="Rd6170012b5a54322"/>
+    <p:sldLayoutId xmlns:r="http://schemas.openxmlformats.org/officeDocument/2006/relationships" id="2147483653" r:id="Raafc64ac02d84cca"/>
+    <p:sldLayoutId xmlns:r="http://schemas.openxmlformats.org/officeDocument/2006/relationships" id="2147483654" r:id="Rfe0120ab643b4520"/>
   </p:sldLayoutIdLst>
   <p:txStyles>
     <p:titleStyle>
@@ -3521,7 +3588,7 @@
           <p:cNvPr id="9" name="">
             <a:extLst xmlns:a="http://schemas.openxmlformats.org/drawingml/2006/main">
               <a:ext uri="{FF2B5EF4-FFF2-40B4-BE49-F238E27FC236}">
-                <a16:creationId xmlns:a16="http://schemas.microsoft.com/office/drawing/2014/main" id="{3C46BF2F-5BBC-4AE6-A0A5-7CB190725E8A}"/>
+                <a16:creationId xmlns:a16="http://schemas.microsoft.com/office/drawing/2014/main" id="{18B34EE5-A61B-49DC-A15B-2DB3D1A097B9}"/>
               </a:ext>
             </a:extLst>
           </p:cNvPr>
@@ -3579,7 +3646,7 @@
           <p:cNvPr id="2" name="">
             <a:extLst xmlns:a="http://schemas.openxmlformats.org/drawingml/2006/main">
               <a:ext uri="{FF2B5EF4-FFF2-40B4-BE49-F238E27FC236}">
-                <a16:creationId xmlns:a16="http://schemas.microsoft.com/office/drawing/2014/main" id="{6E2EB0E7-E9D6-42C9-BA62-8E732CF74279}"/>
+                <a16:creationId xmlns:a16="http://schemas.microsoft.com/office/drawing/2014/main" id="{8CB232E2-4C26-477A-83AC-F0690AFB34B6}"/>
               </a:ext>
             </a:extLst>
           </p:cNvPr>
@@ -3637,7 +3704,7 @@
           <p:cNvPr id="3" name="">
             <a:extLst xmlns:a="http://schemas.openxmlformats.org/drawingml/2006/main">
               <a:ext uri="{FF2B5EF4-FFF2-40B4-BE49-F238E27FC236}">
-                <a16:creationId xmlns:a16="http://schemas.microsoft.com/office/drawing/2014/main" id="{CD83C13D-83FF-42FC-89FC-2264FC910EE9}"/>
+                <a16:creationId xmlns:a16="http://schemas.microsoft.com/office/drawing/2014/main" id="{EC7BBB5A-CED2-464E-AC3B-833AE80AEC76}"/>
               </a:ext>
             </a:extLst>
           </p:cNvPr>
@@ -3695,7 +3762,7 @@
           <p:cNvPr id="4" name="">
             <a:extLst xmlns:a="http://schemas.openxmlformats.org/drawingml/2006/main">
               <a:ext uri="{FF2B5EF4-FFF2-40B4-BE49-F238E27FC236}">
-                <a16:creationId xmlns:a16="http://schemas.microsoft.com/office/drawing/2014/main" id="{67543FF6-5C85-42ED-9772-05211393D6F8}"/>
+                <a16:creationId xmlns:a16="http://schemas.microsoft.com/office/drawing/2014/main" id="{422DE386-C8D3-4832-B415-2B41908062FF}"/>
               </a:ext>
             </a:extLst>
           </p:cNvPr>
@@ -3753,7 +3820,7 @@
           <p:cNvPr id="5" name="">
             <a:extLst xmlns:a="http://schemas.openxmlformats.org/drawingml/2006/main">
               <a:ext uri="{FF2B5EF4-FFF2-40B4-BE49-F238E27FC236}">
-                <a16:creationId xmlns:a16="http://schemas.microsoft.com/office/drawing/2014/main" id="{4EF5774F-7689-45DC-802A-F8E027502D5F}"/>
+                <a16:creationId xmlns:a16="http://schemas.microsoft.com/office/drawing/2014/main" id="{D358C309-3F53-42B3-8B70-38D1B4F34DBB}"/>
               </a:ext>
             </a:extLst>
           </p:cNvPr>
@@ -3788,7 +3855,7 @@
           <p:cNvPr id="6" name="">
             <a:extLst xmlns:a="http://schemas.openxmlformats.org/drawingml/2006/main">
               <a:ext uri="{FF2B5EF4-FFF2-40B4-BE49-F238E27FC236}">
-                <a16:creationId xmlns:a16="http://schemas.microsoft.com/office/drawing/2014/main" id="{3490C45F-9964-4299-B724-7D3A11BC0DBD}"/>
+                <a16:creationId xmlns:a16="http://schemas.microsoft.com/office/drawing/2014/main" id="{96720784-1542-4BD6-828D-1E784CCDC951}"/>
               </a:ext>
             </a:extLst>
           </p:cNvPr>
@@ -3846,7 +3913,7 @@
           <p:cNvPr id="7" name="">
             <a:extLst xmlns:a="http://schemas.openxmlformats.org/drawingml/2006/main">
               <a:ext uri="{FF2B5EF4-FFF2-40B4-BE49-F238E27FC236}">
-                <a16:creationId xmlns:a16="http://schemas.microsoft.com/office/drawing/2014/main" id="{480821E0-20F1-405B-A567-073B363EC600}"/>
+                <a16:creationId xmlns:a16="http://schemas.microsoft.com/office/drawing/2014/main" id="{149E827E-B1FE-460C-855B-0D11611C3C64}"/>
               </a:ext>
             </a:extLst>
           </p:cNvPr>
@@ -3904,7 +3971,7 @@
           <p:cNvPr id="8" name="">
             <a:extLst xmlns:a="http://schemas.openxmlformats.org/drawingml/2006/main">
               <a:ext uri="{FF2B5EF4-FFF2-40B4-BE49-F238E27FC236}">
-                <a16:creationId xmlns:a16="http://schemas.microsoft.com/office/drawing/2014/main" id="{9AB23BF6-B155-4735-A2E7-B081725288FB}"/>
+                <a16:creationId xmlns:a16="http://schemas.microsoft.com/office/drawing/2014/main" id="{FE60C78A-42BE-443F-A8DC-BE222A8EDAE0}"/>
               </a:ext>
             </a:extLst>
           </p:cNvPr>
@@ -3960,7 +4027,7 @@
     </p:spTree>
     <p:extLst>
       <p:ext uri="{BB962C8B-B14F-4D97-AF65-F5344CB8AC3E}">
-        <p14:creationId xmlns:p14="http://schemas.microsoft.com/office/powerpoint/2010/main" val="1860695263"/>
+        <p14:creationId xmlns:p14="http://schemas.microsoft.com/office/powerpoint/2010/main" val="1402986071"/>
       </p:ext>
     </p:extLst>
   </p:cSld>
@@ -3991,7 +4058,7 @@
           <p:cNvPr id="18" name="">
             <a:extLst xmlns:a="http://schemas.openxmlformats.org/drawingml/2006/main">
               <a:ext uri="{FF2B5EF4-FFF2-40B4-BE49-F238E27FC236}">
-                <a16:creationId xmlns:a16="http://schemas.microsoft.com/office/drawing/2014/main" id="{7413AC39-B5D0-4709-B786-EFB005A19351}"/>
+                <a16:creationId xmlns:a16="http://schemas.microsoft.com/office/drawing/2014/main" id="{16F572EC-F145-4649-8172-C2A64799B146}"/>
               </a:ext>
             </a:extLst>
           </p:cNvPr>
@@ -4049,7 +4116,7 @@
           <p:cNvPr id="2" name="">
             <a:extLst xmlns:a="http://schemas.openxmlformats.org/drawingml/2006/main">
               <a:ext uri="{FF2B5EF4-FFF2-40B4-BE49-F238E27FC236}">
-                <a16:creationId xmlns:a16="http://schemas.microsoft.com/office/drawing/2014/main" id="{29076CED-C304-4664-912E-BC74C789DB7E}"/>
+                <a16:creationId xmlns:a16="http://schemas.microsoft.com/office/drawing/2014/main" id="{71F096AD-B6AE-4E81-B516-CC3A497ECE84}"/>
               </a:ext>
             </a:extLst>
           </p:cNvPr>
@@ -4107,7 +4174,7 @@
           <p:cNvPr id="3" name="">
             <a:extLst xmlns:a="http://schemas.openxmlformats.org/drawingml/2006/main">
               <a:ext uri="{FF2B5EF4-FFF2-40B4-BE49-F238E27FC236}">
-                <a16:creationId xmlns:a16="http://schemas.microsoft.com/office/drawing/2014/main" id="{E42F8B5B-5F2E-4319-9094-F128E2C1FE8D}"/>
+                <a16:creationId xmlns:a16="http://schemas.microsoft.com/office/drawing/2014/main" id="{9B2D05AB-74FF-45D0-93CB-1329D6FAE19E}"/>
               </a:ext>
             </a:extLst>
           </p:cNvPr>
@@ -4165,7 +4232,7 @@
           <p:cNvPr id="4" name="">
             <a:extLst xmlns:a="http://schemas.openxmlformats.org/drawingml/2006/main">
               <a:ext uri="{FF2B5EF4-FFF2-40B4-BE49-F238E27FC236}">
-                <a16:creationId xmlns:a16="http://schemas.microsoft.com/office/drawing/2014/main" id="{D657CA85-AD62-4E0A-B85E-ADEA6F2D7B17}"/>
+                <a16:creationId xmlns:a16="http://schemas.microsoft.com/office/drawing/2014/main" id="{79D21BB5-4A9F-43C2-AC7D-C8D658EDD55A}"/>
               </a:ext>
             </a:extLst>
           </p:cNvPr>
@@ -4198,7 +4265,7 @@
           <p:cNvPr id="5" name="">
             <a:extLst xmlns:a="http://schemas.openxmlformats.org/drawingml/2006/main">
               <a:ext uri="{FF2B5EF4-FFF2-40B4-BE49-F238E27FC236}">
-                <a16:creationId xmlns:a16="http://schemas.microsoft.com/office/drawing/2014/main" id="{1F8625C0-2028-4971-8057-C836806DAAD6}"/>
+                <a16:creationId xmlns:a16="http://schemas.microsoft.com/office/drawing/2014/main" id="{A8471BCF-5B22-4041-A166-27C1D48091BB}"/>
               </a:ext>
             </a:extLst>
           </p:cNvPr>
@@ -4231,7 +4298,7 @@
           <p:cNvPr id="6" name="">
             <a:extLst xmlns:a="http://schemas.openxmlformats.org/drawingml/2006/main">
               <a:ext uri="{FF2B5EF4-FFF2-40B4-BE49-F238E27FC236}">
-                <a16:creationId xmlns:a16="http://schemas.microsoft.com/office/drawing/2014/main" id="{AE91A52A-3F5C-4468-8EE7-0CABC742AC05}"/>
+                <a16:creationId xmlns:a16="http://schemas.microsoft.com/office/drawing/2014/main" id="{9C030625-5803-408A-B307-9B33E6E2B32B}"/>
               </a:ext>
             </a:extLst>
           </p:cNvPr>
@@ -4289,7 +4356,7 @@
           <p:cNvPr id="7" name="">
             <a:extLst xmlns:a="http://schemas.openxmlformats.org/drawingml/2006/main">
               <a:ext uri="{FF2B5EF4-FFF2-40B4-BE49-F238E27FC236}">
-                <a16:creationId xmlns:a16="http://schemas.microsoft.com/office/drawing/2014/main" id="{7ECD0AEB-2C4D-401E-9272-73902CF37606}"/>
+                <a16:creationId xmlns:a16="http://schemas.microsoft.com/office/drawing/2014/main" id="{08189D9E-E51E-4D3D-8604-7E78CFB5EDC7}"/>
               </a:ext>
             </a:extLst>
           </p:cNvPr>
@@ -4322,7 +4389,7 @@
           <p:cNvPr id="8" name="">
             <a:extLst xmlns:a="http://schemas.openxmlformats.org/drawingml/2006/main">
               <a:ext uri="{FF2B5EF4-FFF2-40B4-BE49-F238E27FC236}">
-                <a16:creationId xmlns:a16="http://schemas.microsoft.com/office/drawing/2014/main" id="{C9BACD0F-E7D0-4FC6-9AD4-BA1F0132D625}"/>
+                <a16:creationId xmlns:a16="http://schemas.microsoft.com/office/drawing/2014/main" id="{8050D4C4-D083-46BC-B7D7-B7B487500CF8}"/>
               </a:ext>
             </a:extLst>
           </p:cNvPr>
@@ -4380,7 +4447,7 @@
           <p:cNvPr id="9" name="">
             <a:extLst xmlns:a="http://schemas.openxmlformats.org/drawingml/2006/main">
               <a:ext uri="{FF2B5EF4-FFF2-40B4-BE49-F238E27FC236}">
-                <a16:creationId xmlns:a16="http://schemas.microsoft.com/office/drawing/2014/main" id="{42280551-56CA-4FB8-AF94-021ECE42D69B}"/>
+                <a16:creationId xmlns:a16="http://schemas.microsoft.com/office/drawing/2014/main" id="{3B6E670E-4D78-46EB-89BA-F6A0761022BD}"/>
               </a:ext>
             </a:extLst>
           </p:cNvPr>
@@ -4413,7 +4480,7 @@
           <p:cNvPr id="10" name="">
             <a:extLst xmlns:a="http://schemas.openxmlformats.org/drawingml/2006/main">
               <a:ext uri="{FF2B5EF4-FFF2-40B4-BE49-F238E27FC236}">
-                <a16:creationId xmlns:a16="http://schemas.microsoft.com/office/drawing/2014/main" id="{0FEDCD56-9ED4-4C04-8830-F61CC40E0C7E}"/>
+                <a16:creationId xmlns:a16="http://schemas.microsoft.com/office/drawing/2014/main" id="{6C76CC06-CA0F-42C0-9103-64E2EF727650}"/>
               </a:ext>
             </a:extLst>
           </p:cNvPr>
@@ -4471,7 +4538,7 @@
           <p:cNvPr id="11" name="">
             <a:extLst xmlns:a="http://schemas.openxmlformats.org/drawingml/2006/main">
               <a:ext uri="{FF2B5EF4-FFF2-40B4-BE49-F238E27FC236}">
-                <a16:creationId xmlns:a16="http://schemas.microsoft.com/office/drawing/2014/main" id="{CB7B1B31-7CD9-4715-8A48-5CB54DB9BD11}"/>
+                <a16:creationId xmlns:a16="http://schemas.microsoft.com/office/drawing/2014/main" id="{164FE275-1054-4EC2-8AF9-6A6400BACF53}"/>
               </a:ext>
             </a:extLst>
           </p:cNvPr>
@@ -4504,7 +4571,7 @@
           <p:cNvPr id="12" name="">
             <a:extLst xmlns:a="http://schemas.openxmlformats.org/drawingml/2006/main">
               <a:ext uri="{FF2B5EF4-FFF2-40B4-BE49-F238E27FC236}">
-                <a16:creationId xmlns:a16="http://schemas.microsoft.com/office/drawing/2014/main" id="{E2C379F5-4BD6-44BB-85B1-B924A071056F}"/>
+                <a16:creationId xmlns:a16="http://schemas.microsoft.com/office/drawing/2014/main" id="{ADEB9870-3FC5-4EA6-8D89-F524BEB4FA1E}"/>
               </a:ext>
             </a:extLst>
           </p:cNvPr>
@@ -4562,7 +4629,7 @@
           <p:cNvPr id="13" name="">
             <a:extLst xmlns:a="http://schemas.openxmlformats.org/drawingml/2006/main">
               <a:ext uri="{FF2B5EF4-FFF2-40B4-BE49-F238E27FC236}">
-                <a16:creationId xmlns:a16="http://schemas.microsoft.com/office/drawing/2014/main" id="{7A571586-716A-412D-95C0-FFB62501707E}"/>
+                <a16:creationId xmlns:a16="http://schemas.microsoft.com/office/drawing/2014/main" id="{21D825E2-55BB-4D15-8015-8934E14283A0}"/>
               </a:ext>
             </a:extLst>
           </p:cNvPr>
@@ -4595,7 +4662,7 @@
           <p:cNvPr id="14" name="">
             <a:extLst xmlns:a="http://schemas.openxmlformats.org/drawingml/2006/main">
               <a:ext uri="{FF2B5EF4-FFF2-40B4-BE49-F238E27FC236}">
-                <a16:creationId xmlns:a16="http://schemas.microsoft.com/office/drawing/2014/main" id="{4F2B836B-ECBB-4283-B36F-CFFE4FD83A3F}"/>
+                <a16:creationId xmlns:a16="http://schemas.microsoft.com/office/drawing/2014/main" id="{4D86B611-B40A-4836-94BC-96EB823671D7}"/>
               </a:ext>
             </a:extLst>
           </p:cNvPr>
@@ -4653,7 +4720,7 @@
           <p:cNvPr id="15" name="">
             <a:extLst xmlns:a="http://schemas.openxmlformats.org/drawingml/2006/main">
               <a:ext uri="{FF2B5EF4-FFF2-40B4-BE49-F238E27FC236}">
-                <a16:creationId xmlns:a16="http://schemas.microsoft.com/office/drawing/2014/main" id="{E65BE1AB-578C-4F37-8EBD-86AF38C9C78E}"/>
+                <a16:creationId xmlns:a16="http://schemas.microsoft.com/office/drawing/2014/main" id="{4A039707-9B34-435F-8AA8-A49885B6936A}"/>
               </a:ext>
             </a:extLst>
           </p:cNvPr>
@@ -4686,7 +4753,7 @@
           <p:cNvPr id="16" name="">
             <a:extLst xmlns:a="http://schemas.openxmlformats.org/drawingml/2006/main">
               <a:ext uri="{FF2B5EF4-FFF2-40B4-BE49-F238E27FC236}">
-                <a16:creationId xmlns:a16="http://schemas.microsoft.com/office/drawing/2014/main" id="{407A5B4E-D43F-431E-B627-07AAA25C9B6E}"/>
+                <a16:creationId xmlns:a16="http://schemas.microsoft.com/office/drawing/2014/main" id="{6DD18AAA-AE07-49F6-9D0E-CFC7AD7FABFD}"/>
               </a:ext>
             </a:extLst>
           </p:cNvPr>
@@ -4744,7 +4811,7 @@
           <p:cNvPr id="17" name="">
             <a:extLst xmlns:a="http://schemas.openxmlformats.org/drawingml/2006/main">
               <a:ext uri="{FF2B5EF4-FFF2-40B4-BE49-F238E27FC236}">
-                <a16:creationId xmlns:a16="http://schemas.microsoft.com/office/drawing/2014/main" id="{82C6B7FF-EE42-4543-8BBC-A74DB86C301D}"/>
+                <a16:creationId xmlns:a16="http://schemas.microsoft.com/office/drawing/2014/main" id="{8FD3129D-BA64-4F44-BA59-3D6B93A389DE}"/>
               </a:ext>
             </a:extLst>
           </p:cNvPr>
@@ -4800,7 +4867,7 @@
     </p:spTree>
     <p:extLst>
       <p:ext uri="{BB962C8B-B14F-4D97-AF65-F5344CB8AC3E}">
-        <p14:creationId xmlns:p14="http://schemas.microsoft.com/office/powerpoint/2010/main" val="2089075927"/>
+        <p14:creationId xmlns:p14="http://schemas.microsoft.com/office/powerpoint/2010/main" val="976855479"/>
       </p:ext>
     </p:extLst>
   </p:cSld>
@@ -4831,7 +4898,7 @@
           <p:cNvPr id="22" name="">
             <a:extLst xmlns:a="http://schemas.openxmlformats.org/drawingml/2006/main">
               <a:ext uri="{FF2B5EF4-FFF2-40B4-BE49-F238E27FC236}">
-                <a16:creationId xmlns:a16="http://schemas.microsoft.com/office/drawing/2014/main" id="{88567B37-7F1A-4614-BA8B-7DF6102115E1}"/>
+                <a16:creationId xmlns:a16="http://schemas.microsoft.com/office/drawing/2014/main" id="{849BF378-3719-440C-942A-485C1EC46301}"/>
               </a:ext>
             </a:extLst>
           </p:cNvPr>
@@ -4889,7 +4956,7 @@
           <p:cNvPr id="2" name="">
             <a:extLst xmlns:a="http://schemas.openxmlformats.org/drawingml/2006/main">
               <a:ext uri="{FF2B5EF4-FFF2-40B4-BE49-F238E27FC236}">
-                <a16:creationId xmlns:a16="http://schemas.microsoft.com/office/drawing/2014/main" id="{787EB8FF-B86B-4E0B-9BE3-868BE95D05B9}"/>
+                <a16:creationId xmlns:a16="http://schemas.microsoft.com/office/drawing/2014/main" id="{A9408D57-672A-4B93-ACDA-4E0323E4F976}"/>
               </a:ext>
             </a:extLst>
           </p:cNvPr>
@@ -4937,7 +5004,7 @@
                   <a:srgbClr val="020617"/>
                 </a:solidFill>
               </a:rPr>
-              <a:t>Horizontal and vertical scaling</a:t>
+              <a:t>Lead operations upgrades</a:t>
             </a:r>
           </a:p>
         </p:txBody>
@@ -4947,7 +5014,7 @@
           <p:cNvPr id="3" name="">
             <a:extLst xmlns:a="http://schemas.openxmlformats.org/drawingml/2006/main">
               <a:ext uri="{FF2B5EF4-FFF2-40B4-BE49-F238E27FC236}">
-                <a16:creationId xmlns:a16="http://schemas.microsoft.com/office/drawing/2014/main" id="{F2FEE8A5-C20E-44CB-81BC-1B1F042478B0}"/>
+                <a16:creationId xmlns:a16="http://schemas.microsoft.com/office/drawing/2014/main" id="{AEAFA75E-96B9-4005-874A-B66C9323D9A7}"/>
               </a:ext>
             </a:extLst>
           </p:cNvPr>
@@ -4995,7 +5062,7 @@
                   <a:srgbClr val="334155"/>
                 </a:solidFill>
               </a:rPr>
-              <a:t>Both scaling styles can work together. The right choice depends on traffic, database load and operational cost.</a:t>
+              <a:t>These additions improve daily work for CRM users without changing the current lead CRUD foundation.</a:t>
             </a:r>
           </a:p>
         </p:txBody>
@@ -5005,7 +5072,7 @@
           <p:cNvPr id="4" name="">
             <a:extLst xmlns:a="http://schemas.openxmlformats.org/drawingml/2006/main">
               <a:ext uri="{FF2B5EF4-FFF2-40B4-BE49-F238E27FC236}">
-                <a16:creationId xmlns:a16="http://schemas.microsoft.com/office/drawing/2014/main" id="{55CCFEEC-9EB0-474C-B965-5ACE7C99ACE9}"/>
+                <a16:creationId xmlns:a16="http://schemas.microsoft.com/office/drawing/2014/main" id="{AB10C8C4-DD04-4587-82F6-C92603221F9B}"/>
               </a:ext>
             </a:extLst>
           </p:cNvPr>
@@ -5038,7 +5105,7 @@
           <p:cNvPr id="5" name="">
             <a:extLst xmlns:a="http://schemas.openxmlformats.org/drawingml/2006/main">
               <a:ext uri="{FF2B5EF4-FFF2-40B4-BE49-F238E27FC236}">
-                <a16:creationId xmlns:a16="http://schemas.microsoft.com/office/drawing/2014/main" id="{A762EC15-D632-4E07-AB40-7FBA3683FFB3}"/>
+                <a16:creationId xmlns:a16="http://schemas.microsoft.com/office/drawing/2014/main" id="{BFC400F0-0250-4A30-89C1-1CA1B4276548}"/>
               </a:ext>
             </a:extLst>
           </p:cNvPr>
@@ -5073,7 +5140,7 @@
           <p:cNvPr id="6" name="">
             <a:extLst xmlns:a="http://schemas.openxmlformats.org/drawingml/2006/main">
               <a:ext uri="{FF2B5EF4-FFF2-40B4-BE49-F238E27FC236}">
-                <a16:creationId xmlns:a16="http://schemas.microsoft.com/office/drawing/2014/main" id="{5903CBCF-278C-479A-9A28-1DEEB46621EE}"/>
+                <a16:creationId xmlns:a16="http://schemas.microsoft.com/office/drawing/2014/main" id="{9FEAAF58-94C1-4ED4-9860-4B7663C2E71E}"/>
               </a:ext>
             </a:extLst>
           </p:cNvPr>
@@ -5106,7 +5173,7 @@
           <p:cNvPr id="7" name="">
             <a:extLst xmlns:a="http://schemas.openxmlformats.org/drawingml/2006/main">
               <a:ext uri="{FF2B5EF4-FFF2-40B4-BE49-F238E27FC236}">
-                <a16:creationId xmlns:a16="http://schemas.microsoft.com/office/drawing/2014/main" id="{0334DD96-1DFD-47E3-8F4F-1368DB46BF2D}"/>
+                <a16:creationId xmlns:a16="http://schemas.microsoft.com/office/drawing/2014/main" id="{0B217BFE-4ABA-44AC-B8C8-C727D616723F}"/>
               </a:ext>
             </a:extLst>
           </p:cNvPr>
@@ -5154,7 +5221,7 @@
                   <a:srgbClr val="020617"/>
                 </a:solidFill>
               </a:rPr>
-              <a:t>Vertical scaling</a:t>
+              <a:t>Lead assignment</a:t>
             </a:r>
           </a:p>
         </p:txBody>
@@ -5164,7 +5231,7 @@
           <p:cNvPr id="8" name="">
             <a:extLst xmlns:a="http://schemas.openxmlformats.org/drawingml/2006/main">
               <a:ext uri="{FF2B5EF4-FFF2-40B4-BE49-F238E27FC236}">
-                <a16:creationId xmlns:a16="http://schemas.microsoft.com/office/drawing/2014/main" id="{E332D1B4-FAB4-4CFF-B7B4-10787BFB8B9E}"/>
+                <a16:creationId xmlns:a16="http://schemas.microsoft.com/office/drawing/2014/main" id="{A0A9C870-9E34-41F2-840E-1D5500AC93B1}"/>
               </a:ext>
             </a:extLst>
           </p:cNvPr>
@@ -5212,7 +5279,7 @@
                   <a:srgbClr val="334155"/>
                 </a:solidFill>
               </a:rPr>
-              <a:t>Increase CPU, RAM and database capacity. Use a larger Render instance and Supabase compute plan when traffic grows gradually.</a:t>
+              <a:t>Assign each lead to a CRM user, show owner filters and prevent duplicate follow-up.</a:t>
             </a:r>
           </a:p>
         </p:txBody>
@@ -5222,7 +5289,7 @@
           <p:cNvPr id="9" name="">
             <a:extLst xmlns:a="http://schemas.openxmlformats.org/drawingml/2006/main">
               <a:ext uri="{FF2B5EF4-FFF2-40B4-BE49-F238E27FC236}">
-                <a16:creationId xmlns:a16="http://schemas.microsoft.com/office/drawing/2014/main" id="{38AD04E4-0746-4CB7-B402-90EAC7DB8D71}"/>
+                <a16:creationId xmlns:a16="http://schemas.microsoft.com/office/drawing/2014/main" id="{54B3FB49-6FC7-414E-9A39-B3C348DFFE0F}"/>
               </a:ext>
             </a:extLst>
           </p:cNvPr>
@@ -5257,7 +5324,7 @@
           <p:cNvPr id="10" name="">
             <a:extLst xmlns:a="http://schemas.openxmlformats.org/drawingml/2006/main">
               <a:ext uri="{FF2B5EF4-FFF2-40B4-BE49-F238E27FC236}">
-                <a16:creationId xmlns:a16="http://schemas.microsoft.com/office/drawing/2014/main" id="{068F462C-B81A-4288-BE99-0FC3E8B1C3A2}"/>
+                <a16:creationId xmlns:a16="http://schemas.microsoft.com/office/drawing/2014/main" id="{759404FB-99E3-4344-B29A-426B934CE1E9}"/>
               </a:ext>
             </a:extLst>
           </p:cNvPr>
@@ -5290,7 +5357,7 @@
           <p:cNvPr id="11" name="">
             <a:extLst xmlns:a="http://schemas.openxmlformats.org/drawingml/2006/main">
               <a:ext uri="{FF2B5EF4-FFF2-40B4-BE49-F238E27FC236}">
-                <a16:creationId xmlns:a16="http://schemas.microsoft.com/office/drawing/2014/main" id="{5A374843-7594-4E07-B31A-1ADF8329BB7D}"/>
+                <a16:creationId xmlns:a16="http://schemas.microsoft.com/office/drawing/2014/main" id="{17305867-929F-4B2A-8D6A-582F092CAFC3}"/>
               </a:ext>
             </a:extLst>
           </p:cNvPr>
@@ -5338,7 +5405,7 @@
                   <a:srgbClr val="020617"/>
                 </a:solidFill>
               </a:rPr>
-              <a:t>Horizontal scaling</a:t>
+              <a:t>Follow-up calendar</a:t>
             </a:r>
           </a:p>
         </p:txBody>
@@ -5348,7 +5415,7 @@
           <p:cNvPr id="12" name="">
             <a:extLst xmlns:a="http://schemas.openxmlformats.org/drawingml/2006/main">
               <a:ext uri="{FF2B5EF4-FFF2-40B4-BE49-F238E27FC236}">
-                <a16:creationId xmlns:a16="http://schemas.microsoft.com/office/drawing/2014/main" id="{54FE8785-F739-44F2-9435-A4B27F3C2269}"/>
+                <a16:creationId xmlns:a16="http://schemas.microsoft.com/office/drawing/2014/main" id="{48229259-9315-4D42-9104-9735E1F67961}"/>
               </a:ext>
             </a:extLst>
           </p:cNvPr>
@@ -5396,7 +5463,7 @@
                   <a:srgbClr val="334155"/>
                 </a:solidFill>
               </a:rPr>
-              <a:t>Run multiple stateless API instances behind a load balancer. Keep JWT auth and database state outside the server.</a:t>
+              <a:t>Store due dates, reminders and site visit slots for each lead.</a:t>
             </a:r>
           </a:p>
         </p:txBody>
@@ -5406,7 +5473,7 @@
           <p:cNvPr id="13" name="">
             <a:extLst xmlns:a="http://schemas.openxmlformats.org/drawingml/2006/main">
               <a:ext uri="{FF2B5EF4-FFF2-40B4-BE49-F238E27FC236}">
-                <a16:creationId xmlns:a16="http://schemas.microsoft.com/office/drawing/2014/main" id="{0F107F27-A50A-4062-85AF-F800C21EAFC7}"/>
+                <a16:creationId xmlns:a16="http://schemas.microsoft.com/office/drawing/2014/main" id="{9E71E32C-4113-4F9D-9994-FD576DCD2927}"/>
               </a:ext>
             </a:extLst>
           </p:cNvPr>
@@ -5441,7 +5508,7 @@
           <p:cNvPr id="14" name="">
             <a:extLst xmlns:a="http://schemas.openxmlformats.org/drawingml/2006/main">
               <a:ext uri="{FF2B5EF4-FFF2-40B4-BE49-F238E27FC236}">
-                <a16:creationId xmlns:a16="http://schemas.microsoft.com/office/drawing/2014/main" id="{D2E49255-46AE-4794-8F8E-F03BA0585A8F}"/>
+                <a16:creationId xmlns:a16="http://schemas.microsoft.com/office/drawing/2014/main" id="{ABD5C12E-C750-4CAE-B967-CB1EE0683024}"/>
               </a:ext>
             </a:extLst>
           </p:cNvPr>
@@ -5474,7 +5541,7 @@
           <p:cNvPr id="15" name="">
             <a:extLst xmlns:a="http://schemas.openxmlformats.org/drawingml/2006/main">
               <a:ext uri="{FF2B5EF4-FFF2-40B4-BE49-F238E27FC236}">
-                <a16:creationId xmlns:a16="http://schemas.microsoft.com/office/drawing/2014/main" id="{54C54581-098C-4B4B-915B-75E68F01D485}"/>
+                <a16:creationId xmlns:a16="http://schemas.microsoft.com/office/drawing/2014/main" id="{E3B0B90D-4610-44F8-8469-B07A16FB7171}"/>
               </a:ext>
             </a:extLst>
           </p:cNvPr>
@@ -5522,7 +5589,7 @@
                   <a:srgbClr val="020617"/>
                 </a:solidFill>
               </a:rPr>
-              <a:t>Database scaling</a:t>
+              <a:t>Kanban pipeline</a:t>
             </a:r>
           </a:p>
         </p:txBody>
@@ -5532,7 +5599,7 @@
           <p:cNvPr id="16" name="">
             <a:extLst xmlns:a="http://schemas.openxmlformats.org/drawingml/2006/main">
               <a:ext uri="{FF2B5EF4-FFF2-40B4-BE49-F238E27FC236}">
-                <a16:creationId xmlns:a16="http://schemas.microsoft.com/office/drawing/2014/main" id="{A871A62C-0434-4849-B750-AB550D319942}"/>
+                <a16:creationId xmlns:a16="http://schemas.microsoft.com/office/drawing/2014/main" id="{93E886BD-092F-4E20-A7EF-E1464639434D}"/>
               </a:ext>
             </a:extLst>
           </p:cNvPr>
@@ -5580,7 +5647,7 @@
                   <a:srgbClr val="334155"/>
                 </a:solidFill>
               </a:rPr>
-              <a:t>Use Supabase pooler, indexes, read replicas for reporting and query pagination to reduce pressure on the primary database.</a:t>
+              <a:t>Drag leads across status columns while preserving the existing status API.</a:t>
             </a:r>
           </a:p>
         </p:txBody>
@@ -5590,7 +5657,7 @@
           <p:cNvPr id="17" name="">
             <a:extLst xmlns:a="http://schemas.openxmlformats.org/drawingml/2006/main">
               <a:ext uri="{FF2B5EF4-FFF2-40B4-BE49-F238E27FC236}">
-                <a16:creationId xmlns:a16="http://schemas.microsoft.com/office/drawing/2014/main" id="{7C428B5E-8040-4F10-8E1F-8B25AD580EE4}"/>
+                <a16:creationId xmlns:a16="http://schemas.microsoft.com/office/drawing/2014/main" id="{5B2583B3-8BA3-45F1-A016-0E35A7DB3DA7}"/>
               </a:ext>
             </a:extLst>
           </p:cNvPr>
@@ -5625,7 +5692,7 @@
           <p:cNvPr id="18" name="">
             <a:extLst xmlns:a="http://schemas.openxmlformats.org/drawingml/2006/main">
               <a:ext uri="{FF2B5EF4-FFF2-40B4-BE49-F238E27FC236}">
-                <a16:creationId xmlns:a16="http://schemas.microsoft.com/office/drawing/2014/main" id="{69CBDC4B-858F-4381-8E2C-86B639071C24}"/>
+                <a16:creationId xmlns:a16="http://schemas.microsoft.com/office/drawing/2014/main" id="{A3093B1F-EAFA-48D7-AFD9-B202DB0504BC}"/>
               </a:ext>
             </a:extLst>
           </p:cNvPr>
@@ -5658,7 +5725,7 @@
           <p:cNvPr id="19" name="">
             <a:extLst xmlns:a="http://schemas.openxmlformats.org/drawingml/2006/main">
               <a:ext uri="{FF2B5EF4-FFF2-40B4-BE49-F238E27FC236}">
-                <a16:creationId xmlns:a16="http://schemas.microsoft.com/office/drawing/2014/main" id="{CF51A60B-C6B3-4D86-8FCC-D3DBC0CF25E3}"/>
+                <a16:creationId xmlns:a16="http://schemas.microsoft.com/office/drawing/2014/main" id="{8E50D11C-1ECD-4591-83B0-08E58846FDD9}"/>
               </a:ext>
             </a:extLst>
           </p:cNvPr>
@@ -5706,7 +5773,7 @@
                   <a:srgbClr val="020617"/>
                 </a:solidFill>
               </a:rPr>
-              <a:t>Frontend scaling</a:t>
+              <a:t>Duplicate detection</a:t>
             </a:r>
           </a:p>
         </p:txBody>
@@ -5716,7 +5783,7 @@
           <p:cNvPr id="20" name="">
             <a:extLst xmlns:a="http://schemas.openxmlformats.org/drawingml/2006/main">
               <a:ext uri="{FF2B5EF4-FFF2-40B4-BE49-F238E27FC236}">
-                <a16:creationId xmlns:a16="http://schemas.microsoft.com/office/drawing/2014/main" id="{33D93EB3-5BCD-4B9E-BD71-B4D28B54A5FD}"/>
+                <a16:creationId xmlns:a16="http://schemas.microsoft.com/office/drawing/2014/main" id="{FFC082BA-CFBD-459D-ABF1-C4D6F28BA62F}"/>
               </a:ext>
             </a:extLst>
           </p:cNvPr>
@@ -5764,7 +5831,7 @@
                   <a:srgbClr val="334155"/>
                 </a:solidFill>
               </a:rPr>
-              <a:t>Let Vercel serve static assets globally and keep API proxy routes lightweight.</a:t>
+              <a:t>Warn users when phone or email already exists before creating a new lead.</a:t>
             </a:r>
           </a:p>
         </p:txBody>
@@ -5774,7 +5841,7 @@
           <p:cNvPr id="21" name="">
             <a:extLst xmlns:a="http://schemas.openxmlformats.org/drawingml/2006/main">
               <a:ext uri="{FF2B5EF4-FFF2-40B4-BE49-F238E27FC236}">
-                <a16:creationId xmlns:a16="http://schemas.microsoft.com/office/drawing/2014/main" id="{35695614-0C4E-48DB-A52E-AC103FDE5895}"/>
+                <a16:creationId xmlns:a16="http://schemas.microsoft.com/office/drawing/2014/main" id="{85794000-96B7-4C97-A76E-0B0E3DB691C0}"/>
               </a:ext>
             </a:extLst>
           </p:cNvPr>
@@ -5830,7 +5897,7 @@
     </p:spTree>
     <p:extLst>
       <p:ext uri="{BB962C8B-B14F-4D97-AF65-F5344CB8AC3E}">
-        <p14:creationId xmlns:p14="http://schemas.microsoft.com/office/powerpoint/2010/main" val="1901107361"/>
+        <p14:creationId xmlns:p14="http://schemas.microsoft.com/office/powerpoint/2010/main" val="2145985986"/>
       </p:ext>
     </p:extLst>
   </p:cSld>
@@ -5861,7 +5928,7 @@
           <p:cNvPr id="16" name="">
             <a:extLst xmlns:a="http://schemas.openxmlformats.org/drawingml/2006/main">
               <a:ext uri="{FF2B5EF4-FFF2-40B4-BE49-F238E27FC236}">
-                <a16:creationId xmlns:a16="http://schemas.microsoft.com/office/drawing/2014/main" id="{C0E63C60-4BC4-4592-9CDF-0F824E4CEE3D}"/>
+                <a16:creationId xmlns:a16="http://schemas.microsoft.com/office/drawing/2014/main" id="{486ECDEC-C4BC-4C87-8700-9186D87BB58D}"/>
               </a:ext>
             </a:extLst>
           </p:cNvPr>
@@ -5919,7 +5986,7 @@
           <p:cNvPr id="2" name="">
             <a:extLst xmlns:a="http://schemas.openxmlformats.org/drawingml/2006/main">
               <a:ext uri="{FF2B5EF4-FFF2-40B4-BE49-F238E27FC236}">
-                <a16:creationId xmlns:a16="http://schemas.microsoft.com/office/drawing/2014/main" id="{F90475D4-96DA-421F-AFA5-9C606F55631D}"/>
+                <a16:creationId xmlns:a16="http://schemas.microsoft.com/office/drawing/2014/main" id="{F1B73860-5B19-4348-8E9B-11BFDA8C0A67}"/>
               </a:ext>
             </a:extLst>
           </p:cNvPr>
@@ -5977,7 +6044,7 @@
           <p:cNvPr id="3" name="">
             <a:extLst xmlns:a="http://schemas.openxmlformats.org/drawingml/2006/main">
               <a:ext uri="{FF2B5EF4-FFF2-40B4-BE49-F238E27FC236}">
-                <a16:creationId xmlns:a16="http://schemas.microsoft.com/office/drawing/2014/main" id="{83A62A30-5E23-4F39-BB4B-3C8988C24C4F}"/>
+                <a16:creationId xmlns:a16="http://schemas.microsoft.com/office/drawing/2014/main" id="{5898F25C-82C3-461E-829C-68A87196B5F1}"/>
               </a:ext>
             </a:extLst>
           </p:cNvPr>
@@ -6035,7 +6102,7 @@
           <p:cNvPr id="4" name="">
             <a:extLst xmlns:a="http://schemas.openxmlformats.org/drawingml/2006/main">
               <a:ext uri="{FF2B5EF4-FFF2-40B4-BE49-F238E27FC236}">
-                <a16:creationId xmlns:a16="http://schemas.microsoft.com/office/drawing/2014/main" id="{A11A8156-701A-4DB3-B1A4-C8B11AF484FB}"/>
+                <a16:creationId xmlns:a16="http://schemas.microsoft.com/office/drawing/2014/main" id="{7F69C0E5-C89B-44CB-8CA3-F01444258B61}"/>
               </a:ext>
             </a:extLst>
           </p:cNvPr>
@@ -6068,7 +6135,7 @@
           <p:cNvPr id="5" name="">
             <a:extLst xmlns:a="http://schemas.openxmlformats.org/drawingml/2006/main">
               <a:ext uri="{FF2B5EF4-FFF2-40B4-BE49-F238E27FC236}">
-                <a16:creationId xmlns:a16="http://schemas.microsoft.com/office/drawing/2014/main" id="{A656E440-60F9-43AA-8D0C-8F266F672298}"/>
+                <a16:creationId xmlns:a16="http://schemas.microsoft.com/office/drawing/2014/main" id="{727333CE-ABF1-4225-8E42-1AD27E237531}"/>
               </a:ext>
             </a:extLst>
           </p:cNvPr>
@@ -6101,7 +6168,7 @@
           <p:cNvPr id="6" name="">
             <a:extLst xmlns:a="http://schemas.openxmlformats.org/drawingml/2006/main">
               <a:ext uri="{FF2B5EF4-FFF2-40B4-BE49-F238E27FC236}">
-                <a16:creationId xmlns:a16="http://schemas.microsoft.com/office/drawing/2014/main" id="{31FC838B-00F2-4B34-88DD-296501FBCC9C}"/>
+                <a16:creationId xmlns:a16="http://schemas.microsoft.com/office/drawing/2014/main" id="{88058519-1655-4929-9C4F-3E35CD1E9696}"/>
               </a:ext>
             </a:extLst>
           </p:cNvPr>
@@ -6159,7 +6226,7 @@
           <p:cNvPr id="7" name="">
             <a:extLst xmlns:a="http://schemas.openxmlformats.org/drawingml/2006/main">
               <a:ext uri="{FF2B5EF4-FFF2-40B4-BE49-F238E27FC236}">
-                <a16:creationId xmlns:a16="http://schemas.microsoft.com/office/drawing/2014/main" id="{103BFD81-2C63-483B-9161-378A1A32FDF6}"/>
+                <a16:creationId xmlns:a16="http://schemas.microsoft.com/office/drawing/2014/main" id="{3D549394-A211-48B7-A43D-C10B2424C96A}"/>
               </a:ext>
             </a:extLst>
           </p:cNvPr>
@@ -6192,7 +6259,7 @@
           <p:cNvPr id="8" name="">
             <a:extLst xmlns:a="http://schemas.openxmlformats.org/drawingml/2006/main">
               <a:ext uri="{FF2B5EF4-FFF2-40B4-BE49-F238E27FC236}">
-                <a16:creationId xmlns:a16="http://schemas.microsoft.com/office/drawing/2014/main" id="{288C889F-C3B8-43F0-88B6-9C43A64E1841}"/>
+                <a16:creationId xmlns:a16="http://schemas.microsoft.com/office/drawing/2014/main" id="{109CA959-538E-4D61-90C6-AA999E8AE438}"/>
               </a:ext>
             </a:extLst>
           </p:cNvPr>
@@ -6250,7 +6317,7 @@
           <p:cNvPr id="9" name="">
             <a:extLst xmlns:a="http://schemas.openxmlformats.org/drawingml/2006/main">
               <a:ext uri="{FF2B5EF4-FFF2-40B4-BE49-F238E27FC236}">
-                <a16:creationId xmlns:a16="http://schemas.microsoft.com/office/drawing/2014/main" id="{741011B3-CE7B-44F2-AFE6-FA8EA396FAD4}"/>
+                <a16:creationId xmlns:a16="http://schemas.microsoft.com/office/drawing/2014/main" id="{F4A09B27-A924-4134-AFB4-F7740980032B}"/>
               </a:ext>
             </a:extLst>
           </p:cNvPr>
@@ -6283,7 +6350,7 @@
           <p:cNvPr id="10" name="">
             <a:extLst xmlns:a="http://schemas.openxmlformats.org/drawingml/2006/main">
               <a:ext uri="{FF2B5EF4-FFF2-40B4-BE49-F238E27FC236}">
-                <a16:creationId xmlns:a16="http://schemas.microsoft.com/office/drawing/2014/main" id="{5CBE21E6-8C18-4298-ABE9-763FFCD2AEB9}"/>
+                <a16:creationId xmlns:a16="http://schemas.microsoft.com/office/drawing/2014/main" id="{E240A169-856C-4151-802C-17D69B37945A}"/>
               </a:ext>
             </a:extLst>
           </p:cNvPr>
@@ -6341,7 +6408,7 @@
           <p:cNvPr id="11" name="">
             <a:extLst xmlns:a="http://schemas.openxmlformats.org/drawingml/2006/main">
               <a:ext uri="{FF2B5EF4-FFF2-40B4-BE49-F238E27FC236}">
-                <a16:creationId xmlns:a16="http://schemas.microsoft.com/office/drawing/2014/main" id="{A8E648A5-CBCC-4018-813E-514174DD250F}"/>
+                <a16:creationId xmlns:a16="http://schemas.microsoft.com/office/drawing/2014/main" id="{AB9AA6EB-0692-423A-825F-06E6B4D0771D}"/>
               </a:ext>
             </a:extLst>
           </p:cNvPr>
@@ -6374,7 +6441,7 @@
           <p:cNvPr id="12" name="">
             <a:extLst xmlns:a="http://schemas.openxmlformats.org/drawingml/2006/main">
               <a:ext uri="{FF2B5EF4-FFF2-40B4-BE49-F238E27FC236}">
-                <a16:creationId xmlns:a16="http://schemas.microsoft.com/office/drawing/2014/main" id="{3355F4FB-E4E5-4E28-99CE-643D479A94C8}"/>
+                <a16:creationId xmlns:a16="http://schemas.microsoft.com/office/drawing/2014/main" id="{2C4BD9DC-B331-446B-B5A3-1F789F3CA114}"/>
               </a:ext>
             </a:extLst>
           </p:cNvPr>
@@ -6432,7 +6499,7 @@
           <p:cNvPr id="13" name="">
             <a:extLst xmlns:a="http://schemas.openxmlformats.org/drawingml/2006/main">
               <a:ext uri="{FF2B5EF4-FFF2-40B4-BE49-F238E27FC236}">
-                <a16:creationId xmlns:a16="http://schemas.microsoft.com/office/drawing/2014/main" id="{A6511562-5AFF-43B3-AB35-DCE4AFC58422}"/>
+                <a16:creationId xmlns:a16="http://schemas.microsoft.com/office/drawing/2014/main" id="{87F0BB61-A71C-4229-A400-FD81A8DFFE5D}"/>
               </a:ext>
             </a:extLst>
           </p:cNvPr>
@@ -6465,7 +6532,7 @@
           <p:cNvPr id="14" name="">
             <a:extLst xmlns:a="http://schemas.openxmlformats.org/drawingml/2006/main">
               <a:ext uri="{FF2B5EF4-FFF2-40B4-BE49-F238E27FC236}">
-                <a16:creationId xmlns:a16="http://schemas.microsoft.com/office/drawing/2014/main" id="{346BC38B-30D6-42C6-8ABE-376A8A3B3FF5}"/>
+                <a16:creationId xmlns:a16="http://schemas.microsoft.com/office/drawing/2014/main" id="{EFB2FB44-9C62-47F8-B481-1A45F2CF7BB5}"/>
               </a:ext>
             </a:extLst>
           </p:cNvPr>
@@ -6523,7 +6590,7 @@
           <p:cNvPr id="15" name="">
             <a:extLst xmlns:a="http://schemas.openxmlformats.org/drawingml/2006/main">
               <a:ext uri="{FF2B5EF4-FFF2-40B4-BE49-F238E27FC236}">
-                <a16:creationId xmlns:a16="http://schemas.microsoft.com/office/drawing/2014/main" id="{68F434CE-5822-4F39-9640-C1894846F44A}"/>
+                <a16:creationId xmlns:a16="http://schemas.microsoft.com/office/drawing/2014/main" id="{18B50DEA-E798-4804-98CF-9E8C1624F88F}"/>
               </a:ext>
             </a:extLst>
           </p:cNvPr>
@@ -6579,7 +6646,7 @@
     </p:spTree>
     <p:extLst>
       <p:ext uri="{BB962C8B-B14F-4D97-AF65-F5344CB8AC3E}">
-        <p14:creationId xmlns:p14="http://schemas.microsoft.com/office/powerpoint/2010/main" val="80313874"/>
+        <p14:creationId xmlns:p14="http://schemas.microsoft.com/office/powerpoint/2010/main" val="114069126"/>
       </p:ext>
     </p:extLst>
   </p:cSld>
@@ -6610,7 +6677,7 @@
           <p:cNvPr id="16" name="">
             <a:extLst xmlns:a="http://schemas.openxmlformats.org/drawingml/2006/main">
               <a:ext uri="{FF2B5EF4-FFF2-40B4-BE49-F238E27FC236}">
-                <a16:creationId xmlns:a16="http://schemas.microsoft.com/office/drawing/2014/main" id="{E7CB1F8B-A168-493A-B876-F753F4BDB401}"/>
+                <a16:creationId xmlns:a16="http://schemas.microsoft.com/office/drawing/2014/main" id="{8D1739F3-4B2A-4D83-96C0-8B226CBAA98D}"/>
               </a:ext>
             </a:extLst>
           </p:cNvPr>
@@ -6668,7 +6735,7 @@
           <p:cNvPr id="2" name="">
             <a:extLst xmlns:a="http://schemas.openxmlformats.org/drawingml/2006/main">
               <a:ext uri="{FF2B5EF4-FFF2-40B4-BE49-F238E27FC236}">
-                <a16:creationId xmlns:a16="http://schemas.microsoft.com/office/drawing/2014/main" id="{C5A459F3-0FE5-47F3-89BC-124E22FE6F46}"/>
+                <a16:creationId xmlns:a16="http://schemas.microsoft.com/office/drawing/2014/main" id="{9162352E-482D-4C42-9E47-B0A74C86CEF8}"/>
               </a:ext>
             </a:extLst>
           </p:cNvPr>
@@ -6716,7 +6783,7 @@
                   <a:srgbClr val="020617"/>
                 </a:solidFill>
               </a:rPr>
-              <a:t>Interview talking points</a:t>
+              <a:t>Automation and communication upgrades</a:t>
             </a:r>
           </a:p>
         </p:txBody>
@@ -6726,7 +6793,7 @@
           <p:cNvPr id="3" name="">
             <a:extLst xmlns:a="http://schemas.openxmlformats.org/drawingml/2006/main">
               <a:ext uri="{FF2B5EF4-FFF2-40B4-BE49-F238E27FC236}">
-                <a16:creationId xmlns:a16="http://schemas.microsoft.com/office/drawing/2014/main" id="{C6279646-09CE-4F84-8649-FA16BC69A55F}"/>
+                <a16:creationId xmlns:a16="http://schemas.microsoft.com/office/drawing/2014/main" id="{265CC895-E473-420A-97C5-8B856EDF639C}"/>
               </a:ext>
             </a:extLst>
           </p:cNvPr>
@@ -6774,7 +6841,7 @@
                   <a:srgbClr val="334155"/>
                 </a:solidFill>
               </a:rPr>
-              <a:t>The project demonstrates full stack ownership across UI, API design, data modeling and deployment.</a:t>
+              <a:t>These features help the team respond faster and keep a clear history of customer communication.</a:t>
             </a:r>
           </a:p>
         </p:txBody>
@@ -6784,7 +6851,7 @@
           <p:cNvPr id="4" name="">
             <a:extLst xmlns:a="http://schemas.openxmlformats.org/drawingml/2006/main">
               <a:ext uri="{FF2B5EF4-FFF2-40B4-BE49-F238E27FC236}">
-                <a16:creationId xmlns:a16="http://schemas.microsoft.com/office/drawing/2014/main" id="{15B08DE6-6819-4673-9562-DFD59A438BC1}"/>
+                <a16:creationId xmlns:a16="http://schemas.microsoft.com/office/drawing/2014/main" id="{C0B05A2B-08E2-4137-A6DC-6EC6CC56B0E5}"/>
               </a:ext>
             </a:extLst>
           </p:cNvPr>
@@ -6817,7 +6884,7 @@
           <p:cNvPr id="5" name="">
             <a:extLst xmlns:a="http://schemas.openxmlformats.org/drawingml/2006/main">
               <a:ext uri="{FF2B5EF4-FFF2-40B4-BE49-F238E27FC236}">
-                <a16:creationId xmlns:a16="http://schemas.microsoft.com/office/drawing/2014/main" id="{F8AFE69F-0126-417C-9859-4DD0EA02918D}"/>
+                <a16:creationId xmlns:a16="http://schemas.microsoft.com/office/drawing/2014/main" id="{6B5C7230-9D41-49B1-9081-AE32E74321A1}"/>
               </a:ext>
             </a:extLst>
           </p:cNvPr>
@@ -6850,7 +6917,7 @@
           <p:cNvPr id="6" name="">
             <a:extLst xmlns:a="http://schemas.openxmlformats.org/drawingml/2006/main">
               <a:ext uri="{FF2B5EF4-FFF2-40B4-BE49-F238E27FC236}">
-                <a16:creationId xmlns:a16="http://schemas.microsoft.com/office/drawing/2014/main" id="{A72D35BC-3F00-476A-A262-04F3240EC552}"/>
+                <a16:creationId xmlns:a16="http://schemas.microsoft.com/office/drawing/2014/main" id="{C0A25584-DFA4-495A-A7C7-90C89905B1A8}"/>
               </a:ext>
             </a:extLst>
           </p:cNvPr>
@@ -6898,7 +6965,7 @@
                   <a:srgbClr val="334155"/>
                 </a:solidFill>
               </a:rPr>
-              <a:t>I reused the template architecture instead of replacing it</a:t>
+              <a:t>Email and WhatsApp templates for first contact, site visit confirmation and closure follow-up</a:t>
             </a:r>
           </a:p>
         </p:txBody>
@@ -6908,7 +6975,7 @@
           <p:cNvPr id="7" name="">
             <a:extLst xmlns:a="http://schemas.openxmlformats.org/drawingml/2006/main">
               <a:ext uri="{FF2B5EF4-FFF2-40B4-BE49-F238E27FC236}">
-                <a16:creationId xmlns:a16="http://schemas.microsoft.com/office/drawing/2014/main" id="{6A98AD97-1CBE-41DE-96CF-67426F177474}"/>
+                <a16:creationId xmlns:a16="http://schemas.microsoft.com/office/drawing/2014/main" id="{B53ECA5A-AD41-46BC-8DCA-12FFE804481E}"/>
               </a:ext>
             </a:extLst>
           </p:cNvPr>
@@ -6941,7 +7008,7 @@
           <p:cNvPr id="8" name="">
             <a:extLst xmlns:a="http://schemas.openxmlformats.org/drawingml/2006/main">
               <a:ext uri="{FF2B5EF4-FFF2-40B4-BE49-F238E27FC236}">
-                <a16:creationId xmlns:a16="http://schemas.microsoft.com/office/drawing/2014/main" id="{ED85448C-D0CD-4216-ACC0-93993BFFDC3C}"/>
+                <a16:creationId xmlns:a16="http://schemas.microsoft.com/office/drawing/2014/main" id="{2B37E20B-E3EC-45C6-93EA-0E1895CD6282}"/>
               </a:ext>
             </a:extLst>
           </p:cNvPr>
@@ -6989,7 +7056,7 @@
                   <a:srgbClr val="334155"/>
                 </a:solidFill>
               </a:rPr>
-              <a:t>I kept validation in the entity and service layer so controllers stay simple</a:t>
+              <a:t>Reminder notifications for leads with no activity after a configured number of days</a:t>
             </a:r>
           </a:p>
         </p:txBody>
@@ -6999,7 +7066,7 @@
           <p:cNvPr id="9" name="">
             <a:extLst xmlns:a="http://schemas.openxmlformats.org/drawingml/2006/main">
               <a:ext uri="{FF2B5EF4-FFF2-40B4-BE49-F238E27FC236}">
-                <a16:creationId xmlns:a16="http://schemas.microsoft.com/office/drawing/2014/main" id="{53409741-B9F5-41B3-815F-0C3A75977384}"/>
+                <a16:creationId xmlns:a16="http://schemas.microsoft.com/office/drawing/2014/main" id="{0FF474E8-4EC4-45DC-89DD-752AA85846D0}"/>
               </a:ext>
             </a:extLst>
           </p:cNvPr>
@@ -7032,7 +7099,7 @@
           <p:cNvPr id="10" name="">
             <a:extLst xmlns:a="http://schemas.openxmlformats.org/drawingml/2006/main">
               <a:ext uri="{FF2B5EF4-FFF2-40B4-BE49-F238E27FC236}">
-                <a16:creationId xmlns:a16="http://schemas.microsoft.com/office/drawing/2014/main" id="{45614304-05A1-49B5-A38A-4984318EFC3D}"/>
+                <a16:creationId xmlns:a16="http://schemas.microsoft.com/office/drawing/2014/main" id="{AE22EDDE-54BC-4748-89DE-FF7C6732658E}"/>
               </a:ext>
             </a:extLst>
           </p:cNvPr>
@@ -7080,7 +7147,7 @@
                   <a:srgbClr val="334155"/>
                 </a:solidFill>
               </a:rPr>
-              <a:t>I used PostgreSQL constraints and functions to protect data integrity</a:t>
+              <a:t>Activity timeline that combines notes, status changes, owner changes and reminder events</a:t>
             </a:r>
           </a:p>
         </p:txBody>
@@ -7090,7 +7157,7 @@
           <p:cNvPr id="11" name="">
             <a:extLst xmlns:a="http://schemas.openxmlformats.org/drawingml/2006/main">
               <a:ext uri="{FF2B5EF4-FFF2-40B4-BE49-F238E27FC236}">
-                <a16:creationId xmlns:a16="http://schemas.microsoft.com/office/drawing/2014/main" id="{FFEBC705-8B00-49DD-AD1C-96D740107D25}"/>
+                <a16:creationId xmlns:a16="http://schemas.microsoft.com/office/drawing/2014/main" id="{D97E1886-56E0-4A45-BB9B-159F0ECB9FF1}"/>
               </a:ext>
             </a:extLst>
           </p:cNvPr>
@@ -7123,7 +7190,7 @@
           <p:cNvPr id="12" name="">
             <a:extLst xmlns:a="http://schemas.openxmlformats.org/drawingml/2006/main">
               <a:ext uri="{FF2B5EF4-FFF2-40B4-BE49-F238E27FC236}">
-                <a16:creationId xmlns:a16="http://schemas.microsoft.com/office/drawing/2014/main" id="{3F94004D-3B7B-4C62-A57F-20102FC436AB}"/>
+                <a16:creationId xmlns:a16="http://schemas.microsoft.com/office/drawing/2014/main" id="{854101D7-4D98-4C38-A409-AF12AD1EDA7B}"/>
               </a:ext>
             </a:extLst>
           </p:cNvPr>
@@ -7171,7 +7238,7 @@
                   <a:srgbClr val="334155"/>
                 </a:solidFill>
               </a:rPr>
-              <a:t>I added role-based workflows and kept browser auth in an HttpOnly cookie</a:t>
+              <a:t>CSV import with validation preview, duplicate warnings and partial success reporting</a:t>
             </a:r>
           </a:p>
         </p:txBody>
@@ -7181,7 +7248,7 @@
           <p:cNvPr id="13" name="">
             <a:extLst xmlns:a="http://schemas.openxmlformats.org/drawingml/2006/main">
               <a:ext uri="{FF2B5EF4-FFF2-40B4-BE49-F238E27FC236}">
-                <a16:creationId xmlns:a16="http://schemas.microsoft.com/office/drawing/2014/main" id="{C7071C8F-2A67-41E8-BC27-F0F96AA4DEE2}"/>
+                <a16:creationId xmlns:a16="http://schemas.microsoft.com/office/drawing/2014/main" id="{1ABFE7E3-9F92-4E58-8780-CCA55D5DACA3}"/>
               </a:ext>
             </a:extLst>
           </p:cNvPr>
@@ -7214,7 +7281,7 @@
           <p:cNvPr id="14" name="">
             <a:extLst xmlns:a="http://schemas.openxmlformats.org/drawingml/2006/main">
               <a:ext uri="{FF2B5EF4-FFF2-40B4-BE49-F238E27FC236}">
-                <a16:creationId xmlns:a16="http://schemas.microsoft.com/office/drawing/2014/main" id="{CE4D04F9-AC87-4F0D-B814-FF0684BF3A15}"/>
+                <a16:creationId xmlns:a16="http://schemas.microsoft.com/office/drawing/2014/main" id="{1A34D99E-52BE-462C-A852-E83A11ED8E7B}"/>
               </a:ext>
             </a:extLst>
           </p:cNvPr>
@@ -7262,7 +7329,7 @@
                   <a:srgbClr val="334155"/>
                 </a:solidFill>
               </a:rPr>
-              <a:t>I can explain how the app scales vertically first and horizontally when the API becomes stateless</a:t>
+              <a:t>Export filtered leads for managers without exposing passwords or internal token data</a:t>
             </a:r>
           </a:p>
         </p:txBody>
@@ -7272,7 +7339,7 @@
           <p:cNvPr id="15" name="">
             <a:extLst xmlns:a="http://schemas.openxmlformats.org/drawingml/2006/main">
               <a:ext uri="{FF2B5EF4-FFF2-40B4-BE49-F238E27FC236}">
-                <a16:creationId xmlns:a16="http://schemas.microsoft.com/office/drawing/2014/main" id="{179C65E1-7FDC-4764-902B-765BA02A9A67}"/>
+                <a16:creationId xmlns:a16="http://schemas.microsoft.com/office/drawing/2014/main" id="{A821A0D9-F388-46E2-9A6A-38D1FAD855FC}"/>
               </a:ext>
             </a:extLst>
           </p:cNvPr>
@@ -7328,7 +7395,756 @@
     </p:spTree>
     <p:extLst>
       <p:ext uri="{BB962C8B-B14F-4D97-AF65-F5344CB8AC3E}">
-        <p14:creationId xmlns:p14="http://schemas.microsoft.com/office/powerpoint/2010/main" val="1509894488"/>
+        <p14:creationId xmlns:p14="http://schemas.microsoft.com/office/powerpoint/2010/main" val="103443454"/>
+      </p:ext>
+    </p:extLst>
+  </p:cSld>
+</p:sld>
+</file>
+
+<file path=ppt/slides/slide14.xml><?xml version="1.0" encoding="utf-8"?>
+<p:sld xmlns:p="http://schemas.openxmlformats.org/presentationml/2006/main">
+  <p:cSld>
+    <p:bg>
+      <p:bgPr>
+        <a:solidFill xmlns:a="http://schemas.openxmlformats.org/drawingml/2006/main">
+          <a:srgbClr val="F6FAF7"/>
+        </a:solidFill>
+      </p:bgPr>
+    </p:bg>
+    <p:spTree>
+      <p:nvGrpSpPr>
+        <p:cNvPr id="1" name=""/>
+        <p:cNvGrpSpPr/>
+        <p:nvPr/>
+      </p:nvGrpSpPr>
+      <p:grpSpPr>
+        <a:xfrm xmlns:a="http://schemas.openxmlformats.org/drawingml/2006/main"/>
+      </p:grpSpPr>
+      <p:sp>
+        <p:nvSpPr>
+          <p:cNvPr id="16" name="">
+            <a:extLst xmlns:a="http://schemas.openxmlformats.org/drawingml/2006/main">
+              <a:ext uri="{FF2B5EF4-FFF2-40B4-BE49-F238E27FC236}">
+                <a16:creationId xmlns:a16="http://schemas.microsoft.com/office/drawing/2014/main" id="{C57D7B6D-43A4-4187-8B51-C4A7D9063D1C}"/>
+              </a:ext>
+            </a:extLst>
+          </p:cNvPr>
+          <p:cNvSpPr>
+            <a:spLocks xmlns:a="http://schemas.openxmlformats.org/drawingml/2006/main" noGrp="1"/>
+          </p:cNvSpPr>
+          <p:nvPr/>
+        </p:nvSpPr>
+        <p:spPr>
+          <a:xfrm xmlns:a="http://schemas.openxmlformats.org/drawingml/2006/main">
+            <a:off x="685800" y="457200"/>
+            <a:ext cx="2476500" cy="228600"/>
+          </a:xfrm>
+          <a:prstGeom xmlns:a="http://schemas.openxmlformats.org/drawingml/2006/main" prst="rect">
+            <a:avLst/>
+          </a:prstGeom>
+          <a:noFill xmlns:a="http://schemas.openxmlformats.org/drawingml/2006/main"/>
+          <a:ln xmlns:a="http://schemas.openxmlformats.org/drawingml/2006/main" w="0">
+            <a:noFill/>
+            <a:prstDash val="solid"/>
+          </a:ln>
+        </p:spPr>
+        <p:txBody>
+          <a:bodyPr xmlns:a="http://schemas.openxmlformats.org/drawingml/2006/main"/>
+          <a:lstStyle xmlns:a="http://schemas.openxmlformats.org/drawingml/2006/main">
+            <a:defPPr>
+              <a:defRPr sz="900" b="1">
+                <a:solidFill>
+                  <a:srgbClr val="0F766E"/>
+                </a:solidFill>
+              </a:defRPr>
+            </a:defPPr>
+          </a:lstStyle>
+          <a:p xmlns:a="http://schemas.openxmlformats.org/drawingml/2006/main">
+            <a:pPr>
+              <a:defRPr sz="900" b="1">
+                <a:solidFill>
+                  <a:srgbClr val="0F766E"/>
+                </a:solidFill>
+              </a:defRPr>
+            </a:pPr>
+            <a:r>
+              <a:rPr sz="900" b="1">
+                <a:solidFill>
+                  <a:srgbClr val="0F766E"/>
+                </a:solidFill>
+              </a:rPr>
+              <a:t>PROPLEAD CRM</a:t>
+            </a:r>
+          </a:p>
+        </p:txBody>
+      </p:sp>
+      <p:sp>
+        <p:nvSpPr>
+          <p:cNvPr id="2" name="">
+            <a:extLst xmlns:a="http://schemas.openxmlformats.org/drawingml/2006/main">
+              <a:ext uri="{FF2B5EF4-FFF2-40B4-BE49-F238E27FC236}">
+                <a16:creationId xmlns:a16="http://schemas.microsoft.com/office/drawing/2014/main" id="{97755294-CE02-4957-83B1-F6B3B828D73F}"/>
+              </a:ext>
+            </a:extLst>
+          </p:cNvPr>
+          <p:cNvSpPr>
+            <a:spLocks xmlns:a="http://schemas.openxmlformats.org/drawingml/2006/main" noGrp="1"/>
+          </p:cNvSpPr>
+          <p:nvPr/>
+        </p:nvSpPr>
+        <p:spPr>
+          <a:xfrm xmlns:a="http://schemas.openxmlformats.org/drawingml/2006/main">
+            <a:off x="685800" y="819150"/>
+            <a:ext cx="7239000" cy="552450"/>
+          </a:xfrm>
+          <a:prstGeom xmlns:a="http://schemas.openxmlformats.org/drawingml/2006/main" prst="rect">
+            <a:avLst/>
+          </a:prstGeom>
+          <a:noFill xmlns:a="http://schemas.openxmlformats.org/drawingml/2006/main"/>
+          <a:ln xmlns:a="http://schemas.openxmlformats.org/drawingml/2006/main" w="0">
+            <a:noFill/>
+            <a:prstDash val="solid"/>
+          </a:ln>
+        </p:spPr>
+        <p:txBody>
+          <a:bodyPr xmlns:a="http://schemas.openxmlformats.org/drawingml/2006/main"/>
+          <a:lstStyle xmlns:a="http://schemas.openxmlformats.org/drawingml/2006/main">
+            <a:defPPr>
+              <a:defRPr sz="2700" b="1">
+                <a:solidFill>
+                  <a:srgbClr val="020617"/>
+                </a:solidFill>
+              </a:defRPr>
+            </a:defPPr>
+          </a:lstStyle>
+          <a:p xmlns:a="http://schemas.openxmlformats.org/drawingml/2006/main">
+            <a:pPr>
+              <a:defRPr sz="2700" b="1">
+                <a:solidFill>
+                  <a:srgbClr val="020617"/>
+                </a:solidFill>
+              </a:defRPr>
+            </a:pPr>
+            <a:r>
+              <a:rPr sz="2700" b="1">
+                <a:solidFill>
+                  <a:srgbClr val="020617"/>
+                </a:solidFill>
+              </a:rPr>
+              <a:t>Analytics and governance upgrades</a:t>
+            </a:r>
+          </a:p>
+        </p:txBody>
+      </p:sp>
+      <p:sp>
+        <p:nvSpPr>
+          <p:cNvPr id="3" name="">
+            <a:extLst xmlns:a="http://schemas.openxmlformats.org/drawingml/2006/main">
+              <a:ext uri="{FF2B5EF4-FFF2-40B4-BE49-F238E27FC236}">
+                <a16:creationId xmlns:a16="http://schemas.microsoft.com/office/drawing/2014/main" id="{1FFD501F-61BD-4C52-8EDF-989C1EB1E4AC}"/>
+              </a:ext>
+            </a:extLst>
+          </p:cNvPr>
+          <p:cNvSpPr>
+            <a:spLocks xmlns:a="http://schemas.openxmlformats.org/drawingml/2006/main" noGrp="1"/>
+          </p:cNvSpPr>
+          <p:nvPr/>
+        </p:nvSpPr>
+        <p:spPr>
+          <a:xfrm xmlns:a="http://schemas.openxmlformats.org/drawingml/2006/main">
+            <a:off x="685800" y="1428750"/>
+            <a:ext cx="8382000" cy="514350"/>
+          </a:xfrm>
+          <a:prstGeom xmlns:a="http://schemas.openxmlformats.org/drawingml/2006/main" prst="rect">
+            <a:avLst/>
+          </a:prstGeom>
+          <a:noFill xmlns:a="http://schemas.openxmlformats.org/drawingml/2006/main"/>
+          <a:ln xmlns:a="http://schemas.openxmlformats.org/drawingml/2006/main" w="0">
+            <a:noFill/>
+            <a:prstDash val="solid"/>
+          </a:ln>
+        </p:spPr>
+        <p:txBody>
+          <a:bodyPr xmlns:a="http://schemas.openxmlformats.org/drawingml/2006/main"/>
+          <a:lstStyle xmlns:a="http://schemas.openxmlformats.org/drawingml/2006/main">
+            <a:defPPr>
+              <a:defRPr sz="1350" b="0">
+                <a:solidFill>
+                  <a:srgbClr val="334155"/>
+                </a:solidFill>
+              </a:defRPr>
+            </a:defPPr>
+          </a:lstStyle>
+          <a:p xmlns:a="http://schemas.openxmlformats.org/drawingml/2006/main">
+            <a:pPr>
+              <a:defRPr sz="1350" b="0">
+                <a:solidFill>
+                  <a:srgbClr val="334155"/>
+                </a:solidFill>
+              </a:defRPr>
+            </a:pPr>
+            <a:r>
+              <a:rPr sz="1350" b="0">
+                <a:solidFill>
+                  <a:srgbClr val="334155"/>
+                </a:solidFill>
+              </a:rPr>
+              <a:t>These upgrades make the CRM more useful for management reporting and operational control.</a:t>
+            </a:r>
+          </a:p>
+        </p:txBody>
+      </p:sp>
+      <p:sp>
+        <p:nvSpPr>
+          <p:cNvPr id="4" name="">
+            <a:extLst xmlns:a="http://schemas.openxmlformats.org/drawingml/2006/main">
+              <a:ext uri="{FF2B5EF4-FFF2-40B4-BE49-F238E27FC236}">
+                <a16:creationId xmlns:a16="http://schemas.microsoft.com/office/drawing/2014/main" id="{AABFD70B-6972-4969-A2ED-E545F8E6B462}"/>
+              </a:ext>
+            </a:extLst>
+          </p:cNvPr>
+          <p:cNvSpPr>
+            <a:spLocks xmlns:a="http://schemas.openxmlformats.org/drawingml/2006/main" noGrp="1"/>
+          </p:cNvSpPr>
+          <p:nvPr/>
+        </p:nvSpPr>
+        <p:spPr>
+          <a:xfrm xmlns:a="http://schemas.openxmlformats.org/drawingml/2006/main">
+            <a:off x="685800" y="2076450"/>
+            <a:ext cx="10820400" cy="9525"/>
+          </a:xfrm>
+          <a:prstGeom xmlns:a="http://schemas.openxmlformats.org/drawingml/2006/main" prst="rect">
+            <a:avLst/>
+          </a:prstGeom>
+          <a:solidFill xmlns:a="http://schemas.openxmlformats.org/drawingml/2006/main">
+            <a:srgbClr val="CBD5E1"/>
+          </a:solidFill>
+          <a:ln xmlns:a="http://schemas.openxmlformats.org/drawingml/2006/main" w="0">
+            <a:solidFill>
+              <a:srgbClr val="CBD5E1"/>
+            </a:solidFill>
+            <a:prstDash val="solid"/>
+          </a:ln>
+        </p:spPr>
+      </p:sp>
+      <p:sp>
+        <p:nvSpPr>
+          <p:cNvPr id="5" name="">
+            <a:extLst xmlns:a="http://schemas.openxmlformats.org/drawingml/2006/main">
+              <a:ext uri="{FF2B5EF4-FFF2-40B4-BE49-F238E27FC236}">
+                <a16:creationId xmlns:a16="http://schemas.microsoft.com/office/drawing/2014/main" id="{9FB4ABC4-778D-4587-9DAC-3142328F289F}"/>
+              </a:ext>
+            </a:extLst>
+          </p:cNvPr>
+          <p:cNvSpPr>
+            <a:spLocks xmlns:a="http://schemas.openxmlformats.org/drawingml/2006/main" noGrp="1"/>
+          </p:cNvSpPr>
+          <p:nvPr/>
+        </p:nvSpPr>
+        <p:spPr>
+          <a:xfrm xmlns:a="http://schemas.openxmlformats.org/drawingml/2006/main">
+            <a:off x="781050" y="2705100"/>
+            <a:ext cx="95250" cy="95250"/>
+          </a:xfrm>
+          <a:prstGeom xmlns:a="http://schemas.openxmlformats.org/drawingml/2006/main" prst="ellipse">
+            <a:avLst/>
+          </a:prstGeom>
+          <a:solidFill xmlns:a="http://schemas.openxmlformats.org/drawingml/2006/main">
+            <a:srgbClr val="0F766E"/>
+          </a:solidFill>
+          <a:ln xmlns:a="http://schemas.openxmlformats.org/drawingml/2006/main" w="0">
+            <a:solidFill>
+              <a:srgbClr val="0F766E"/>
+            </a:solidFill>
+            <a:prstDash val="solid"/>
+          </a:ln>
+        </p:spPr>
+      </p:sp>
+      <p:sp>
+        <p:nvSpPr>
+          <p:cNvPr id="6" name="">
+            <a:extLst xmlns:a="http://schemas.openxmlformats.org/drawingml/2006/main">
+              <a:ext uri="{FF2B5EF4-FFF2-40B4-BE49-F238E27FC236}">
+                <a16:creationId xmlns:a16="http://schemas.microsoft.com/office/drawing/2014/main" id="{321018E7-8AA9-4F18-B77B-29033CEC11A5}"/>
+              </a:ext>
+            </a:extLst>
+          </p:cNvPr>
+          <p:cNvSpPr>
+            <a:spLocks xmlns:a="http://schemas.openxmlformats.org/drawingml/2006/main" noGrp="1"/>
+          </p:cNvSpPr>
+          <p:nvPr/>
+        </p:nvSpPr>
+        <p:spPr>
+          <a:xfrm xmlns:a="http://schemas.openxmlformats.org/drawingml/2006/main">
+            <a:off x="1009650" y="2628900"/>
+            <a:ext cx="10401300" cy="552450"/>
+          </a:xfrm>
+          <a:prstGeom xmlns:a="http://schemas.openxmlformats.org/drawingml/2006/main" prst="rect">
+            <a:avLst/>
+          </a:prstGeom>
+          <a:noFill xmlns:a="http://schemas.openxmlformats.org/drawingml/2006/main"/>
+          <a:ln xmlns:a="http://schemas.openxmlformats.org/drawingml/2006/main" w="0">
+            <a:noFill/>
+            <a:prstDash val="solid"/>
+          </a:ln>
+        </p:spPr>
+        <p:txBody>
+          <a:bodyPr xmlns:a="http://schemas.openxmlformats.org/drawingml/2006/main"/>
+          <a:lstStyle xmlns:a="http://schemas.openxmlformats.org/drawingml/2006/main">
+            <a:defPPr>
+              <a:defRPr sz="1500" b="0">
+                <a:solidFill>
+                  <a:srgbClr val="334155"/>
+                </a:solidFill>
+              </a:defRPr>
+            </a:defPPr>
+          </a:lstStyle>
+          <a:p xmlns:a="http://schemas.openxmlformats.org/drawingml/2006/main">
+            <a:pPr>
+              <a:defRPr sz="1500" b="0">
+                <a:solidFill>
+                  <a:srgbClr val="334155"/>
+                </a:solidFill>
+              </a:defRPr>
+            </a:pPr>
+            <a:r>
+              <a:rPr sz="1500" b="0">
+                <a:solidFill>
+                  <a:srgbClr val="334155"/>
+                </a:solidFill>
+              </a:rPr>
+              <a:t>Source quality score based on conversion rate, average budget and time to close</a:t>
+            </a:r>
+          </a:p>
+        </p:txBody>
+      </p:sp>
+      <p:sp>
+        <p:nvSpPr>
+          <p:cNvPr id="7" name="">
+            <a:extLst xmlns:a="http://schemas.openxmlformats.org/drawingml/2006/main">
+              <a:ext uri="{FF2B5EF4-FFF2-40B4-BE49-F238E27FC236}">
+                <a16:creationId xmlns:a16="http://schemas.microsoft.com/office/drawing/2014/main" id="{D5C16E5C-7449-49E2-9607-68428B9A38F1}"/>
+              </a:ext>
+            </a:extLst>
+          </p:cNvPr>
+          <p:cNvSpPr>
+            <a:spLocks xmlns:a="http://schemas.openxmlformats.org/drawingml/2006/main" noGrp="1"/>
+          </p:cNvSpPr>
+          <p:nvPr/>
+        </p:nvSpPr>
+        <p:spPr>
+          <a:xfrm xmlns:a="http://schemas.openxmlformats.org/drawingml/2006/main">
+            <a:off x="781050" y="3257550"/>
+            <a:ext cx="95250" cy="95250"/>
+          </a:xfrm>
+          <a:prstGeom xmlns:a="http://schemas.openxmlformats.org/drawingml/2006/main" prst="ellipse">
+            <a:avLst/>
+          </a:prstGeom>
+          <a:solidFill xmlns:a="http://schemas.openxmlformats.org/drawingml/2006/main">
+            <a:srgbClr val="0F766E"/>
+          </a:solidFill>
+          <a:ln xmlns:a="http://schemas.openxmlformats.org/drawingml/2006/main" w="0">
+            <a:solidFill>
+              <a:srgbClr val="0F766E"/>
+            </a:solidFill>
+            <a:prstDash val="solid"/>
+          </a:ln>
+        </p:spPr>
+      </p:sp>
+      <p:sp>
+        <p:nvSpPr>
+          <p:cNvPr id="8" name="">
+            <a:extLst xmlns:a="http://schemas.openxmlformats.org/drawingml/2006/main">
+              <a:ext uri="{FF2B5EF4-FFF2-40B4-BE49-F238E27FC236}">
+                <a16:creationId xmlns:a16="http://schemas.microsoft.com/office/drawing/2014/main" id="{8AFB7EE6-DDDC-475A-909C-82F13311BA10}"/>
+              </a:ext>
+            </a:extLst>
+          </p:cNvPr>
+          <p:cNvSpPr>
+            <a:spLocks xmlns:a="http://schemas.openxmlformats.org/drawingml/2006/main" noGrp="1"/>
+          </p:cNvSpPr>
+          <p:nvPr/>
+        </p:nvSpPr>
+        <p:spPr>
+          <a:xfrm xmlns:a="http://schemas.openxmlformats.org/drawingml/2006/main">
+            <a:off x="1009650" y="3181350"/>
+            <a:ext cx="10401300" cy="552450"/>
+          </a:xfrm>
+          <a:prstGeom xmlns:a="http://schemas.openxmlformats.org/drawingml/2006/main" prst="rect">
+            <a:avLst/>
+          </a:prstGeom>
+          <a:noFill xmlns:a="http://schemas.openxmlformats.org/drawingml/2006/main"/>
+          <a:ln xmlns:a="http://schemas.openxmlformats.org/drawingml/2006/main" w="0">
+            <a:noFill/>
+            <a:prstDash val="solid"/>
+          </a:ln>
+        </p:spPr>
+        <p:txBody>
+          <a:bodyPr xmlns:a="http://schemas.openxmlformats.org/drawingml/2006/main"/>
+          <a:lstStyle xmlns:a="http://schemas.openxmlformats.org/drawingml/2006/main">
+            <a:defPPr>
+              <a:defRPr sz="1500" b="0">
+                <a:solidFill>
+                  <a:srgbClr val="334155"/>
+                </a:solidFill>
+              </a:defRPr>
+            </a:defPPr>
+          </a:lstStyle>
+          <a:p xmlns:a="http://schemas.openxmlformats.org/drawingml/2006/main">
+            <a:pPr>
+              <a:defRPr sz="1500" b="0">
+                <a:solidFill>
+                  <a:srgbClr val="334155"/>
+                </a:solidFill>
+              </a:defRPr>
+            </a:pPr>
+            <a:r>
+              <a:rPr sz="1500" b="0">
+                <a:solidFill>
+                  <a:srgbClr val="334155"/>
+                </a:solidFill>
+              </a:rPr>
+              <a:t>Team performance dashboard with assigned leads, overdue follow-ups and closure rate</a:t>
+            </a:r>
+          </a:p>
+        </p:txBody>
+      </p:sp>
+      <p:sp>
+        <p:nvSpPr>
+          <p:cNvPr id="9" name="">
+            <a:extLst xmlns:a="http://schemas.openxmlformats.org/drawingml/2006/main">
+              <a:ext uri="{FF2B5EF4-FFF2-40B4-BE49-F238E27FC236}">
+                <a16:creationId xmlns:a16="http://schemas.microsoft.com/office/drawing/2014/main" id="{D00D2CAB-AA47-4E24-BC95-E1DA4AB18DCA}"/>
+              </a:ext>
+            </a:extLst>
+          </p:cNvPr>
+          <p:cNvSpPr>
+            <a:spLocks xmlns:a="http://schemas.openxmlformats.org/drawingml/2006/main" noGrp="1"/>
+          </p:cNvSpPr>
+          <p:nvPr/>
+        </p:nvSpPr>
+        <p:spPr>
+          <a:xfrm xmlns:a="http://schemas.openxmlformats.org/drawingml/2006/main">
+            <a:off x="781050" y="3810000"/>
+            <a:ext cx="95250" cy="95250"/>
+          </a:xfrm>
+          <a:prstGeom xmlns:a="http://schemas.openxmlformats.org/drawingml/2006/main" prst="ellipse">
+            <a:avLst/>
+          </a:prstGeom>
+          <a:solidFill xmlns:a="http://schemas.openxmlformats.org/drawingml/2006/main">
+            <a:srgbClr val="0F766E"/>
+          </a:solidFill>
+          <a:ln xmlns:a="http://schemas.openxmlformats.org/drawingml/2006/main" w="0">
+            <a:solidFill>
+              <a:srgbClr val="0F766E"/>
+            </a:solidFill>
+            <a:prstDash val="solid"/>
+          </a:ln>
+        </p:spPr>
+      </p:sp>
+      <p:sp>
+        <p:nvSpPr>
+          <p:cNvPr id="10" name="">
+            <a:extLst xmlns:a="http://schemas.openxmlformats.org/drawingml/2006/main">
+              <a:ext uri="{FF2B5EF4-FFF2-40B4-BE49-F238E27FC236}">
+                <a16:creationId xmlns:a16="http://schemas.microsoft.com/office/drawing/2014/main" id="{43D49028-CF03-4921-A5E3-E0F905886103}"/>
+              </a:ext>
+            </a:extLst>
+          </p:cNvPr>
+          <p:cNvSpPr>
+            <a:spLocks xmlns:a="http://schemas.openxmlformats.org/drawingml/2006/main" noGrp="1"/>
+          </p:cNvSpPr>
+          <p:nvPr/>
+        </p:nvSpPr>
+        <p:spPr>
+          <a:xfrm xmlns:a="http://schemas.openxmlformats.org/drawingml/2006/main">
+            <a:off x="1009650" y="3733800"/>
+            <a:ext cx="10401300" cy="552450"/>
+          </a:xfrm>
+          <a:prstGeom xmlns:a="http://schemas.openxmlformats.org/drawingml/2006/main" prst="rect">
+            <a:avLst/>
+          </a:prstGeom>
+          <a:noFill xmlns:a="http://schemas.openxmlformats.org/drawingml/2006/main"/>
+          <a:ln xmlns:a="http://schemas.openxmlformats.org/drawingml/2006/main" w="0">
+            <a:noFill/>
+            <a:prstDash val="solid"/>
+          </a:ln>
+        </p:spPr>
+        <p:txBody>
+          <a:bodyPr xmlns:a="http://schemas.openxmlformats.org/drawingml/2006/main"/>
+          <a:lstStyle xmlns:a="http://schemas.openxmlformats.org/drawingml/2006/main">
+            <a:defPPr>
+              <a:defRPr sz="1500" b="0">
+                <a:solidFill>
+                  <a:srgbClr val="334155"/>
+                </a:solidFill>
+              </a:defRPr>
+            </a:defPPr>
+          </a:lstStyle>
+          <a:p xmlns:a="http://schemas.openxmlformats.org/drawingml/2006/main">
+            <a:pPr>
+              <a:defRPr sz="1500" b="0">
+                <a:solidFill>
+                  <a:srgbClr val="334155"/>
+                </a:solidFill>
+              </a:defRPr>
+            </a:pPr>
+            <a:r>
+              <a:rPr sz="1500" b="0">
+                <a:solidFill>
+                  <a:srgbClr val="334155"/>
+                </a:solidFill>
+              </a:rPr>
+              <a:t>Audit log for create, update, delete and login events with admin-only access</a:t>
+            </a:r>
+          </a:p>
+        </p:txBody>
+      </p:sp>
+      <p:sp>
+        <p:nvSpPr>
+          <p:cNvPr id="11" name="">
+            <a:extLst xmlns:a="http://schemas.openxmlformats.org/drawingml/2006/main">
+              <a:ext uri="{FF2B5EF4-FFF2-40B4-BE49-F238E27FC236}">
+                <a16:creationId xmlns:a16="http://schemas.microsoft.com/office/drawing/2014/main" id="{3D321A6D-B66E-4089-A872-7162660A9667}"/>
+              </a:ext>
+            </a:extLst>
+          </p:cNvPr>
+          <p:cNvSpPr>
+            <a:spLocks xmlns:a="http://schemas.openxmlformats.org/drawingml/2006/main" noGrp="1"/>
+          </p:cNvSpPr>
+          <p:nvPr/>
+        </p:nvSpPr>
+        <p:spPr>
+          <a:xfrm xmlns:a="http://schemas.openxmlformats.org/drawingml/2006/main">
+            <a:off x="781050" y="4362450"/>
+            <a:ext cx="95250" cy="95250"/>
+          </a:xfrm>
+          <a:prstGeom xmlns:a="http://schemas.openxmlformats.org/drawingml/2006/main" prst="ellipse">
+            <a:avLst/>
+          </a:prstGeom>
+          <a:solidFill xmlns:a="http://schemas.openxmlformats.org/drawingml/2006/main">
+            <a:srgbClr val="0F766E"/>
+          </a:solidFill>
+          <a:ln xmlns:a="http://schemas.openxmlformats.org/drawingml/2006/main" w="0">
+            <a:solidFill>
+              <a:srgbClr val="0F766E"/>
+            </a:solidFill>
+            <a:prstDash val="solid"/>
+          </a:ln>
+        </p:spPr>
+      </p:sp>
+      <p:sp>
+        <p:nvSpPr>
+          <p:cNvPr id="12" name="">
+            <a:extLst xmlns:a="http://schemas.openxmlformats.org/drawingml/2006/main">
+              <a:ext uri="{FF2B5EF4-FFF2-40B4-BE49-F238E27FC236}">
+                <a16:creationId xmlns:a16="http://schemas.microsoft.com/office/drawing/2014/main" id="{F5CD2591-8772-4C5E-8754-740F12749418}"/>
+              </a:ext>
+            </a:extLst>
+          </p:cNvPr>
+          <p:cNvSpPr>
+            <a:spLocks xmlns:a="http://schemas.openxmlformats.org/drawingml/2006/main" noGrp="1"/>
+          </p:cNvSpPr>
+          <p:nvPr/>
+        </p:nvSpPr>
+        <p:spPr>
+          <a:xfrm xmlns:a="http://schemas.openxmlformats.org/drawingml/2006/main">
+            <a:off x="1009650" y="4286250"/>
+            <a:ext cx="10401300" cy="552450"/>
+          </a:xfrm>
+          <a:prstGeom xmlns:a="http://schemas.openxmlformats.org/drawingml/2006/main" prst="rect">
+            <a:avLst/>
+          </a:prstGeom>
+          <a:noFill xmlns:a="http://schemas.openxmlformats.org/drawingml/2006/main"/>
+          <a:ln xmlns:a="http://schemas.openxmlformats.org/drawingml/2006/main" w="0">
+            <a:noFill/>
+            <a:prstDash val="solid"/>
+          </a:ln>
+        </p:spPr>
+        <p:txBody>
+          <a:bodyPr xmlns:a="http://schemas.openxmlformats.org/drawingml/2006/main"/>
+          <a:lstStyle xmlns:a="http://schemas.openxmlformats.org/drawingml/2006/main">
+            <a:defPPr>
+              <a:defRPr sz="1500" b="0">
+                <a:solidFill>
+                  <a:srgbClr val="334155"/>
+                </a:solidFill>
+              </a:defRPr>
+            </a:defPPr>
+          </a:lstStyle>
+          <a:p xmlns:a="http://schemas.openxmlformats.org/drawingml/2006/main">
+            <a:pPr>
+              <a:defRPr sz="1500" b="0">
+                <a:solidFill>
+                  <a:srgbClr val="334155"/>
+                </a:solidFill>
+              </a:defRPr>
+            </a:pPr>
+            <a:r>
+              <a:rPr sz="1500" b="0">
+                <a:solidFill>
+                  <a:srgbClr val="334155"/>
+                </a:solidFill>
+              </a:rPr>
+              <a:t>Custom fields for property campaigns without changing the lead table every time</a:t>
+            </a:r>
+          </a:p>
+        </p:txBody>
+      </p:sp>
+      <p:sp>
+        <p:nvSpPr>
+          <p:cNvPr id="13" name="">
+            <a:extLst xmlns:a="http://schemas.openxmlformats.org/drawingml/2006/main">
+              <a:ext uri="{FF2B5EF4-FFF2-40B4-BE49-F238E27FC236}">
+                <a16:creationId xmlns:a16="http://schemas.microsoft.com/office/drawing/2014/main" id="{CD019A60-90F8-408A-BBBA-2E1E4F58B04C}"/>
+              </a:ext>
+            </a:extLst>
+          </p:cNvPr>
+          <p:cNvSpPr>
+            <a:spLocks xmlns:a="http://schemas.openxmlformats.org/drawingml/2006/main" noGrp="1"/>
+          </p:cNvSpPr>
+          <p:nvPr/>
+        </p:nvSpPr>
+        <p:spPr>
+          <a:xfrm xmlns:a="http://schemas.openxmlformats.org/drawingml/2006/main">
+            <a:off x="781050" y="4914900"/>
+            <a:ext cx="95250" cy="95250"/>
+          </a:xfrm>
+          <a:prstGeom xmlns:a="http://schemas.openxmlformats.org/drawingml/2006/main" prst="ellipse">
+            <a:avLst/>
+          </a:prstGeom>
+          <a:solidFill xmlns:a="http://schemas.openxmlformats.org/drawingml/2006/main">
+            <a:srgbClr val="0F766E"/>
+          </a:solidFill>
+          <a:ln xmlns:a="http://schemas.openxmlformats.org/drawingml/2006/main" w="0">
+            <a:solidFill>
+              <a:srgbClr val="0F766E"/>
+            </a:solidFill>
+            <a:prstDash val="solid"/>
+          </a:ln>
+        </p:spPr>
+      </p:sp>
+      <p:sp>
+        <p:nvSpPr>
+          <p:cNvPr id="14" name="">
+            <a:extLst xmlns:a="http://schemas.openxmlformats.org/drawingml/2006/main">
+              <a:ext uri="{FF2B5EF4-FFF2-40B4-BE49-F238E27FC236}">
+                <a16:creationId xmlns:a16="http://schemas.microsoft.com/office/drawing/2014/main" id="{E4AF76CC-1D93-4B26-833C-9A330C34911E}"/>
+              </a:ext>
+            </a:extLst>
+          </p:cNvPr>
+          <p:cNvSpPr>
+            <a:spLocks xmlns:a="http://schemas.openxmlformats.org/drawingml/2006/main" noGrp="1"/>
+          </p:cNvSpPr>
+          <p:nvPr/>
+        </p:nvSpPr>
+        <p:spPr>
+          <a:xfrm xmlns:a="http://schemas.openxmlformats.org/drawingml/2006/main">
+            <a:off x="1009650" y="4838700"/>
+            <a:ext cx="10401300" cy="552450"/>
+          </a:xfrm>
+          <a:prstGeom xmlns:a="http://schemas.openxmlformats.org/drawingml/2006/main" prst="rect">
+            <a:avLst/>
+          </a:prstGeom>
+          <a:noFill xmlns:a="http://schemas.openxmlformats.org/drawingml/2006/main"/>
+          <a:ln xmlns:a="http://schemas.openxmlformats.org/drawingml/2006/main" w="0">
+            <a:noFill/>
+            <a:prstDash val="solid"/>
+          </a:ln>
+        </p:spPr>
+        <p:txBody>
+          <a:bodyPr xmlns:a="http://schemas.openxmlformats.org/drawingml/2006/main"/>
+          <a:lstStyle xmlns:a="http://schemas.openxmlformats.org/drawingml/2006/main">
+            <a:defPPr>
+              <a:defRPr sz="1500" b="0">
+                <a:solidFill>
+                  <a:srgbClr val="334155"/>
+                </a:solidFill>
+              </a:defRPr>
+            </a:defPPr>
+          </a:lstStyle>
+          <a:p xmlns:a="http://schemas.openxmlformats.org/drawingml/2006/main">
+            <a:pPr>
+              <a:defRPr sz="1500" b="0">
+                <a:solidFill>
+                  <a:srgbClr val="334155"/>
+                </a:solidFill>
+              </a:defRPr>
+            </a:pPr>
+            <a:r>
+              <a:rPr sz="1500" b="0">
+                <a:solidFill>
+                  <a:srgbClr val="334155"/>
+                </a:solidFill>
+              </a:rPr>
+              <a:t>Role permission matrix so admins can tune access beyond the fixed admin and CRM roles</a:t>
+            </a:r>
+          </a:p>
+        </p:txBody>
+      </p:sp>
+      <p:sp>
+        <p:nvSpPr>
+          <p:cNvPr id="15" name="">
+            <a:extLst xmlns:a="http://schemas.openxmlformats.org/drawingml/2006/main">
+              <a:ext uri="{FF2B5EF4-FFF2-40B4-BE49-F238E27FC236}">
+                <a16:creationId xmlns:a16="http://schemas.microsoft.com/office/drawing/2014/main" id="{F4E12284-1E52-4FAC-BDD4-DB5148BF3FA8}"/>
+              </a:ext>
+            </a:extLst>
+          </p:cNvPr>
+          <p:cNvSpPr>
+            <a:spLocks xmlns:a="http://schemas.openxmlformats.org/drawingml/2006/main" noGrp="1"/>
+          </p:cNvSpPr>
+          <p:nvPr/>
+        </p:nvSpPr>
+        <p:spPr>
+          <a:xfrm xmlns:a="http://schemas.openxmlformats.org/drawingml/2006/main">
+            <a:off x="685800" y="6381750"/>
+            <a:ext cx="4572000" cy="228600"/>
+          </a:xfrm>
+          <a:prstGeom xmlns:a="http://schemas.openxmlformats.org/drawingml/2006/main" prst="rect">
+            <a:avLst/>
+          </a:prstGeom>
+          <a:noFill xmlns:a="http://schemas.openxmlformats.org/drawingml/2006/main"/>
+          <a:ln xmlns:a="http://schemas.openxmlformats.org/drawingml/2006/main" w="0">
+            <a:noFill/>
+            <a:prstDash val="solid"/>
+          </a:ln>
+        </p:spPr>
+        <p:txBody>
+          <a:bodyPr xmlns:a="http://schemas.openxmlformats.org/drawingml/2006/main"/>
+          <a:lstStyle xmlns:a="http://schemas.openxmlformats.org/drawingml/2006/main">
+            <a:defPPr>
+              <a:defRPr sz="825" b="0">
+                <a:solidFill>
+                  <a:srgbClr val="64748B"/>
+                </a:solidFill>
+              </a:defRPr>
+            </a:defPPr>
+          </a:lstStyle>
+          <a:p xmlns:a="http://schemas.openxmlformats.org/drawingml/2006/main">
+            <a:pPr>
+              <a:defRPr sz="825" b="0">
+                <a:solidFill>
+                  <a:srgbClr val="64748B"/>
+                </a:solidFill>
+              </a:defRPr>
+            </a:pPr>
+            <a:r>
+              <a:rPr sz="825" b="0">
+                <a:solidFill>
+                  <a:srgbClr val="64748B"/>
+                </a:solidFill>
+              </a:rPr>
+              <a:t>PropLead CRM implementation guide · 14</a:t>
+            </a:r>
+          </a:p>
+        </p:txBody>
+      </p:sp>
+    </p:spTree>
+    <p:extLst>
+      <p:ext uri="{BB962C8B-B14F-4D97-AF65-F5344CB8AC3E}">
+        <p14:creationId xmlns:p14="http://schemas.microsoft.com/office/powerpoint/2010/main" val="1893654239"/>
       </p:ext>
     </p:extLst>
   </p:cSld>
@@ -7359,7 +8175,7 @@
           <p:cNvPr id="14" name="">
             <a:extLst xmlns:a="http://schemas.openxmlformats.org/drawingml/2006/main">
               <a:ext uri="{FF2B5EF4-FFF2-40B4-BE49-F238E27FC236}">
-                <a16:creationId xmlns:a16="http://schemas.microsoft.com/office/drawing/2014/main" id="{249E2B19-CE0E-4C32-A751-56CCF59B1616}"/>
+                <a16:creationId xmlns:a16="http://schemas.microsoft.com/office/drawing/2014/main" id="{244F562C-6B34-429F-963B-0D92E8ACD4C7}"/>
               </a:ext>
             </a:extLst>
           </p:cNvPr>
@@ -7417,7 +8233,7 @@
           <p:cNvPr id="2" name="">
             <a:extLst xmlns:a="http://schemas.openxmlformats.org/drawingml/2006/main">
               <a:ext uri="{FF2B5EF4-FFF2-40B4-BE49-F238E27FC236}">
-                <a16:creationId xmlns:a16="http://schemas.microsoft.com/office/drawing/2014/main" id="{91A51771-F318-4F42-BA57-838AC262BBB8}"/>
+                <a16:creationId xmlns:a16="http://schemas.microsoft.com/office/drawing/2014/main" id="{F771D17A-F083-40B4-83FE-F86121AC34C0}"/>
               </a:ext>
             </a:extLst>
           </p:cNvPr>
@@ -7475,7 +8291,7 @@
           <p:cNvPr id="3" name="">
             <a:extLst xmlns:a="http://schemas.openxmlformats.org/drawingml/2006/main">
               <a:ext uri="{FF2B5EF4-FFF2-40B4-BE49-F238E27FC236}">
-                <a16:creationId xmlns:a16="http://schemas.microsoft.com/office/drawing/2014/main" id="{64291FFF-9229-4C12-836F-981266FE7F6F}"/>
+                <a16:creationId xmlns:a16="http://schemas.microsoft.com/office/drawing/2014/main" id="{F53DCE23-B56B-457C-A486-64FA7DDCA326}"/>
               </a:ext>
             </a:extLst>
           </p:cNvPr>
@@ -7533,7 +8349,7 @@
           <p:cNvPr id="4" name="">
             <a:extLst xmlns:a="http://schemas.openxmlformats.org/drawingml/2006/main">
               <a:ext uri="{FF2B5EF4-FFF2-40B4-BE49-F238E27FC236}">
-                <a16:creationId xmlns:a16="http://schemas.microsoft.com/office/drawing/2014/main" id="{AF5B4819-23E5-4752-B747-AD6A08C3F123}"/>
+                <a16:creationId xmlns:a16="http://schemas.microsoft.com/office/drawing/2014/main" id="{FDB988D7-D4E3-485D-B066-EDB64948216C}"/>
               </a:ext>
             </a:extLst>
           </p:cNvPr>
@@ -7566,7 +8382,7 @@
           <p:cNvPr id="5" name="">
             <a:extLst xmlns:a="http://schemas.openxmlformats.org/drawingml/2006/main">
               <a:ext uri="{FF2B5EF4-FFF2-40B4-BE49-F238E27FC236}">
-                <a16:creationId xmlns:a16="http://schemas.microsoft.com/office/drawing/2014/main" id="{E010EAC0-18AB-446D-8515-76C791D402A4}"/>
+                <a16:creationId xmlns:a16="http://schemas.microsoft.com/office/drawing/2014/main" id="{EA6F85BC-4093-44A7-BDC3-A51598DB640E}"/>
               </a:ext>
             </a:extLst>
           </p:cNvPr>
@@ -7599,7 +8415,7 @@
           <p:cNvPr id="6" name="">
             <a:extLst xmlns:a="http://schemas.openxmlformats.org/drawingml/2006/main">
               <a:ext uri="{FF2B5EF4-FFF2-40B4-BE49-F238E27FC236}">
-                <a16:creationId xmlns:a16="http://schemas.microsoft.com/office/drawing/2014/main" id="{A980B69D-97EE-45E5-B89A-27C8095202FB}"/>
+                <a16:creationId xmlns:a16="http://schemas.microsoft.com/office/drawing/2014/main" id="{A2B4A5B4-664A-4B23-86B2-0A081AEB84F0}"/>
               </a:ext>
             </a:extLst>
           </p:cNvPr>
@@ -7657,7 +8473,7 @@
           <p:cNvPr id="7" name="">
             <a:extLst xmlns:a="http://schemas.openxmlformats.org/drawingml/2006/main">
               <a:ext uri="{FF2B5EF4-FFF2-40B4-BE49-F238E27FC236}">
-                <a16:creationId xmlns:a16="http://schemas.microsoft.com/office/drawing/2014/main" id="{861BB4BC-29E5-4725-9FE5-5EDF05CCFC2D}"/>
+                <a16:creationId xmlns:a16="http://schemas.microsoft.com/office/drawing/2014/main" id="{47C56BAB-1D23-4FAA-9DFF-17F6136A4ADD}"/>
               </a:ext>
             </a:extLst>
           </p:cNvPr>
@@ -7690,7 +8506,7 @@
           <p:cNvPr id="8" name="">
             <a:extLst xmlns:a="http://schemas.openxmlformats.org/drawingml/2006/main">
               <a:ext uri="{FF2B5EF4-FFF2-40B4-BE49-F238E27FC236}">
-                <a16:creationId xmlns:a16="http://schemas.microsoft.com/office/drawing/2014/main" id="{4A3CFAAA-E3DD-4578-B621-D6610E4F7CA7}"/>
+                <a16:creationId xmlns:a16="http://schemas.microsoft.com/office/drawing/2014/main" id="{D17EFE97-2313-4523-8A07-DEB28D89FB11}"/>
               </a:ext>
             </a:extLst>
           </p:cNvPr>
@@ -7748,7 +8564,7 @@
           <p:cNvPr id="9" name="">
             <a:extLst xmlns:a="http://schemas.openxmlformats.org/drawingml/2006/main">
               <a:ext uri="{FF2B5EF4-FFF2-40B4-BE49-F238E27FC236}">
-                <a16:creationId xmlns:a16="http://schemas.microsoft.com/office/drawing/2014/main" id="{27512EAB-94DD-4845-9EC9-2A7F0AB90599}"/>
+                <a16:creationId xmlns:a16="http://schemas.microsoft.com/office/drawing/2014/main" id="{13F3B460-5EA4-4448-A68D-58ACB2DB79F2}"/>
               </a:ext>
             </a:extLst>
           </p:cNvPr>
@@ -7781,7 +8597,7 @@
           <p:cNvPr id="10" name="">
             <a:extLst xmlns:a="http://schemas.openxmlformats.org/drawingml/2006/main">
               <a:ext uri="{FF2B5EF4-FFF2-40B4-BE49-F238E27FC236}">
-                <a16:creationId xmlns:a16="http://schemas.microsoft.com/office/drawing/2014/main" id="{222ED2D1-10EC-4340-8487-9E792FB0DEC3}"/>
+                <a16:creationId xmlns:a16="http://schemas.microsoft.com/office/drawing/2014/main" id="{447A862F-9E77-46FD-BC5D-3151369E2B08}"/>
               </a:ext>
             </a:extLst>
           </p:cNvPr>
@@ -7839,7 +8655,7 @@
           <p:cNvPr id="11" name="">
             <a:extLst xmlns:a="http://schemas.openxmlformats.org/drawingml/2006/main">
               <a:ext uri="{FF2B5EF4-FFF2-40B4-BE49-F238E27FC236}">
-                <a16:creationId xmlns:a16="http://schemas.microsoft.com/office/drawing/2014/main" id="{B0327CFE-C2B8-408F-AA98-56508D037382}"/>
+                <a16:creationId xmlns:a16="http://schemas.microsoft.com/office/drawing/2014/main" id="{51C7D901-A494-4D75-AE07-20B8FD7F957A}"/>
               </a:ext>
             </a:extLst>
           </p:cNvPr>
@@ -7872,7 +8688,7 @@
           <p:cNvPr id="12" name="">
             <a:extLst xmlns:a="http://schemas.openxmlformats.org/drawingml/2006/main">
               <a:ext uri="{FF2B5EF4-FFF2-40B4-BE49-F238E27FC236}">
-                <a16:creationId xmlns:a16="http://schemas.microsoft.com/office/drawing/2014/main" id="{EF9A020E-3DEA-423D-9058-901F3713391D}"/>
+                <a16:creationId xmlns:a16="http://schemas.microsoft.com/office/drawing/2014/main" id="{3057D342-D601-4CEA-A78D-50CF417FF652}"/>
               </a:ext>
             </a:extLst>
           </p:cNvPr>
@@ -7930,7 +8746,7 @@
           <p:cNvPr id="13" name="">
             <a:extLst xmlns:a="http://schemas.openxmlformats.org/drawingml/2006/main">
               <a:ext uri="{FF2B5EF4-FFF2-40B4-BE49-F238E27FC236}">
-                <a16:creationId xmlns:a16="http://schemas.microsoft.com/office/drawing/2014/main" id="{58757B39-4278-45DC-B9A0-037D9E873FA6}"/>
+                <a16:creationId xmlns:a16="http://schemas.microsoft.com/office/drawing/2014/main" id="{8771933D-C81D-4154-A716-093DC9347EC6}"/>
               </a:ext>
             </a:extLst>
           </p:cNvPr>
@@ -7986,7 +8802,7 @@
     </p:spTree>
     <p:extLst>
       <p:ext uri="{BB962C8B-B14F-4D97-AF65-F5344CB8AC3E}">
-        <p14:creationId xmlns:p14="http://schemas.microsoft.com/office/powerpoint/2010/main" val="112145254"/>
+        <p14:creationId xmlns:p14="http://schemas.microsoft.com/office/powerpoint/2010/main" val="892973416"/>
       </p:ext>
     </p:extLst>
   </p:cSld>
@@ -8017,7 +8833,7 @@
           <p:cNvPr id="32" name="">
             <a:extLst xmlns:a="http://schemas.openxmlformats.org/drawingml/2006/main">
               <a:ext uri="{FF2B5EF4-FFF2-40B4-BE49-F238E27FC236}">
-                <a16:creationId xmlns:a16="http://schemas.microsoft.com/office/drawing/2014/main" id="{E49C2AC7-B77A-4134-A207-C558824254E7}"/>
+                <a16:creationId xmlns:a16="http://schemas.microsoft.com/office/drawing/2014/main" id="{D58512A3-02BB-4373-BF24-C4CB6CED4B16}"/>
               </a:ext>
             </a:extLst>
           </p:cNvPr>
@@ -8075,7 +8891,7 @@
           <p:cNvPr id="2" name="">
             <a:extLst xmlns:a="http://schemas.openxmlformats.org/drawingml/2006/main">
               <a:ext uri="{FF2B5EF4-FFF2-40B4-BE49-F238E27FC236}">
-                <a16:creationId xmlns:a16="http://schemas.microsoft.com/office/drawing/2014/main" id="{F9A079B0-4C41-45EE-A862-643D582A318F}"/>
+                <a16:creationId xmlns:a16="http://schemas.microsoft.com/office/drawing/2014/main" id="{5CFACA1E-6829-4B76-927B-8945049538C6}"/>
               </a:ext>
             </a:extLst>
           </p:cNvPr>
@@ -8133,7 +8949,7 @@
           <p:cNvPr id="3" name="">
             <a:extLst xmlns:a="http://schemas.openxmlformats.org/drawingml/2006/main">
               <a:ext uri="{FF2B5EF4-FFF2-40B4-BE49-F238E27FC236}">
-                <a16:creationId xmlns:a16="http://schemas.microsoft.com/office/drawing/2014/main" id="{EA53406C-9DD9-4EE0-8CF0-C09F36EBEBB7}"/>
+                <a16:creationId xmlns:a16="http://schemas.microsoft.com/office/drawing/2014/main" id="{2A339869-8334-49C9-AAE4-C4002BD38093}"/>
               </a:ext>
             </a:extLst>
           </p:cNvPr>
@@ -8191,7 +9007,7 @@
           <p:cNvPr id="4" name="">
             <a:extLst xmlns:a="http://schemas.openxmlformats.org/drawingml/2006/main">
               <a:ext uri="{FF2B5EF4-FFF2-40B4-BE49-F238E27FC236}">
-                <a16:creationId xmlns:a16="http://schemas.microsoft.com/office/drawing/2014/main" id="{AB1A9501-457D-44A5-8923-BDFF8C04DB48}"/>
+                <a16:creationId xmlns:a16="http://schemas.microsoft.com/office/drawing/2014/main" id="{E5787421-00DE-4DCF-9DB5-90002B4DBB45}"/>
               </a:ext>
             </a:extLst>
           </p:cNvPr>
@@ -8224,7 +9040,7 @@
           <p:cNvPr id="5" name="">
             <a:extLst xmlns:a="http://schemas.openxmlformats.org/drawingml/2006/main">
               <a:ext uri="{FF2B5EF4-FFF2-40B4-BE49-F238E27FC236}">
-                <a16:creationId xmlns:a16="http://schemas.microsoft.com/office/drawing/2014/main" id="{11E4D768-3F8E-4EC8-91AC-E9B08A6E90EB}"/>
+                <a16:creationId xmlns:a16="http://schemas.microsoft.com/office/drawing/2014/main" id="{656A8821-B3F3-49AF-BCD4-A469760CE71D}"/>
               </a:ext>
             </a:extLst>
           </p:cNvPr>
@@ -8259,7 +9075,7 @@
           <p:cNvPr id="6" name="">
             <a:extLst xmlns:a="http://schemas.openxmlformats.org/drawingml/2006/main">
               <a:ext uri="{FF2B5EF4-FFF2-40B4-BE49-F238E27FC236}">
-                <a16:creationId xmlns:a16="http://schemas.microsoft.com/office/drawing/2014/main" id="{CC415CBC-F6C6-4D95-88C1-6BE762D391BD}"/>
+                <a16:creationId xmlns:a16="http://schemas.microsoft.com/office/drawing/2014/main" id="{C54A892A-95E9-4B98-92C0-6868062F6F3D}"/>
               </a:ext>
             </a:extLst>
           </p:cNvPr>
@@ -8317,7 +9133,7 @@
           <p:cNvPr id="7" name="">
             <a:extLst xmlns:a="http://schemas.openxmlformats.org/drawingml/2006/main">
               <a:ext uri="{FF2B5EF4-FFF2-40B4-BE49-F238E27FC236}">
-                <a16:creationId xmlns:a16="http://schemas.microsoft.com/office/drawing/2014/main" id="{72CE869E-0EB1-4F9F-A0B6-F15A632F9C34}"/>
+                <a16:creationId xmlns:a16="http://schemas.microsoft.com/office/drawing/2014/main" id="{1FBAEA72-9E0F-415F-8080-4B193738D65A}"/>
               </a:ext>
             </a:extLst>
           </p:cNvPr>
@@ -8375,7 +9191,7 @@
           <p:cNvPr id="8" name="">
             <a:extLst xmlns:a="http://schemas.openxmlformats.org/drawingml/2006/main">
               <a:ext uri="{FF2B5EF4-FFF2-40B4-BE49-F238E27FC236}">
-                <a16:creationId xmlns:a16="http://schemas.microsoft.com/office/drawing/2014/main" id="{E9E8EDB0-93F2-4133-B54E-D499979FF3AA}"/>
+                <a16:creationId xmlns:a16="http://schemas.microsoft.com/office/drawing/2014/main" id="{0D4ECF19-C757-41C2-8CEF-60619C34EEA7}"/>
               </a:ext>
             </a:extLst>
           </p:cNvPr>
@@ -8410,7 +9226,7 @@
           <p:cNvPr id="9" name="">
             <a:extLst xmlns:a="http://schemas.openxmlformats.org/drawingml/2006/main">
               <a:ext uri="{FF2B5EF4-FFF2-40B4-BE49-F238E27FC236}">
-                <a16:creationId xmlns:a16="http://schemas.microsoft.com/office/drawing/2014/main" id="{9DAA5B70-93F8-49D2-BA1F-451BD57234E0}"/>
+                <a16:creationId xmlns:a16="http://schemas.microsoft.com/office/drawing/2014/main" id="{FF839578-4D8E-470D-ADC7-88F656B48510}"/>
               </a:ext>
             </a:extLst>
           </p:cNvPr>
@@ -8468,7 +9284,7 @@
           <p:cNvPr id="10" name="">
             <a:extLst xmlns:a="http://schemas.openxmlformats.org/drawingml/2006/main">
               <a:ext uri="{FF2B5EF4-FFF2-40B4-BE49-F238E27FC236}">
-                <a16:creationId xmlns:a16="http://schemas.microsoft.com/office/drawing/2014/main" id="{EE400F64-9D14-4A05-936C-3E8847BBCC37}"/>
+                <a16:creationId xmlns:a16="http://schemas.microsoft.com/office/drawing/2014/main" id="{92047D77-66FA-45C0-A8F2-0378A52CC88C}"/>
               </a:ext>
             </a:extLst>
           </p:cNvPr>
@@ -8526,7 +9342,7 @@
           <p:cNvPr id="11" name="">
             <a:extLst xmlns:a="http://schemas.openxmlformats.org/drawingml/2006/main">
               <a:ext uri="{FF2B5EF4-FFF2-40B4-BE49-F238E27FC236}">
-                <a16:creationId xmlns:a16="http://schemas.microsoft.com/office/drawing/2014/main" id="{0FA89526-630D-4EDD-B389-965D1CB73DDA}"/>
+                <a16:creationId xmlns:a16="http://schemas.microsoft.com/office/drawing/2014/main" id="{7982AD27-3E40-48D7-BBBC-0763A5498D89}"/>
               </a:ext>
             </a:extLst>
           </p:cNvPr>
@@ -8561,7 +9377,7 @@
           <p:cNvPr id="12" name="">
             <a:extLst xmlns:a="http://schemas.openxmlformats.org/drawingml/2006/main">
               <a:ext uri="{FF2B5EF4-FFF2-40B4-BE49-F238E27FC236}">
-                <a16:creationId xmlns:a16="http://schemas.microsoft.com/office/drawing/2014/main" id="{6B568CD6-00FB-4BAC-A9D9-9D632280E0C4}"/>
+                <a16:creationId xmlns:a16="http://schemas.microsoft.com/office/drawing/2014/main" id="{A6D291D9-9B18-4B04-B604-5BBF251FD26B}"/>
               </a:ext>
             </a:extLst>
           </p:cNvPr>
@@ -8619,7 +9435,7 @@
           <p:cNvPr id="13" name="">
             <a:extLst xmlns:a="http://schemas.openxmlformats.org/drawingml/2006/main">
               <a:ext uri="{FF2B5EF4-FFF2-40B4-BE49-F238E27FC236}">
-                <a16:creationId xmlns:a16="http://schemas.microsoft.com/office/drawing/2014/main" id="{92EC80F0-0BDF-4125-B900-EB33645733C4}"/>
+                <a16:creationId xmlns:a16="http://schemas.microsoft.com/office/drawing/2014/main" id="{663D3BE8-9E11-4C8E-99DC-0B5CC9480F79}"/>
               </a:ext>
             </a:extLst>
           </p:cNvPr>
@@ -8677,7 +9493,7 @@
           <p:cNvPr id="14" name="">
             <a:extLst xmlns:a="http://schemas.openxmlformats.org/drawingml/2006/main">
               <a:ext uri="{FF2B5EF4-FFF2-40B4-BE49-F238E27FC236}">
-                <a16:creationId xmlns:a16="http://schemas.microsoft.com/office/drawing/2014/main" id="{39CFFE1F-5846-4A92-9106-8DBA55A57C23}"/>
+                <a16:creationId xmlns:a16="http://schemas.microsoft.com/office/drawing/2014/main" id="{7305A8AA-F9FD-4372-B43F-D9EB4E2C97F0}"/>
               </a:ext>
             </a:extLst>
           </p:cNvPr>
@@ -8712,7 +9528,7 @@
           <p:cNvPr id="15" name="">
             <a:extLst xmlns:a="http://schemas.openxmlformats.org/drawingml/2006/main">
               <a:ext uri="{FF2B5EF4-FFF2-40B4-BE49-F238E27FC236}">
-                <a16:creationId xmlns:a16="http://schemas.microsoft.com/office/drawing/2014/main" id="{926F7896-BCC9-43E0-B2D8-8D0637C2C2E1}"/>
+                <a16:creationId xmlns:a16="http://schemas.microsoft.com/office/drawing/2014/main" id="{24A13E98-4E35-439C-A36D-D26C8643DF03}"/>
               </a:ext>
             </a:extLst>
           </p:cNvPr>
@@ -8770,7 +9586,7 @@
           <p:cNvPr id="16" name="">
             <a:extLst xmlns:a="http://schemas.openxmlformats.org/drawingml/2006/main">
               <a:ext uri="{FF2B5EF4-FFF2-40B4-BE49-F238E27FC236}">
-                <a16:creationId xmlns:a16="http://schemas.microsoft.com/office/drawing/2014/main" id="{DE66592E-F64D-488F-B920-844C129587B8}"/>
+                <a16:creationId xmlns:a16="http://schemas.microsoft.com/office/drawing/2014/main" id="{ED5D7EEA-6175-477D-9B1A-B43A1F761D08}"/>
               </a:ext>
             </a:extLst>
           </p:cNvPr>
@@ -8828,7 +9644,7 @@
           <p:cNvPr id="17" name="">
             <a:extLst xmlns:a="http://schemas.openxmlformats.org/drawingml/2006/main">
               <a:ext uri="{FF2B5EF4-FFF2-40B4-BE49-F238E27FC236}">
-                <a16:creationId xmlns:a16="http://schemas.microsoft.com/office/drawing/2014/main" id="{5DC684C0-85DC-40C7-BC4D-B6CB3C75CB76}"/>
+                <a16:creationId xmlns:a16="http://schemas.microsoft.com/office/drawing/2014/main" id="{C2FDF327-7DBE-4FE6-AA3E-EFBB0841B10F}"/>
               </a:ext>
             </a:extLst>
           </p:cNvPr>
@@ -8863,7 +9679,7 @@
           <p:cNvPr id="18" name="">
             <a:extLst xmlns:a="http://schemas.openxmlformats.org/drawingml/2006/main">
               <a:ext uri="{FF2B5EF4-FFF2-40B4-BE49-F238E27FC236}">
-                <a16:creationId xmlns:a16="http://schemas.microsoft.com/office/drawing/2014/main" id="{54222084-8936-4238-9D41-4399CC0B877B}"/>
+                <a16:creationId xmlns:a16="http://schemas.microsoft.com/office/drawing/2014/main" id="{BE43A48D-63FB-44D4-A871-6FB886B36033}"/>
               </a:ext>
             </a:extLst>
           </p:cNvPr>
@@ -8921,7 +9737,7 @@
           <p:cNvPr id="19" name="">
             <a:extLst xmlns:a="http://schemas.openxmlformats.org/drawingml/2006/main">
               <a:ext uri="{FF2B5EF4-FFF2-40B4-BE49-F238E27FC236}">
-                <a16:creationId xmlns:a16="http://schemas.microsoft.com/office/drawing/2014/main" id="{CEF02F59-A549-441E-A15A-C2F13A8D1D42}"/>
+                <a16:creationId xmlns:a16="http://schemas.microsoft.com/office/drawing/2014/main" id="{BF2763A8-D836-4DF2-B3CB-0777CBCDEA7C}"/>
               </a:ext>
             </a:extLst>
           </p:cNvPr>
@@ -8979,7 +9795,7 @@
           <p:cNvPr id="20" name="">
             <a:extLst xmlns:a="http://schemas.openxmlformats.org/drawingml/2006/main">
               <a:ext uri="{FF2B5EF4-FFF2-40B4-BE49-F238E27FC236}">
-                <a16:creationId xmlns:a16="http://schemas.microsoft.com/office/drawing/2014/main" id="{3328539D-0880-4D42-9203-98A35B260C8C}"/>
+                <a16:creationId xmlns:a16="http://schemas.microsoft.com/office/drawing/2014/main" id="{041783E4-0AE0-4F5A-A10F-0273CA530662}"/>
               </a:ext>
             </a:extLst>
           </p:cNvPr>
@@ -9014,7 +9830,7 @@
           <p:cNvPr id="21" name="">
             <a:extLst xmlns:a="http://schemas.openxmlformats.org/drawingml/2006/main">
               <a:ext uri="{FF2B5EF4-FFF2-40B4-BE49-F238E27FC236}">
-                <a16:creationId xmlns:a16="http://schemas.microsoft.com/office/drawing/2014/main" id="{B965A04F-B51E-42BD-82DA-7E8E94534A86}"/>
+                <a16:creationId xmlns:a16="http://schemas.microsoft.com/office/drawing/2014/main" id="{D6176C94-4C2E-4315-89F3-A0A9968E20E1}"/>
               </a:ext>
             </a:extLst>
           </p:cNvPr>
@@ -9072,7 +9888,7 @@
           <p:cNvPr id="22" name="">
             <a:extLst xmlns:a="http://schemas.openxmlformats.org/drawingml/2006/main">
               <a:ext uri="{FF2B5EF4-FFF2-40B4-BE49-F238E27FC236}">
-                <a16:creationId xmlns:a16="http://schemas.microsoft.com/office/drawing/2014/main" id="{0AF8DE02-1389-4944-AF28-1606756B1BE6}"/>
+                <a16:creationId xmlns:a16="http://schemas.microsoft.com/office/drawing/2014/main" id="{9CF7CADF-E599-4603-801B-5866A5668CC8}"/>
               </a:ext>
             </a:extLst>
           </p:cNvPr>
@@ -9130,7 +9946,7 @@
           <p:cNvPr id="23" name="">
             <a:extLst xmlns:a="http://schemas.openxmlformats.org/drawingml/2006/main">
               <a:ext uri="{FF2B5EF4-FFF2-40B4-BE49-F238E27FC236}">
-                <a16:creationId xmlns:a16="http://schemas.microsoft.com/office/drawing/2014/main" id="{AA69CECD-15E7-451C-A1C3-25DB0F085054}"/>
+                <a16:creationId xmlns:a16="http://schemas.microsoft.com/office/drawing/2014/main" id="{23005D10-2B87-4C57-98D6-F39B16163DEC}"/>
               </a:ext>
             </a:extLst>
           </p:cNvPr>
@@ -9165,7 +9981,7 @@
           <p:cNvPr id="24" name="">
             <a:extLst xmlns:a="http://schemas.openxmlformats.org/drawingml/2006/main">
               <a:ext uri="{FF2B5EF4-FFF2-40B4-BE49-F238E27FC236}">
-                <a16:creationId xmlns:a16="http://schemas.microsoft.com/office/drawing/2014/main" id="{1A2874C2-B643-42D7-840B-5224B0CC3D5B}"/>
+                <a16:creationId xmlns:a16="http://schemas.microsoft.com/office/drawing/2014/main" id="{C401B2B8-EAB6-4496-94FF-DF0F3D903346}"/>
               </a:ext>
             </a:extLst>
           </p:cNvPr>
@@ -9223,7 +10039,7 @@
           <p:cNvPr id="25" name="">
             <a:extLst xmlns:a="http://schemas.openxmlformats.org/drawingml/2006/main">
               <a:ext uri="{FF2B5EF4-FFF2-40B4-BE49-F238E27FC236}">
-                <a16:creationId xmlns:a16="http://schemas.microsoft.com/office/drawing/2014/main" id="{DB7F7303-8361-4217-BA0B-D7790A5142A7}"/>
+                <a16:creationId xmlns:a16="http://schemas.microsoft.com/office/drawing/2014/main" id="{7E865DAC-7557-4815-B092-9ADD6AF3B35E}"/>
               </a:ext>
             </a:extLst>
           </p:cNvPr>
@@ -9256,7 +10072,7 @@
           <p:cNvPr id="26" name="">
             <a:extLst xmlns:a="http://schemas.openxmlformats.org/drawingml/2006/main">
               <a:ext uri="{FF2B5EF4-FFF2-40B4-BE49-F238E27FC236}">
-                <a16:creationId xmlns:a16="http://schemas.microsoft.com/office/drawing/2014/main" id="{3D4294A8-1C36-4E5C-95B5-18F20C5704C3}"/>
+                <a16:creationId xmlns:a16="http://schemas.microsoft.com/office/drawing/2014/main" id="{EF31F831-8B85-4EEE-A3BB-38BD1FB17E19}"/>
               </a:ext>
             </a:extLst>
           </p:cNvPr>
@@ -9314,7 +10130,7 @@
           <p:cNvPr id="27" name="">
             <a:extLst xmlns:a="http://schemas.openxmlformats.org/drawingml/2006/main">
               <a:ext uri="{FF2B5EF4-FFF2-40B4-BE49-F238E27FC236}">
-                <a16:creationId xmlns:a16="http://schemas.microsoft.com/office/drawing/2014/main" id="{8A863FE7-0223-46BE-A924-E860D6041DCE}"/>
+                <a16:creationId xmlns:a16="http://schemas.microsoft.com/office/drawing/2014/main" id="{CFDEF20F-32FB-44D3-A992-231B2B14A2DF}"/>
               </a:ext>
             </a:extLst>
           </p:cNvPr>
@@ -9347,7 +10163,7 @@
           <p:cNvPr id="28" name="">
             <a:extLst xmlns:a="http://schemas.openxmlformats.org/drawingml/2006/main">
               <a:ext uri="{FF2B5EF4-FFF2-40B4-BE49-F238E27FC236}">
-                <a16:creationId xmlns:a16="http://schemas.microsoft.com/office/drawing/2014/main" id="{96983DB6-758C-4A54-8F55-7D8ED1A50B28}"/>
+                <a16:creationId xmlns:a16="http://schemas.microsoft.com/office/drawing/2014/main" id="{13673329-BA99-434E-8737-D64924A275CD}"/>
               </a:ext>
             </a:extLst>
           </p:cNvPr>
@@ -9405,7 +10221,7 @@
           <p:cNvPr id="29" name="">
             <a:extLst xmlns:a="http://schemas.openxmlformats.org/drawingml/2006/main">
               <a:ext uri="{FF2B5EF4-FFF2-40B4-BE49-F238E27FC236}">
-                <a16:creationId xmlns:a16="http://schemas.microsoft.com/office/drawing/2014/main" id="{169E8A22-04E8-4097-93A6-35A222A33BBC}"/>
+                <a16:creationId xmlns:a16="http://schemas.microsoft.com/office/drawing/2014/main" id="{E0C95F73-4BCD-4D10-B440-5C7747B9FC88}"/>
               </a:ext>
             </a:extLst>
           </p:cNvPr>
@@ -9438,7 +10254,7 @@
           <p:cNvPr id="30" name="">
             <a:extLst xmlns:a="http://schemas.openxmlformats.org/drawingml/2006/main">
               <a:ext uri="{FF2B5EF4-FFF2-40B4-BE49-F238E27FC236}">
-                <a16:creationId xmlns:a16="http://schemas.microsoft.com/office/drawing/2014/main" id="{F9836029-722A-4849-9F24-B7EF5FE7BD8F}"/>
+                <a16:creationId xmlns:a16="http://schemas.microsoft.com/office/drawing/2014/main" id="{5121CDFD-47B4-428C-805C-BDD24B97F4CB}"/>
               </a:ext>
             </a:extLst>
           </p:cNvPr>
@@ -9496,7 +10312,7 @@
           <p:cNvPr id="31" name="">
             <a:extLst xmlns:a="http://schemas.openxmlformats.org/drawingml/2006/main">
               <a:ext uri="{FF2B5EF4-FFF2-40B4-BE49-F238E27FC236}">
-                <a16:creationId xmlns:a16="http://schemas.microsoft.com/office/drawing/2014/main" id="{69127964-6DFB-42D9-BC8F-A8CC9560F467}"/>
+                <a16:creationId xmlns:a16="http://schemas.microsoft.com/office/drawing/2014/main" id="{9DD99FAB-733F-4F19-AB63-0AE98E281CB1}"/>
               </a:ext>
             </a:extLst>
           </p:cNvPr>
@@ -9552,7 +10368,7 @@
     </p:spTree>
     <p:extLst>
       <p:ext uri="{BB962C8B-B14F-4D97-AF65-F5344CB8AC3E}">
-        <p14:creationId xmlns:p14="http://schemas.microsoft.com/office/powerpoint/2010/main" val="846654132"/>
+        <p14:creationId xmlns:p14="http://schemas.microsoft.com/office/powerpoint/2010/main" val="288167150"/>
       </p:ext>
     </p:extLst>
   </p:cSld>
@@ -9583,7 +10399,7 @@
           <p:cNvPr id="22" name="">
             <a:extLst xmlns:a="http://schemas.openxmlformats.org/drawingml/2006/main">
               <a:ext uri="{FF2B5EF4-FFF2-40B4-BE49-F238E27FC236}">
-                <a16:creationId xmlns:a16="http://schemas.microsoft.com/office/drawing/2014/main" id="{7521BF1D-A00E-4FC5-BAD9-A8E28186F38B}"/>
+                <a16:creationId xmlns:a16="http://schemas.microsoft.com/office/drawing/2014/main" id="{7140F46A-92FB-41E6-ACD4-CA7C12DA6550}"/>
               </a:ext>
             </a:extLst>
           </p:cNvPr>
@@ -9641,7 +10457,7 @@
           <p:cNvPr id="2" name="">
             <a:extLst xmlns:a="http://schemas.openxmlformats.org/drawingml/2006/main">
               <a:ext uri="{FF2B5EF4-FFF2-40B4-BE49-F238E27FC236}">
-                <a16:creationId xmlns:a16="http://schemas.microsoft.com/office/drawing/2014/main" id="{CD5207F4-A340-4FFD-890C-C67EF6855820}"/>
+                <a16:creationId xmlns:a16="http://schemas.microsoft.com/office/drawing/2014/main" id="{AE37A511-A168-4080-9CDE-6F7D7EAFDC42}"/>
               </a:ext>
             </a:extLst>
           </p:cNvPr>
@@ -9699,7 +10515,7 @@
           <p:cNvPr id="3" name="">
             <a:extLst xmlns:a="http://schemas.openxmlformats.org/drawingml/2006/main">
               <a:ext uri="{FF2B5EF4-FFF2-40B4-BE49-F238E27FC236}">
-                <a16:creationId xmlns:a16="http://schemas.microsoft.com/office/drawing/2014/main" id="{D399CB69-B478-43BB-8BB9-E4E0794212B6}"/>
+                <a16:creationId xmlns:a16="http://schemas.microsoft.com/office/drawing/2014/main" id="{1A88AC63-E157-4DC3-AAAF-E8107A0E7965}"/>
               </a:ext>
             </a:extLst>
           </p:cNvPr>
@@ -9757,7 +10573,7 @@
           <p:cNvPr id="4" name="">
             <a:extLst xmlns:a="http://schemas.openxmlformats.org/drawingml/2006/main">
               <a:ext uri="{FF2B5EF4-FFF2-40B4-BE49-F238E27FC236}">
-                <a16:creationId xmlns:a16="http://schemas.microsoft.com/office/drawing/2014/main" id="{04F296AC-843F-46DE-A8BD-32FA766FC53A}"/>
+                <a16:creationId xmlns:a16="http://schemas.microsoft.com/office/drawing/2014/main" id="{CBBF42B7-4FD0-49A0-91C3-A653AFE8974F}"/>
               </a:ext>
             </a:extLst>
           </p:cNvPr>
@@ -9790,7 +10606,7 @@
           <p:cNvPr id="5" name="">
             <a:extLst xmlns:a="http://schemas.openxmlformats.org/drawingml/2006/main">
               <a:ext uri="{FF2B5EF4-FFF2-40B4-BE49-F238E27FC236}">
-                <a16:creationId xmlns:a16="http://schemas.microsoft.com/office/drawing/2014/main" id="{53CDF02E-03AA-4C09-B11B-D17D440C019A}"/>
+                <a16:creationId xmlns:a16="http://schemas.microsoft.com/office/drawing/2014/main" id="{2934800F-BA0B-4691-91D4-84E368CDC8F2}"/>
               </a:ext>
             </a:extLst>
           </p:cNvPr>
@@ -9825,7 +10641,7 @@
           <p:cNvPr id="6" name="">
             <a:extLst xmlns:a="http://schemas.openxmlformats.org/drawingml/2006/main">
               <a:ext uri="{FF2B5EF4-FFF2-40B4-BE49-F238E27FC236}">
-                <a16:creationId xmlns:a16="http://schemas.microsoft.com/office/drawing/2014/main" id="{08723BCD-B064-4653-B835-B242D3154673}"/>
+                <a16:creationId xmlns:a16="http://schemas.microsoft.com/office/drawing/2014/main" id="{0ECA1C38-B9A6-4811-AE7B-2AD0F41F874D}"/>
               </a:ext>
             </a:extLst>
           </p:cNvPr>
@@ -9858,7 +10674,7 @@
           <p:cNvPr id="7" name="">
             <a:extLst xmlns:a="http://schemas.openxmlformats.org/drawingml/2006/main">
               <a:ext uri="{FF2B5EF4-FFF2-40B4-BE49-F238E27FC236}">
-                <a16:creationId xmlns:a16="http://schemas.microsoft.com/office/drawing/2014/main" id="{5B6565E6-A0F4-45E9-AA79-425DDFEF2A8F}"/>
+                <a16:creationId xmlns:a16="http://schemas.microsoft.com/office/drawing/2014/main" id="{343680FF-D243-4CAE-8145-88AE262D58D6}"/>
               </a:ext>
             </a:extLst>
           </p:cNvPr>
@@ -9916,7 +10732,7 @@
           <p:cNvPr id="8" name="">
             <a:extLst xmlns:a="http://schemas.openxmlformats.org/drawingml/2006/main">
               <a:ext uri="{FF2B5EF4-FFF2-40B4-BE49-F238E27FC236}">
-                <a16:creationId xmlns:a16="http://schemas.microsoft.com/office/drawing/2014/main" id="{024B5797-1D81-44E7-95EE-0782BB4D92BC}"/>
+                <a16:creationId xmlns:a16="http://schemas.microsoft.com/office/drawing/2014/main" id="{DAF9B5EC-AA93-4B5F-8270-38857CE05E4A}"/>
               </a:ext>
             </a:extLst>
           </p:cNvPr>
@@ -9974,7 +10790,7 @@
           <p:cNvPr id="9" name="">
             <a:extLst xmlns:a="http://schemas.openxmlformats.org/drawingml/2006/main">
               <a:ext uri="{FF2B5EF4-FFF2-40B4-BE49-F238E27FC236}">
-                <a16:creationId xmlns:a16="http://schemas.microsoft.com/office/drawing/2014/main" id="{7AD22DD5-3076-4A40-9976-DC3608045FE8}"/>
+                <a16:creationId xmlns:a16="http://schemas.microsoft.com/office/drawing/2014/main" id="{E47FC5D3-7CBC-47CD-B8E9-3F092F438E83}"/>
               </a:ext>
             </a:extLst>
           </p:cNvPr>
@@ -10009,7 +10825,7 @@
           <p:cNvPr id="10" name="">
             <a:extLst xmlns:a="http://schemas.openxmlformats.org/drawingml/2006/main">
               <a:ext uri="{FF2B5EF4-FFF2-40B4-BE49-F238E27FC236}">
-                <a16:creationId xmlns:a16="http://schemas.microsoft.com/office/drawing/2014/main" id="{85C1C1A7-5969-4E70-BB49-DB69450B549A}"/>
+                <a16:creationId xmlns:a16="http://schemas.microsoft.com/office/drawing/2014/main" id="{C8782CB0-E9AE-4FCF-B860-9F7C5021569B}"/>
               </a:ext>
             </a:extLst>
           </p:cNvPr>
@@ -10042,7 +10858,7 @@
           <p:cNvPr id="11" name="">
             <a:extLst xmlns:a="http://schemas.openxmlformats.org/drawingml/2006/main">
               <a:ext uri="{FF2B5EF4-FFF2-40B4-BE49-F238E27FC236}">
-                <a16:creationId xmlns:a16="http://schemas.microsoft.com/office/drawing/2014/main" id="{77605CA8-0E62-4167-BFEB-16A159A0240B}"/>
+                <a16:creationId xmlns:a16="http://schemas.microsoft.com/office/drawing/2014/main" id="{CF9FF851-8C49-47B7-8A30-709492A5570A}"/>
               </a:ext>
             </a:extLst>
           </p:cNvPr>
@@ -10100,7 +10916,7 @@
           <p:cNvPr id="12" name="">
             <a:extLst xmlns:a="http://schemas.openxmlformats.org/drawingml/2006/main">
               <a:ext uri="{FF2B5EF4-FFF2-40B4-BE49-F238E27FC236}">
-                <a16:creationId xmlns:a16="http://schemas.microsoft.com/office/drawing/2014/main" id="{D08A52FB-B97A-46EA-8611-B130BFB2A545}"/>
+                <a16:creationId xmlns:a16="http://schemas.microsoft.com/office/drawing/2014/main" id="{F3669D78-7A7B-4E5B-8A90-F36EE4AB65E3}"/>
               </a:ext>
             </a:extLst>
           </p:cNvPr>
@@ -10158,7 +10974,7 @@
           <p:cNvPr id="13" name="">
             <a:extLst xmlns:a="http://schemas.openxmlformats.org/drawingml/2006/main">
               <a:ext uri="{FF2B5EF4-FFF2-40B4-BE49-F238E27FC236}">
-                <a16:creationId xmlns:a16="http://schemas.microsoft.com/office/drawing/2014/main" id="{A6F5ADDE-D739-4F1A-9465-833739CECA7A}"/>
+                <a16:creationId xmlns:a16="http://schemas.microsoft.com/office/drawing/2014/main" id="{FD4FFC73-F8F2-4EF7-92CD-AA90CE4D3D57}"/>
               </a:ext>
             </a:extLst>
           </p:cNvPr>
@@ -10193,7 +11009,7 @@
           <p:cNvPr id="14" name="">
             <a:extLst xmlns:a="http://schemas.openxmlformats.org/drawingml/2006/main">
               <a:ext uri="{FF2B5EF4-FFF2-40B4-BE49-F238E27FC236}">
-                <a16:creationId xmlns:a16="http://schemas.microsoft.com/office/drawing/2014/main" id="{B1ADA4BD-0CF8-462E-BA5C-C986F38C23D9}"/>
+                <a16:creationId xmlns:a16="http://schemas.microsoft.com/office/drawing/2014/main" id="{4E61D488-20FF-460E-9076-2C32738EB099}"/>
               </a:ext>
             </a:extLst>
           </p:cNvPr>
@@ -10226,7 +11042,7 @@
           <p:cNvPr id="15" name="">
             <a:extLst xmlns:a="http://schemas.openxmlformats.org/drawingml/2006/main">
               <a:ext uri="{FF2B5EF4-FFF2-40B4-BE49-F238E27FC236}">
-                <a16:creationId xmlns:a16="http://schemas.microsoft.com/office/drawing/2014/main" id="{8915D9A6-C0CD-483E-8AF6-5A39841C499B}"/>
+                <a16:creationId xmlns:a16="http://schemas.microsoft.com/office/drawing/2014/main" id="{89F1DA81-2019-456C-8729-C9181DA3E9C6}"/>
               </a:ext>
             </a:extLst>
           </p:cNvPr>
@@ -10284,7 +11100,7 @@
           <p:cNvPr id="16" name="">
             <a:extLst xmlns:a="http://schemas.openxmlformats.org/drawingml/2006/main">
               <a:ext uri="{FF2B5EF4-FFF2-40B4-BE49-F238E27FC236}">
-                <a16:creationId xmlns:a16="http://schemas.microsoft.com/office/drawing/2014/main" id="{102B5AF1-CE5E-4E5D-B296-6957BCFDB217}"/>
+                <a16:creationId xmlns:a16="http://schemas.microsoft.com/office/drawing/2014/main" id="{6B3A472B-E2D7-44D2-937D-F17FDDEEA05A}"/>
               </a:ext>
             </a:extLst>
           </p:cNvPr>
@@ -10342,7 +11158,7 @@
           <p:cNvPr id="17" name="">
             <a:extLst xmlns:a="http://schemas.openxmlformats.org/drawingml/2006/main">
               <a:ext uri="{FF2B5EF4-FFF2-40B4-BE49-F238E27FC236}">
-                <a16:creationId xmlns:a16="http://schemas.microsoft.com/office/drawing/2014/main" id="{19BEA35E-1EFC-4990-A632-BBD09C641636}"/>
+                <a16:creationId xmlns:a16="http://schemas.microsoft.com/office/drawing/2014/main" id="{1A43BE35-CD69-44AD-9956-42936BDDCDE5}"/>
               </a:ext>
             </a:extLst>
           </p:cNvPr>
@@ -10377,7 +11193,7 @@
           <p:cNvPr id="18" name="">
             <a:extLst xmlns:a="http://schemas.openxmlformats.org/drawingml/2006/main">
               <a:ext uri="{FF2B5EF4-FFF2-40B4-BE49-F238E27FC236}">
-                <a16:creationId xmlns:a16="http://schemas.microsoft.com/office/drawing/2014/main" id="{6DC4204B-B225-43CB-9F8C-1147B02BC27D}"/>
+                <a16:creationId xmlns:a16="http://schemas.microsoft.com/office/drawing/2014/main" id="{E9AA4FBF-7828-4C82-88C0-807649C049F1}"/>
               </a:ext>
             </a:extLst>
           </p:cNvPr>
@@ -10410,7 +11226,7 @@
           <p:cNvPr id="19" name="">
             <a:extLst xmlns:a="http://schemas.openxmlformats.org/drawingml/2006/main">
               <a:ext uri="{FF2B5EF4-FFF2-40B4-BE49-F238E27FC236}">
-                <a16:creationId xmlns:a16="http://schemas.microsoft.com/office/drawing/2014/main" id="{52C8C481-A5AF-4379-939C-D163DA815F0A}"/>
+                <a16:creationId xmlns:a16="http://schemas.microsoft.com/office/drawing/2014/main" id="{9B54BD82-3F8B-4804-A49F-6F9B8DF51D02}"/>
               </a:ext>
             </a:extLst>
           </p:cNvPr>
@@ -10468,7 +11284,7 @@
           <p:cNvPr id="20" name="">
             <a:extLst xmlns:a="http://schemas.openxmlformats.org/drawingml/2006/main">
               <a:ext uri="{FF2B5EF4-FFF2-40B4-BE49-F238E27FC236}">
-                <a16:creationId xmlns:a16="http://schemas.microsoft.com/office/drawing/2014/main" id="{D1FBD88F-5634-46A4-9AA7-1A755AE888B4}"/>
+                <a16:creationId xmlns:a16="http://schemas.microsoft.com/office/drawing/2014/main" id="{F8134989-5D62-4E03-978E-2CF37221EAD7}"/>
               </a:ext>
             </a:extLst>
           </p:cNvPr>
@@ -10526,7 +11342,7 @@
           <p:cNvPr id="21" name="">
             <a:extLst xmlns:a="http://schemas.openxmlformats.org/drawingml/2006/main">
               <a:ext uri="{FF2B5EF4-FFF2-40B4-BE49-F238E27FC236}">
-                <a16:creationId xmlns:a16="http://schemas.microsoft.com/office/drawing/2014/main" id="{1909FBE4-EBF8-48A1-AF31-BF96280F4BBB}"/>
+                <a16:creationId xmlns:a16="http://schemas.microsoft.com/office/drawing/2014/main" id="{F008E9C3-9715-4EBD-A27B-7507A495AC33}"/>
               </a:ext>
             </a:extLst>
           </p:cNvPr>
@@ -10582,7 +11398,7 @@
     </p:spTree>
     <p:extLst>
       <p:ext uri="{BB962C8B-B14F-4D97-AF65-F5344CB8AC3E}">
-        <p14:creationId xmlns:p14="http://schemas.microsoft.com/office/powerpoint/2010/main" val="1386275788"/>
+        <p14:creationId xmlns:p14="http://schemas.microsoft.com/office/powerpoint/2010/main" val="528714870"/>
       </p:ext>
     </p:extLst>
   </p:cSld>
@@ -10613,7 +11429,7 @@
           <p:cNvPr id="22" name="">
             <a:extLst xmlns:a="http://schemas.openxmlformats.org/drawingml/2006/main">
               <a:ext uri="{FF2B5EF4-FFF2-40B4-BE49-F238E27FC236}">
-                <a16:creationId xmlns:a16="http://schemas.microsoft.com/office/drawing/2014/main" id="{53EAB887-7837-4841-B95F-6C106F46842B}"/>
+                <a16:creationId xmlns:a16="http://schemas.microsoft.com/office/drawing/2014/main" id="{38AD2DA1-759B-426A-9460-167FF2176412}"/>
               </a:ext>
             </a:extLst>
           </p:cNvPr>
@@ -10671,7 +11487,7 @@
           <p:cNvPr id="2" name="">
             <a:extLst xmlns:a="http://schemas.openxmlformats.org/drawingml/2006/main">
               <a:ext uri="{FF2B5EF4-FFF2-40B4-BE49-F238E27FC236}">
-                <a16:creationId xmlns:a16="http://schemas.microsoft.com/office/drawing/2014/main" id="{67B2C4CC-DBEB-49D6-80C0-0EAF78F9439F}"/>
+                <a16:creationId xmlns:a16="http://schemas.microsoft.com/office/drawing/2014/main" id="{091D32EB-FD97-4836-A4FA-A440B0BCA259}"/>
               </a:ext>
             </a:extLst>
           </p:cNvPr>
@@ -10729,7 +11545,7 @@
           <p:cNvPr id="3" name="">
             <a:extLst xmlns:a="http://schemas.openxmlformats.org/drawingml/2006/main">
               <a:ext uri="{FF2B5EF4-FFF2-40B4-BE49-F238E27FC236}">
-                <a16:creationId xmlns:a16="http://schemas.microsoft.com/office/drawing/2014/main" id="{5C4D19F8-F071-4A52-9FF4-865A73BA4009}"/>
+                <a16:creationId xmlns:a16="http://schemas.microsoft.com/office/drawing/2014/main" id="{6D0FFFEE-9B56-4606-B65D-8620EDD89CC8}"/>
               </a:ext>
             </a:extLst>
           </p:cNvPr>
@@ -10787,7 +11603,7 @@
           <p:cNvPr id="4" name="">
             <a:extLst xmlns:a="http://schemas.openxmlformats.org/drawingml/2006/main">
               <a:ext uri="{FF2B5EF4-FFF2-40B4-BE49-F238E27FC236}">
-                <a16:creationId xmlns:a16="http://schemas.microsoft.com/office/drawing/2014/main" id="{4AB97DA6-3703-433E-AC03-FB1CF8500D12}"/>
+                <a16:creationId xmlns:a16="http://schemas.microsoft.com/office/drawing/2014/main" id="{B02BFD10-5674-432D-9AB1-24B0A0B6774E}"/>
               </a:ext>
             </a:extLst>
           </p:cNvPr>
@@ -10820,7 +11636,7 @@
           <p:cNvPr id="5" name="">
             <a:extLst xmlns:a="http://schemas.openxmlformats.org/drawingml/2006/main">
               <a:ext uri="{FF2B5EF4-FFF2-40B4-BE49-F238E27FC236}">
-                <a16:creationId xmlns:a16="http://schemas.microsoft.com/office/drawing/2014/main" id="{C6BB1AC4-36DD-496C-83EF-2FD5BAD9089C}"/>
+                <a16:creationId xmlns:a16="http://schemas.microsoft.com/office/drawing/2014/main" id="{7700ABC1-2C32-40DA-92F1-D38E432F241E}"/>
               </a:ext>
             </a:extLst>
           </p:cNvPr>
@@ -10855,7 +11671,7 @@
           <p:cNvPr id="6" name="">
             <a:extLst xmlns:a="http://schemas.openxmlformats.org/drawingml/2006/main">
               <a:ext uri="{FF2B5EF4-FFF2-40B4-BE49-F238E27FC236}">
-                <a16:creationId xmlns:a16="http://schemas.microsoft.com/office/drawing/2014/main" id="{E01BA935-4566-4A1D-9C18-B294C1648C35}"/>
+                <a16:creationId xmlns:a16="http://schemas.microsoft.com/office/drawing/2014/main" id="{9A4D49A7-A722-4F09-8C3B-E0B121FCEE2D}"/>
               </a:ext>
             </a:extLst>
           </p:cNvPr>
@@ -10888,7 +11704,7 @@
           <p:cNvPr id="7" name="">
             <a:extLst xmlns:a="http://schemas.openxmlformats.org/drawingml/2006/main">
               <a:ext uri="{FF2B5EF4-FFF2-40B4-BE49-F238E27FC236}">
-                <a16:creationId xmlns:a16="http://schemas.microsoft.com/office/drawing/2014/main" id="{18BE1DF2-AC1A-488E-A5A4-7128310D8DFD}"/>
+                <a16:creationId xmlns:a16="http://schemas.microsoft.com/office/drawing/2014/main" id="{97DF2CAE-2D5D-4170-AD4B-C69A8EB04478}"/>
               </a:ext>
             </a:extLst>
           </p:cNvPr>
@@ -10946,7 +11762,7 @@
           <p:cNvPr id="8" name="">
             <a:extLst xmlns:a="http://schemas.openxmlformats.org/drawingml/2006/main">
               <a:ext uri="{FF2B5EF4-FFF2-40B4-BE49-F238E27FC236}">
-                <a16:creationId xmlns:a16="http://schemas.microsoft.com/office/drawing/2014/main" id="{AE954AAF-3FF7-42A8-99AB-2EBFDFD897D9}"/>
+                <a16:creationId xmlns:a16="http://schemas.microsoft.com/office/drawing/2014/main" id="{E9276F3A-2E30-49E3-AF05-92BCEB8E6743}"/>
               </a:ext>
             </a:extLst>
           </p:cNvPr>
@@ -11004,7 +11820,7 @@
           <p:cNvPr id="9" name="">
             <a:extLst xmlns:a="http://schemas.openxmlformats.org/drawingml/2006/main">
               <a:ext uri="{FF2B5EF4-FFF2-40B4-BE49-F238E27FC236}">
-                <a16:creationId xmlns:a16="http://schemas.microsoft.com/office/drawing/2014/main" id="{3F904634-980C-4FAD-B422-7875780B7672}"/>
+                <a16:creationId xmlns:a16="http://schemas.microsoft.com/office/drawing/2014/main" id="{D7C6AA21-7E39-458D-8AFD-60A9A96D368E}"/>
               </a:ext>
             </a:extLst>
           </p:cNvPr>
@@ -11039,7 +11855,7 @@
           <p:cNvPr id="10" name="">
             <a:extLst xmlns:a="http://schemas.openxmlformats.org/drawingml/2006/main">
               <a:ext uri="{FF2B5EF4-FFF2-40B4-BE49-F238E27FC236}">
-                <a16:creationId xmlns:a16="http://schemas.microsoft.com/office/drawing/2014/main" id="{646FC595-7997-4EDA-84D8-D2917594CD6D}"/>
+                <a16:creationId xmlns:a16="http://schemas.microsoft.com/office/drawing/2014/main" id="{968132A1-6854-4FC7-AD54-2518AF319560}"/>
               </a:ext>
             </a:extLst>
           </p:cNvPr>
@@ -11072,7 +11888,7 @@
           <p:cNvPr id="11" name="">
             <a:extLst xmlns:a="http://schemas.openxmlformats.org/drawingml/2006/main">
               <a:ext uri="{FF2B5EF4-FFF2-40B4-BE49-F238E27FC236}">
-                <a16:creationId xmlns:a16="http://schemas.microsoft.com/office/drawing/2014/main" id="{B2C6ED86-8832-480C-899F-D8B034DE1B27}"/>
+                <a16:creationId xmlns:a16="http://schemas.microsoft.com/office/drawing/2014/main" id="{CE7CAD92-9C9F-47AF-82B7-B0A722434DEA}"/>
               </a:ext>
             </a:extLst>
           </p:cNvPr>
@@ -11130,7 +11946,7 @@
           <p:cNvPr id="12" name="">
             <a:extLst xmlns:a="http://schemas.openxmlformats.org/drawingml/2006/main">
               <a:ext uri="{FF2B5EF4-FFF2-40B4-BE49-F238E27FC236}">
-                <a16:creationId xmlns:a16="http://schemas.microsoft.com/office/drawing/2014/main" id="{256DF057-00AF-4B88-A350-4ADC0E1F84D1}"/>
+                <a16:creationId xmlns:a16="http://schemas.microsoft.com/office/drawing/2014/main" id="{4D5B6239-1A9F-4ED1-A157-5A6F71C82052}"/>
               </a:ext>
             </a:extLst>
           </p:cNvPr>
@@ -11188,7 +12004,7 @@
           <p:cNvPr id="13" name="">
             <a:extLst xmlns:a="http://schemas.openxmlformats.org/drawingml/2006/main">
               <a:ext uri="{FF2B5EF4-FFF2-40B4-BE49-F238E27FC236}">
-                <a16:creationId xmlns:a16="http://schemas.microsoft.com/office/drawing/2014/main" id="{45978A0E-10F6-4AA1-8534-3ABC5D279F2D}"/>
+                <a16:creationId xmlns:a16="http://schemas.microsoft.com/office/drawing/2014/main" id="{76B4DFA1-4D15-475F-8B2C-17C828DDD11B}"/>
               </a:ext>
             </a:extLst>
           </p:cNvPr>
@@ -11223,7 +12039,7 @@
           <p:cNvPr id="14" name="">
             <a:extLst xmlns:a="http://schemas.openxmlformats.org/drawingml/2006/main">
               <a:ext uri="{FF2B5EF4-FFF2-40B4-BE49-F238E27FC236}">
-                <a16:creationId xmlns:a16="http://schemas.microsoft.com/office/drawing/2014/main" id="{CAC449F8-AEE2-4B0B-8E74-F929661CCE98}"/>
+                <a16:creationId xmlns:a16="http://schemas.microsoft.com/office/drawing/2014/main" id="{A98553EC-9AC8-4A08-82D4-0F82755C29F7}"/>
               </a:ext>
             </a:extLst>
           </p:cNvPr>
@@ -11256,7 +12072,7 @@
           <p:cNvPr id="15" name="">
             <a:extLst xmlns:a="http://schemas.openxmlformats.org/drawingml/2006/main">
               <a:ext uri="{FF2B5EF4-FFF2-40B4-BE49-F238E27FC236}">
-                <a16:creationId xmlns:a16="http://schemas.microsoft.com/office/drawing/2014/main" id="{E91BD7DB-8F6E-47B2-BB03-FB8A58538AE0}"/>
+                <a16:creationId xmlns:a16="http://schemas.microsoft.com/office/drawing/2014/main" id="{F2F11162-85D4-45B7-BFA9-B54B35DBDD36}"/>
               </a:ext>
             </a:extLst>
           </p:cNvPr>
@@ -11314,7 +12130,7 @@
           <p:cNvPr id="16" name="">
             <a:extLst xmlns:a="http://schemas.openxmlformats.org/drawingml/2006/main">
               <a:ext uri="{FF2B5EF4-FFF2-40B4-BE49-F238E27FC236}">
-                <a16:creationId xmlns:a16="http://schemas.microsoft.com/office/drawing/2014/main" id="{7E55584B-EA83-44C0-A981-7D983878A179}"/>
+                <a16:creationId xmlns:a16="http://schemas.microsoft.com/office/drawing/2014/main" id="{3E938C85-0264-4513-8F4B-373BA41CD5B8}"/>
               </a:ext>
             </a:extLst>
           </p:cNvPr>
@@ -11372,7 +12188,7 @@
           <p:cNvPr id="17" name="">
             <a:extLst xmlns:a="http://schemas.openxmlformats.org/drawingml/2006/main">
               <a:ext uri="{FF2B5EF4-FFF2-40B4-BE49-F238E27FC236}">
-                <a16:creationId xmlns:a16="http://schemas.microsoft.com/office/drawing/2014/main" id="{4BE0DB29-2ECD-401C-9B4F-B174E351A674}"/>
+                <a16:creationId xmlns:a16="http://schemas.microsoft.com/office/drawing/2014/main" id="{F4619918-CF4C-430E-A3CB-3AA72C5DE28E}"/>
               </a:ext>
             </a:extLst>
           </p:cNvPr>
@@ -11407,7 +12223,7 @@
           <p:cNvPr id="18" name="">
             <a:extLst xmlns:a="http://schemas.openxmlformats.org/drawingml/2006/main">
               <a:ext uri="{FF2B5EF4-FFF2-40B4-BE49-F238E27FC236}">
-                <a16:creationId xmlns:a16="http://schemas.microsoft.com/office/drawing/2014/main" id="{C88707A4-7FF3-434A-B907-A54AA3512622}"/>
+                <a16:creationId xmlns:a16="http://schemas.microsoft.com/office/drawing/2014/main" id="{D29C0080-E5A5-4AE8-8F04-66D6E8F54C85}"/>
               </a:ext>
             </a:extLst>
           </p:cNvPr>
@@ -11440,7 +12256,7 @@
           <p:cNvPr id="19" name="">
             <a:extLst xmlns:a="http://schemas.openxmlformats.org/drawingml/2006/main">
               <a:ext uri="{FF2B5EF4-FFF2-40B4-BE49-F238E27FC236}">
-                <a16:creationId xmlns:a16="http://schemas.microsoft.com/office/drawing/2014/main" id="{C94F017C-7EAD-4581-9D20-452B79C635D6}"/>
+                <a16:creationId xmlns:a16="http://schemas.microsoft.com/office/drawing/2014/main" id="{8E58F6FA-7DE0-447C-964E-E388A4B33589}"/>
               </a:ext>
             </a:extLst>
           </p:cNvPr>
@@ -11498,7 +12314,7 @@
           <p:cNvPr id="20" name="">
             <a:extLst xmlns:a="http://schemas.openxmlformats.org/drawingml/2006/main">
               <a:ext uri="{FF2B5EF4-FFF2-40B4-BE49-F238E27FC236}">
-                <a16:creationId xmlns:a16="http://schemas.microsoft.com/office/drawing/2014/main" id="{3B03A8BB-47EE-4422-8D03-9E0E6C925B94}"/>
+                <a16:creationId xmlns:a16="http://schemas.microsoft.com/office/drawing/2014/main" id="{BF1B6222-8788-4939-AFDF-EC9B1A4A6512}"/>
               </a:ext>
             </a:extLst>
           </p:cNvPr>
@@ -11556,7 +12372,7 @@
           <p:cNvPr id="21" name="">
             <a:extLst xmlns:a="http://schemas.openxmlformats.org/drawingml/2006/main">
               <a:ext uri="{FF2B5EF4-FFF2-40B4-BE49-F238E27FC236}">
-                <a16:creationId xmlns:a16="http://schemas.microsoft.com/office/drawing/2014/main" id="{0C33421F-18D6-454B-9FA7-DAAC2D835B15}"/>
+                <a16:creationId xmlns:a16="http://schemas.microsoft.com/office/drawing/2014/main" id="{3A8A7904-E333-4B08-99CF-D9032276C27A}"/>
               </a:ext>
             </a:extLst>
           </p:cNvPr>
@@ -11612,7 +12428,7 @@
     </p:spTree>
     <p:extLst>
       <p:ext uri="{BB962C8B-B14F-4D97-AF65-F5344CB8AC3E}">
-        <p14:creationId xmlns:p14="http://schemas.microsoft.com/office/powerpoint/2010/main" val="203324889"/>
+        <p14:creationId xmlns:p14="http://schemas.microsoft.com/office/powerpoint/2010/main" val="15535900"/>
       </p:ext>
     </p:extLst>
   </p:cSld>
@@ -11643,7 +12459,7 @@
           <p:cNvPr id="14" name="">
             <a:extLst xmlns:a="http://schemas.openxmlformats.org/drawingml/2006/main">
               <a:ext uri="{FF2B5EF4-FFF2-40B4-BE49-F238E27FC236}">
-                <a16:creationId xmlns:a16="http://schemas.microsoft.com/office/drawing/2014/main" id="{B5AD7424-4A47-4D05-92E1-EB5206B58E96}"/>
+                <a16:creationId xmlns:a16="http://schemas.microsoft.com/office/drawing/2014/main" id="{7A18D198-5331-4B69-B23D-F7D8EA72672E}"/>
               </a:ext>
             </a:extLst>
           </p:cNvPr>
@@ -11701,7 +12517,7 @@
           <p:cNvPr id="2" name="">
             <a:extLst xmlns:a="http://schemas.openxmlformats.org/drawingml/2006/main">
               <a:ext uri="{FF2B5EF4-FFF2-40B4-BE49-F238E27FC236}">
-                <a16:creationId xmlns:a16="http://schemas.microsoft.com/office/drawing/2014/main" id="{D79267D9-D7B1-45C5-AD22-ECE8CB1D2B88}"/>
+                <a16:creationId xmlns:a16="http://schemas.microsoft.com/office/drawing/2014/main" id="{91E05304-E274-4033-AB4D-818E3AEBC06E}"/>
               </a:ext>
             </a:extLst>
           </p:cNvPr>
@@ -11759,7 +12575,7 @@
           <p:cNvPr id="3" name="">
             <a:extLst xmlns:a="http://schemas.openxmlformats.org/drawingml/2006/main">
               <a:ext uri="{FF2B5EF4-FFF2-40B4-BE49-F238E27FC236}">
-                <a16:creationId xmlns:a16="http://schemas.microsoft.com/office/drawing/2014/main" id="{CA388BC9-1F86-477D-8A61-8112C1A9DA31}"/>
+                <a16:creationId xmlns:a16="http://schemas.microsoft.com/office/drawing/2014/main" id="{57D28FAE-C317-458D-8AF2-6A4344D9727F}"/>
               </a:ext>
             </a:extLst>
           </p:cNvPr>
@@ -11817,7 +12633,7 @@
           <p:cNvPr id="4" name="">
             <a:extLst xmlns:a="http://schemas.openxmlformats.org/drawingml/2006/main">
               <a:ext uri="{FF2B5EF4-FFF2-40B4-BE49-F238E27FC236}">
-                <a16:creationId xmlns:a16="http://schemas.microsoft.com/office/drawing/2014/main" id="{04D37966-82A5-4F51-B7DF-7FA2F9722142}"/>
+                <a16:creationId xmlns:a16="http://schemas.microsoft.com/office/drawing/2014/main" id="{DD364633-2BB2-43D8-A4C8-A0A8A01BCFB6}"/>
               </a:ext>
             </a:extLst>
           </p:cNvPr>
@@ -11850,7 +12666,7 @@
           <p:cNvPr id="5" name="">
             <a:extLst xmlns:a="http://schemas.openxmlformats.org/drawingml/2006/main">
               <a:ext uri="{FF2B5EF4-FFF2-40B4-BE49-F238E27FC236}">
-                <a16:creationId xmlns:a16="http://schemas.microsoft.com/office/drawing/2014/main" id="{58921028-E7F5-4A86-B953-4E6843122767}"/>
+                <a16:creationId xmlns:a16="http://schemas.microsoft.com/office/drawing/2014/main" id="{D0F08900-B1C7-437C-A814-73BFB0E37686}"/>
               </a:ext>
             </a:extLst>
           </p:cNvPr>
@@ -11883,7 +12699,7 @@
           <p:cNvPr id="6" name="">
             <a:extLst xmlns:a="http://schemas.openxmlformats.org/drawingml/2006/main">
               <a:ext uri="{FF2B5EF4-FFF2-40B4-BE49-F238E27FC236}">
-                <a16:creationId xmlns:a16="http://schemas.microsoft.com/office/drawing/2014/main" id="{F269194F-7292-48B8-B3C1-367F0A329ACB}"/>
+                <a16:creationId xmlns:a16="http://schemas.microsoft.com/office/drawing/2014/main" id="{27ED9CF8-8F74-45D2-9DFC-55ED6AAB179C}"/>
               </a:ext>
             </a:extLst>
           </p:cNvPr>
@@ -11941,7 +12757,7 @@
           <p:cNvPr id="7" name="">
             <a:extLst xmlns:a="http://schemas.openxmlformats.org/drawingml/2006/main">
               <a:ext uri="{FF2B5EF4-FFF2-40B4-BE49-F238E27FC236}">
-                <a16:creationId xmlns:a16="http://schemas.microsoft.com/office/drawing/2014/main" id="{B25573E2-2BC4-4E02-B3FE-68C5F52C410A}"/>
+                <a16:creationId xmlns:a16="http://schemas.microsoft.com/office/drawing/2014/main" id="{4FD8558C-6C18-46C3-B44D-E453030EA544}"/>
               </a:ext>
             </a:extLst>
           </p:cNvPr>
@@ -11974,7 +12790,7 @@
           <p:cNvPr id="8" name="">
             <a:extLst xmlns:a="http://schemas.openxmlformats.org/drawingml/2006/main">
               <a:ext uri="{FF2B5EF4-FFF2-40B4-BE49-F238E27FC236}">
-                <a16:creationId xmlns:a16="http://schemas.microsoft.com/office/drawing/2014/main" id="{EE5DE4D0-591B-47B4-9DF1-E58C213680CB}"/>
+                <a16:creationId xmlns:a16="http://schemas.microsoft.com/office/drawing/2014/main" id="{326F5AD3-2388-4CCF-85B6-48EB6A5401C2}"/>
               </a:ext>
             </a:extLst>
           </p:cNvPr>
@@ -12032,7 +12848,7 @@
           <p:cNvPr id="9" name="">
             <a:extLst xmlns:a="http://schemas.openxmlformats.org/drawingml/2006/main">
               <a:ext uri="{FF2B5EF4-FFF2-40B4-BE49-F238E27FC236}">
-                <a16:creationId xmlns:a16="http://schemas.microsoft.com/office/drawing/2014/main" id="{44F69322-D247-47E1-B4BA-B10969D4008A}"/>
+                <a16:creationId xmlns:a16="http://schemas.microsoft.com/office/drawing/2014/main" id="{DA0143B2-FBDD-42F7-B61E-D24E9C74479E}"/>
               </a:ext>
             </a:extLst>
           </p:cNvPr>
@@ -12065,7 +12881,7 @@
           <p:cNvPr id="10" name="">
             <a:extLst xmlns:a="http://schemas.openxmlformats.org/drawingml/2006/main">
               <a:ext uri="{FF2B5EF4-FFF2-40B4-BE49-F238E27FC236}">
-                <a16:creationId xmlns:a16="http://schemas.microsoft.com/office/drawing/2014/main" id="{FABCA7F1-C3D6-4D5B-9584-4A69ECE56F84}"/>
+                <a16:creationId xmlns:a16="http://schemas.microsoft.com/office/drawing/2014/main" id="{A568948D-47DC-44E0-9E7E-167D34897EC5}"/>
               </a:ext>
             </a:extLst>
           </p:cNvPr>
@@ -12123,7 +12939,7 @@
           <p:cNvPr id="11" name="">
             <a:extLst xmlns:a="http://schemas.openxmlformats.org/drawingml/2006/main">
               <a:ext uri="{FF2B5EF4-FFF2-40B4-BE49-F238E27FC236}">
-                <a16:creationId xmlns:a16="http://schemas.microsoft.com/office/drawing/2014/main" id="{09F0E8D6-4BD0-4D3A-B4D2-706F3567E958}"/>
+                <a16:creationId xmlns:a16="http://schemas.microsoft.com/office/drawing/2014/main" id="{7436426F-0D8B-407C-99DC-4C7B8687627A}"/>
               </a:ext>
             </a:extLst>
           </p:cNvPr>
@@ -12156,7 +12972,7 @@
           <p:cNvPr id="12" name="">
             <a:extLst xmlns:a="http://schemas.openxmlformats.org/drawingml/2006/main">
               <a:ext uri="{FF2B5EF4-FFF2-40B4-BE49-F238E27FC236}">
-                <a16:creationId xmlns:a16="http://schemas.microsoft.com/office/drawing/2014/main" id="{12E44CCA-70E5-47C9-9402-DD0A6FEED0BB}"/>
+                <a16:creationId xmlns:a16="http://schemas.microsoft.com/office/drawing/2014/main" id="{86E0D022-C4D1-429D-902E-64651398840D}"/>
               </a:ext>
             </a:extLst>
           </p:cNvPr>
@@ -12214,7 +13030,7 @@
           <p:cNvPr id="13" name="">
             <a:extLst xmlns:a="http://schemas.openxmlformats.org/drawingml/2006/main">
               <a:ext uri="{FF2B5EF4-FFF2-40B4-BE49-F238E27FC236}">
-                <a16:creationId xmlns:a16="http://schemas.microsoft.com/office/drawing/2014/main" id="{D100192A-97FC-4BDA-BCD4-588F5392B12A}"/>
+                <a16:creationId xmlns:a16="http://schemas.microsoft.com/office/drawing/2014/main" id="{D012DE0A-B3C3-4B83-A364-B6F409E3B33B}"/>
               </a:ext>
             </a:extLst>
           </p:cNvPr>
@@ -12270,7 +13086,7 @@
     </p:spTree>
     <p:extLst>
       <p:ext uri="{BB962C8B-B14F-4D97-AF65-F5344CB8AC3E}">
-        <p14:creationId xmlns:p14="http://schemas.microsoft.com/office/powerpoint/2010/main" val="1344505884"/>
+        <p14:creationId xmlns:p14="http://schemas.microsoft.com/office/powerpoint/2010/main" val="266072353"/>
       </p:ext>
     </p:extLst>
   </p:cSld>
@@ -12301,7 +13117,7 @@
           <p:cNvPr id="22" name="">
             <a:extLst xmlns:a="http://schemas.openxmlformats.org/drawingml/2006/main">
               <a:ext uri="{FF2B5EF4-FFF2-40B4-BE49-F238E27FC236}">
-                <a16:creationId xmlns:a16="http://schemas.microsoft.com/office/drawing/2014/main" id="{882BDC6F-9633-4360-9A9B-48B62CA8CFD9}"/>
+                <a16:creationId xmlns:a16="http://schemas.microsoft.com/office/drawing/2014/main" id="{F8DC1049-C78C-4069-A7B5-E63F537FBE3E}"/>
               </a:ext>
             </a:extLst>
           </p:cNvPr>
@@ -12359,7 +13175,7 @@
           <p:cNvPr id="2" name="">
             <a:extLst xmlns:a="http://schemas.openxmlformats.org/drawingml/2006/main">
               <a:ext uri="{FF2B5EF4-FFF2-40B4-BE49-F238E27FC236}">
-                <a16:creationId xmlns:a16="http://schemas.microsoft.com/office/drawing/2014/main" id="{E41F4F31-C047-4551-8290-3A985E0AB6A4}"/>
+                <a16:creationId xmlns:a16="http://schemas.microsoft.com/office/drawing/2014/main" id="{8465E24F-77F0-40B4-8457-49D8B92D5791}"/>
               </a:ext>
             </a:extLst>
           </p:cNvPr>
@@ -12417,7 +13233,7 @@
           <p:cNvPr id="3" name="">
             <a:extLst xmlns:a="http://schemas.openxmlformats.org/drawingml/2006/main">
               <a:ext uri="{FF2B5EF4-FFF2-40B4-BE49-F238E27FC236}">
-                <a16:creationId xmlns:a16="http://schemas.microsoft.com/office/drawing/2014/main" id="{50F67C7D-40A4-4D74-A78D-379E5550E5B8}"/>
+                <a16:creationId xmlns:a16="http://schemas.microsoft.com/office/drawing/2014/main" id="{B00B4CB7-F7C5-4A03-A77C-7EF398985E37}"/>
               </a:ext>
             </a:extLst>
           </p:cNvPr>
@@ -12475,7 +13291,7 @@
           <p:cNvPr id="4" name="">
             <a:extLst xmlns:a="http://schemas.openxmlformats.org/drawingml/2006/main">
               <a:ext uri="{FF2B5EF4-FFF2-40B4-BE49-F238E27FC236}">
-                <a16:creationId xmlns:a16="http://schemas.microsoft.com/office/drawing/2014/main" id="{85D465CE-7F82-4946-9BE7-A9CA295B64C6}"/>
+                <a16:creationId xmlns:a16="http://schemas.microsoft.com/office/drawing/2014/main" id="{1E863F6D-2F6C-42F0-8FA9-A3095864E84B}"/>
               </a:ext>
             </a:extLst>
           </p:cNvPr>
@@ -12508,7 +13324,7 @@
           <p:cNvPr id="5" name="">
             <a:extLst xmlns:a="http://schemas.openxmlformats.org/drawingml/2006/main">
               <a:ext uri="{FF2B5EF4-FFF2-40B4-BE49-F238E27FC236}">
-                <a16:creationId xmlns:a16="http://schemas.microsoft.com/office/drawing/2014/main" id="{CC76B4B5-7E1C-4CAC-84F7-D05B1C3B1176}"/>
+                <a16:creationId xmlns:a16="http://schemas.microsoft.com/office/drawing/2014/main" id="{9E396BE7-24A8-48FC-B6DF-FF38860416DD}"/>
               </a:ext>
             </a:extLst>
           </p:cNvPr>
@@ -12543,7 +13359,7 @@
           <p:cNvPr id="6" name="">
             <a:extLst xmlns:a="http://schemas.openxmlformats.org/drawingml/2006/main">
               <a:ext uri="{FF2B5EF4-FFF2-40B4-BE49-F238E27FC236}">
-                <a16:creationId xmlns:a16="http://schemas.microsoft.com/office/drawing/2014/main" id="{5F0F3B98-2807-4A60-94F4-8845D3C14D36}"/>
+                <a16:creationId xmlns:a16="http://schemas.microsoft.com/office/drawing/2014/main" id="{88221814-1015-4559-96AF-3D28FA0A3B5D}"/>
               </a:ext>
             </a:extLst>
           </p:cNvPr>
@@ -12576,7 +13392,7 @@
           <p:cNvPr id="7" name="">
             <a:extLst xmlns:a="http://schemas.openxmlformats.org/drawingml/2006/main">
               <a:ext uri="{FF2B5EF4-FFF2-40B4-BE49-F238E27FC236}">
-                <a16:creationId xmlns:a16="http://schemas.microsoft.com/office/drawing/2014/main" id="{D8104029-21FA-4E44-AE3B-E63F376B1E03}"/>
+                <a16:creationId xmlns:a16="http://schemas.microsoft.com/office/drawing/2014/main" id="{4D2E0B0D-1FAE-4659-9EF3-DEEA92248872}"/>
               </a:ext>
             </a:extLst>
           </p:cNvPr>
@@ -12634,7 +13450,7 @@
           <p:cNvPr id="8" name="">
             <a:extLst xmlns:a="http://schemas.openxmlformats.org/drawingml/2006/main">
               <a:ext uri="{FF2B5EF4-FFF2-40B4-BE49-F238E27FC236}">
-                <a16:creationId xmlns:a16="http://schemas.microsoft.com/office/drawing/2014/main" id="{FB894F24-31AD-4A70-8FE3-51A16B27F618}"/>
+                <a16:creationId xmlns:a16="http://schemas.microsoft.com/office/drawing/2014/main" id="{3AA58175-A9FC-4A5B-841A-1C30AADA3709}"/>
               </a:ext>
             </a:extLst>
           </p:cNvPr>
@@ -12692,7 +13508,7 @@
           <p:cNvPr id="9" name="">
             <a:extLst xmlns:a="http://schemas.openxmlformats.org/drawingml/2006/main">
               <a:ext uri="{FF2B5EF4-FFF2-40B4-BE49-F238E27FC236}">
-                <a16:creationId xmlns:a16="http://schemas.microsoft.com/office/drawing/2014/main" id="{1789320A-08A4-47C4-ADB9-891C5968407F}"/>
+                <a16:creationId xmlns:a16="http://schemas.microsoft.com/office/drawing/2014/main" id="{CBF8FABF-5179-4DFA-95DA-12CF7171D2B3}"/>
               </a:ext>
             </a:extLst>
           </p:cNvPr>
@@ -12727,7 +13543,7 @@
           <p:cNvPr id="10" name="">
             <a:extLst xmlns:a="http://schemas.openxmlformats.org/drawingml/2006/main">
               <a:ext uri="{FF2B5EF4-FFF2-40B4-BE49-F238E27FC236}">
-                <a16:creationId xmlns:a16="http://schemas.microsoft.com/office/drawing/2014/main" id="{24497379-D66D-499D-995E-B47B5B6D8F41}"/>
+                <a16:creationId xmlns:a16="http://schemas.microsoft.com/office/drawing/2014/main" id="{5416FA2F-3AA7-484E-831F-00702CD73B56}"/>
               </a:ext>
             </a:extLst>
           </p:cNvPr>
@@ -12760,7 +13576,7 @@
           <p:cNvPr id="11" name="">
             <a:extLst xmlns:a="http://schemas.openxmlformats.org/drawingml/2006/main">
               <a:ext uri="{FF2B5EF4-FFF2-40B4-BE49-F238E27FC236}">
-                <a16:creationId xmlns:a16="http://schemas.microsoft.com/office/drawing/2014/main" id="{85FD2E47-5AFD-4A9F-9945-4131E38D7C0D}"/>
+                <a16:creationId xmlns:a16="http://schemas.microsoft.com/office/drawing/2014/main" id="{3E69B1C5-AC72-4088-85B2-BECD9B46E484}"/>
               </a:ext>
             </a:extLst>
           </p:cNvPr>
@@ -12818,7 +13634,7 @@
           <p:cNvPr id="12" name="">
             <a:extLst xmlns:a="http://schemas.openxmlformats.org/drawingml/2006/main">
               <a:ext uri="{FF2B5EF4-FFF2-40B4-BE49-F238E27FC236}">
-                <a16:creationId xmlns:a16="http://schemas.microsoft.com/office/drawing/2014/main" id="{80C0DAC0-51B3-4BED-BFDE-A402DD5D60FF}"/>
+                <a16:creationId xmlns:a16="http://schemas.microsoft.com/office/drawing/2014/main" id="{673C7976-1047-48A4-BCAB-3F1AEFDD1DEA}"/>
               </a:ext>
             </a:extLst>
           </p:cNvPr>
@@ -12876,7 +13692,7 @@
           <p:cNvPr id="13" name="">
             <a:extLst xmlns:a="http://schemas.openxmlformats.org/drawingml/2006/main">
               <a:ext uri="{FF2B5EF4-FFF2-40B4-BE49-F238E27FC236}">
-                <a16:creationId xmlns:a16="http://schemas.microsoft.com/office/drawing/2014/main" id="{22598A9D-1B15-47F1-8F0A-1BB9119DDB89}"/>
+                <a16:creationId xmlns:a16="http://schemas.microsoft.com/office/drawing/2014/main" id="{E22F0DB1-6C32-473E-B60E-D2B45A612C1A}"/>
               </a:ext>
             </a:extLst>
           </p:cNvPr>
@@ -12911,7 +13727,7 @@
           <p:cNvPr id="14" name="">
             <a:extLst xmlns:a="http://schemas.openxmlformats.org/drawingml/2006/main">
               <a:ext uri="{FF2B5EF4-FFF2-40B4-BE49-F238E27FC236}">
-                <a16:creationId xmlns:a16="http://schemas.microsoft.com/office/drawing/2014/main" id="{13985CD2-A914-40E3-801A-996B606BA834}"/>
+                <a16:creationId xmlns:a16="http://schemas.microsoft.com/office/drawing/2014/main" id="{4DAB8625-9240-4AF1-988A-F85B31993A6C}"/>
               </a:ext>
             </a:extLst>
           </p:cNvPr>
@@ -12944,7 +13760,7 @@
           <p:cNvPr id="15" name="">
             <a:extLst xmlns:a="http://schemas.openxmlformats.org/drawingml/2006/main">
               <a:ext uri="{FF2B5EF4-FFF2-40B4-BE49-F238E27FC236}">
-                <a16:creationId xmlns:a16="http://schemas.microsoft.com/office/drawing/2014/main" id="{93CFADFC-6340-47E0-AA0E-F3987800BBEF}"/>
+                <a16:creationId xmlns:a16="http://schemas.microsoft.com/office/drawing/2014/main" id="{B6F841C2-D4C5-4BBC-86EA-A98AB34BDBF3}"/>
               </a:ext>
             </a:extLst>
           </p:cNvPr>
@@ -13002,7 +13818,7 @@
           <p:cNvPr id="16" name="">
             <a:extLst xmlns:a="http://schemas.openxmlformats.org/drawingml/2006/main">
               <a:ext uri="{FF2B5EF4-FFF2-40B4-BE49-F238E27FC236}">
-                <a16:creationId xmlns:a16="http://schemas.microsoft.com/office/drawing/2014/main" id="{6A79A7C6-E259-4DFF-9EA6-E0A599CE8FE9}"/>
+                <a16:creationId xmlns:a16="http://schemas.microsoft.com/office/drawing/2014/main" id="{CF7E4E8B-1F4A-4E46-BFBB-597626495B6D}"/>
               </a:ext>
             </a:extLst>
           </p:cNvPr>
@@ -13060,7 +13876,7 @@
           <p:cNvPr id="17" name="">
             <a:extLst xmlns:a="http://schemas.openxmlformats.org/drawingml/2006/main">
               <a:ext uri="{FF2B5EF4-FFF2-40B4-BE49-F238E27FC236}">
-                <a16:creationId xmlns:a16="http://schemas.microsoft.com/office/drawing/2014/main" id="{BC373DBB-68AF-4B45-AB4F-D9A69A1D85D1}"/>
+                <a16:creationId xmlns:a16="http://schemas.microsoft.com/office/drawing/2014/main" id="{8B6085E8-0737-4F51-9CEF-AD8598CDBEB2}"/>
               </a:ext>
             </a:extLst>
           </p:cNvPr>
@@ -13095,7 +13911,7 @@
           <p:cNvPr id="18" name="">
             <a:extLst xmlns:a="http://schemas.openxmlformats.org/drawingml/2006/main">
               <a:ext uri="{FF2B5EF4-FFF2-40B4-BE49-F238E27FC236}">
-                <a16:creationId xmlns:a16="http://schemas.microsoft.com/office/drawing/2014/main" id="{9AB350AF-A3FD-45C7-A1F6-619F5355D9B6}"/>
+                <a16:creationId xmlns:a16="http://schemas.microsoft.com/office/drawing/2014/main" id="{13075B06-5394-4E2F-A946-3EEB24ABA83E}"/>
               </a:ext>
             </a:extLst>
           </p:cNvPr>
@@ -13128,7 +13944,7 @@
           <p:cNvPr id="19" name="">
             <a:extLst xmlns:a="http://schemas.openxmlformats.org/drawingml/2006/main">
               <a:ext uri="{FF2B5EF4-FFF2-40B4-BE49-F238E27FC236}">
-                <a16:creationId xmlns:a16="http://schemas.microsoft.com/office/drawing/2014/main" id="{610A2B02-E887-421A-BA4D-1B21A25EA132}"/>
+                <a16:creationId xmlns:a16="http://schemas.microsoft.com/office/drawing/2014/main" id="{CA62DE3C-0732-42A0-A413-37B1C229E758}"/>
               </a:ext>
             </a:extLst>
           </p:cNvPr>
@@ -13186,7 +14002,7 @@
           <p:cNvPr id="20" name="">
             <a:extLst xmlns:a="http://schemas.openxmlformats.org/drawingml/2006/main">
               <a:ext uri="{FF2B5EF4-FFF2-40B4-BE49-F238E27FC236}">
-                <a16:creationId xmlns:a16="http://schemas.microsoft.com/office/drawing/2014/main" id="{501F62E9-8343-4C4A-8622-F7E87FC33C68}"/>
+                <a16:creationId xmlns:a16="http://schemas.microsoft.com/office/drawing/2014/main" id="{626D4826-BE72-4BAA-AA0F-FC2522430A21}"/>
               </a:ext>
             </a:extLst>
           </p:cNvPr>
@@ -13244,7 +14060,7 @@
           <p:cNvPr id="21" name="">
             <a:extLst xmlns:a="http://schemas.openxmlformats.org/drawingml/2006/main">
               <a:ext uri="{FF2B5EF4-FFF2-40B4-BE49-F238E27FC236}">
-                <a16:creationId xmlns:a16="http://schemas.microsoft.com/office/drawing/2014/main" id="{CBF95EF5-7387-47AB-9A4F-8568ECA2505E}"/>
+                <a16:creationId xmlns:a16="http://schemas.microsoft.com/office/drawing/2014/main" id="{481402E2-4422-4676-A8D8-4120E3F8C234}"/>
               </a:ext>
             </a:extLst>
           </p:cNvPr>
@@ -13300,7 +14116,7 @@
     </p:spTree>
     <p:extLst>
       <p:ext uri="{BB962C8B-B14F-4D97-AF65-F5344CB8AC3E}">
-        <p14:creationId xmlns:p14="http://schemas.microsoft.com/office/powerpoint/2010/main" val="912303316"/>
+        <p14:creationId xmlns:p14="http://schemas.microsoft.com/office/powerpoint/2010/main" val="2008679408"/>
       </p:ext>
     </p:extLst>
   </p:cSld>
@@ -13331,7 +14147,7 @@
           <p:cNvPr id="14" name="">
             <a:extLst xmlns:a="http://schemas.openxmlformats.org/drawingml/2006/main">
               <a:ext uri="{FF2B5EF4-FFF2-40B4-BE49-F238E27FC236}">
-                <a16:creationId xmlns:a16="http://schemas.microsoft.com/office/drawing/2014/main" id="{43561DEF-95C0-46A0-8947-51B78746F5CC}"/>
+                <a16:creationId xmlns:a16="http://schemas.microsoft.com/office/drawing/2014/main" id="{3AA3A147-2612-4771-BB75-74652661593A}"/>
               </a:ext>
             </a:extLst>
           </p:cNvPr>
@@ -13389,7 +14205,7 @@
           <p:cNvPr id="2" name="">
             <a:extLst xmlns:a="http://schemas.openxmlformats.org/drawingml/2006/main">
               <a:ext uri="{FF2B5EF4-FFF2-40B4-BE49-F238E27FC236}">
-                <a16:creationId xmlns:a16="http://schemas.microsoft.com/office/drawing/2014/main" id="{7175A628-0A7D-4802-BEC9-A82FB3016A78}"/>
+                <a16:creationId xmlns:a16="http://schemas.microsoft.com/office/drawing/2014/main" id="{B548F341-6BCC-48A3-9D2B-75497B4228E9}"/>
               </a:ext>
             </a:extLst>
           </p:cNvPr>
@@ -13447,7 +14263,7 @@
           <p:cNvPr id="3" name="">
             <a:extLst xmlns:a="http://schemas.openxmlformats.org/drawingml/2006/main">
               <a:ext uri="{FF2B5EF4-FFF2-40B4-BE49-F238E27FC236}">
-                <a16:creationId xmlns:a16="http://schemas.microsoft.com/office/drawing/2014/main" id="{DB54E0BF-0147-4BFB-8E94-6386008C5BBA}"/>
+                <a16:creationId xmlns:a16="http://schemas.microsoft.com/office/drawing/2014/main" id="{55C5870C-FF7A-40AC-8295-D8FFB97EE71B}"/>
               </a:ext>
             </a:extLst>
           </p:cNvPr>
@@ -13505,7 +14321,7 @@
           <p:cNvPr id="4" name="">
             <a:extLst xmlns:a="http://schemas.openxmlformats.org/drawingml/2006/main">
               <a:ext uri="{FF2B5EF4-FFF2-40B4-BE49-F238E27FC236}">
-                <a16:creationId xmlns:a16="http://schemas.microsoft.com/office/drawing/2014/main" id="{21EC999D-94C4-4F68-BB75-DE4BF1F2EC84}"/>
+                <a16:creationId xmlns:a16="http://schemas.microsoft.com/office/drawing/2014/main" id="{DC9ADB6A-DB0F-4541-84B4-36D1C222B833}"/>
               </a:ext>
             </a:extLst>
           </p:cNvPr>
@@ -13538,7 +14354,7 @@
           <p:cNvPr id="5" name="">
             <a:extLst xmlns:a="http://schemas.openxmlformats.org/drawingml/2006/main">
               <a:ext uri="{FF2B5EF4-FFF2-40B4-BE49-F238E27FC236}">
-                <a16:creationId xmlns:a16="http://schemas.microsoft.com/office/drawing/2014/main" id="{21933741-BE69-4377-8C33-9A2F5C760850}"/>
+                <a16:creationId xmlns:a16="http://schemas.microsoft.com/office/drawing/2014/main" id="{4A48BB87-6293-465C-AD3F-64C4FF13EB98}"/>
               </a:ext>
             </a:extLst>
           </p:cNvPr>
@@ -13571,7 +14387,7 @@
           <p:cNvPr id="6" name="">
             <a:extLst xmlns:a="http://schemas.openxmlformats.org/drawingml/2006/main">
               <a:ext uri="{FF2B5EF4-FFF2-40B4-BE49-F238E27FC236}">
-                <a16:creationId xmlns:a16="http://schemas.microsoft.com/office/drawing/2014/main" id="{E5CB84AD-1EE8-4134-B263-84DF70457A57}"/>
+                <a16:creationId xmlns:a16="http://schemas.microsoft.com/office/drawing/2014/main" id="{6BF5DEA4-216D-4A85-8089-0BBEA6CF3539}"/>
               </a:ext>
             </a:extLst>
           </p:cNvPr>
@@ -13629,7 +14445,7 @@
           <p:cNvPr id="7" name="">
             <a:extLst xmlns:a="http://schemas.openxmlformats.org/drawingml/2006/main">
               <a:ext uri="{FF2B5EF4-FFF2-40B4-BE49-F238E27FC236}">
-                <a16:creationId xmlns:a16="http://schemas.microsoft.com/office/drawing/2014/main" id="{C1A5B8E7-C5D7-416F-9617-FA2B1BF945F0}"/>
+                <a16:creationId xmlns:a16="http://schemas.microsoft.com/office/drawing/2014/main" id="{9D7815F7-6B9E-48AF-B35D-C15856E3C801}"/>
               </a:ext>
             </a:extLst>
           </p:cNvPr>
@@ -13662,7 +14478,7 @@
           <p:cNvPr id="8" name="">
             <a:extLst xmlns:a="http://schemas.openxmlformats.org/drawingml/2006/main">
               <a:ext uri="{FF2B5EF4-FFF2-40B4-BE49-F238E27FC236}">
-                <a16:creationId xmlns:a16="http://schemas.microsoft.com/office/drawing/2014/main" id="{6E4FF35C-9414-48B8-906D-479E73F960F5}"/>
+                <a16:creationId xmlns:a16="http://schemas.microsoft.com/office/drawing/2014/main" id="{0B916332-266E-4BC5-BA4D-22842FE55026}"/>
               </a:ext>
             </a:extLst>
           </p:cNvPr>
@@ -13720,7 +14536,7 @@
           <p:cNvPr id="9" name="">
             <a:extLst xmlns:a="http://schemas.openxmlformats.org/drawingml/2006/main">
               <a:ext uri="{FF2B5EF4-FFF2-40B4-BE49-F238E27FC236}">
-                <a16:creationId xmlns:a16="http://schemas.microsoft.com/office/drawing/2014/main" id="{11B2EB55-8B11-4248-B3B0-E6A45D7235DF}"/>
+                <a16:creationId xmlns:a16="http://schemas.microsoft.com/office/drawing/2014/main" id="{D438EE7A-BBC9-4FFF-BB6E-1277FE3FC888}"/>
               </a:ext>
             </a:extLst>
           </p:cNvPr>
@@ -13753,7 +14569,7 @@
           <p:cNvPr id="10" name="">
             <a:extLst xmlns:a="http://schemas.openxmlformats.org/drawingml/2006/main">
               <a:ext uri="{FF2B5EF4-FFF2-40B4-BE49-F238E27FC236}">
-                <a16:creationId xmlns:a16="http://schemas.microsoft.com/office/drawing/2014/main" id="{67A57931-F014-48E6-93A7-2CEDBCE5816E}"/>
+                <a16:creationId xmlns:a16="http://schemas.microsoft.com/office/drawing/2014/main" id="{6BAFEEF8-8B49-4751-8F88-C71C4A92B1FF}"/>
               </a:ext>
             </a:extLst>
           </p:cNvPr>
@@ -13811,7 +14627,7 @@
           <p:cNvPr id="11" name="">
             <a:extLst xmlns:a="http://schemas.openxmlformats.org/drawingml/2006/main">
               <a:ext uri="{FF2B5EF4-FFF2-40B4-BE49-F238E27FC236}">
-                <a16:creationId xmlns:a16="http://schemas.microsoft.com/office/drawing/2014/main" id="{33B0942F-2AED-42D2-98EB-2DE4900A7609}"/>
+                <a16:creationId xmlns:a16="http://schemas.microsoft.com/office/drawing/2014/main" id="{70E9D1DA-FC67-4BC6-8E34-4997137BDD25}"/>
               </a:ext>
             </a:extLst>
           </p:cNvPr>
@@ -13844,7 +14660,7 @@
           <p:cNvPr id="12" name="">
             <a:extLst xmlns:a="http://schemas.openxmlformats.org/drawingml/2006/main">
               <a:ext uri="{FF2B5EF4-FFF2-40B4-BE49-F238E27FC236}">
-                <a16:creationId xmlns:a16="http://schemas.microsoft.com/office/drawing/2014/main" id="{7175027C-D0CB-4EB5-9695-763A51233051}"/>
+                <a16:creationId xmlns:a16="http://schemas.microsoft.com/office/drawing/2014/main" id="{8647449F-48B5-48C7-A20E-3F1692FB4AB6}"/>
               </a:ext>
             </a:extLst>
           </p:cNvPr>
@@ -13902,7 +14718,7 @@
           <p:cNvPr id="13" name="">
             <a:extLst xmlns:a="http://schemas.openxmlformats.org/drawingml/2006/main">
               <a:ext uri="{FF2B5EF4-FFF2-40B4-BE49-F238E27FC236}">
-                <a16:creationId xmlns:a16="http://schemas.microsoft.com/office/drawing/2014/main" id="{8398DC9E-0A9C-411F-96DB-89838DA3675C}"/>
+                <a16:creationId xmlns:a16="http://schemas.microsoft.com/office/drawing/2014/main" id="{03E4DFE9-648F-45A0-9A6C-F6A9A0D7C8F6}"/>
               </a:ext>
             </a:extLst>
           </p:cNvPr>
@@ -13958,7 +14774,7 @@
     </p:spTree>
     <p:extLst>
       <p:ext uri="{BB962C8B-B14F-4D97-AF65-F5344CB8AC3E}">
-        <p14:creationId xmlns:p14="http://schemas.microsoft.com/office/powerpoint/2010/main" val="1280357459"/>
+        <p14:creationId xmlns:p14="http://schemas.microsoft.com/office/powerpoint/2010/main" val="1114855027"/>
       </p:ext>
     </p:extLst>
   </p:cSld>
@@ -13989,7 +14805,7 @@
           <p:cNvPr id="22" name="">
             <a:extLst xmlns:a="http://schemas.openxmlformats.org/drawingml/2006/main">
               <a:ext uri="{FF2B5EF4-FFF2-40B4-BE49-F238E27FC236}">
-                <a16:creationId xmlns:a16="http://schemas.microsoft.com/office/drawing/2014/main" id="{3510A7D2-5422-411D-A89F-888F623E1685}"/>
+                <a16:creationId xmlns:a16="http://schemas.microsoft.com/office/drawing/2014/main" id="{FEF428D4-1387-4EE2-9A38-0E1E882394A9}"/>
               </a:ext>
             </a:extLst>
           </p:cNvPr>
@@ -14047,7 +14863,7 @@
           <p:cNvPr id="2" name="">
             <a:extLst xmlns:a="http://schemas.openxmlformats.org/drawingml/2006/main">
               <a:ext uri="{FF2B5EF4-FFF2-40B4-BE49-F238E27FC236}">
-                <a16:creationId xmlns:a16="http://schemas.microsoft.com/office/drawing/2014/main" id="{56CCBA20-490F-4236-AE51-367341623D6A}"/>
+                <a16:creationId xmlns:a16="http://schemas.microsoft.com/office/drawing/2014/main" id="{27F889D3-449B-4664-9F3E-9D083BF48F9C}"/>
               </a:ext>
             </a:extLst>
           </p:cNvPr>
@@ -14105,7 +14921,7 @@
           <p:cNvPr id="3" name="">
             <a:extLst xmlns:a="http://schemas.openxmlformats.org/drawingml/2006/main">
               <a:ext uri="{FF2B5EF4-FFF2-40B4-BE49-F238E27FC236}">
-                <a16:creationId xmlns:a16="http://schemas.microsoft.com/office/drawing/2014/main" id="{60B0A219-3845-460E-A68C-5E8C415C3DBB}"/>
+                <a16:creationId xmlns:a16="http://schemas.microsoft.com/office/drawing/2014/main" id="{C18D5075-08FE-489C-8C83-C43A79ACFF79}"/>
               </a:ext>
             </a:extLst>
           </p:cNvPr>
@@ -14163,7 +14979,7 @@
           <p:cNvPr id="4" name="">
             <a:extLst xmlns:a="http://schemas.openxmlformats.org/drawingml/2006/main">
               <a:ext uri="{FF2B5EF4-FFF2-40B4-BE49-F238E27FC236}">
-                <a16:creationId xmlns:a16="http://schemas.microsoft.com/office/drawing/2014/main" id="{E7A53A5F-3609-413C-9102-9FB9D2D1C792}"/>
+                <a16:creationId xmlns:a16="http://schemas.microsoft.com/office/drawing/2014/main" id="{8D375B7E-0FF3-4212-AFF1-FBD506BC4C90}"/>
               </a:ext>
             </a:extLst>
           </p:cNvPr>
@@ -14196,7 +15012,7 @@
           <p:cNvPr id="5" name="">
             <a:extLst xmlns:a="http://schemas.openxmlformats.org/drawingml/2006/main">
               <a:ext uri="{FF2B5EF4-FFF2-40B4-BE49-F238E27FC236}">
-                <a16:creationId xmlns:a16="http://schemas.microsoft.com/office/drawing/2014/main" id="{0579D49A-D1DA-4FD5-A1AB-A903068C19A0}"/>
+                <a16:creationId xmlns:a16="http://schemas.microsoft.com/office/drawing/2014/main" id="{A3C6C9D4-B960-456D-BFE1-4E3D6210FB09}"/>
               </a:ext>
             </a:extLst>
           </p:cNvPr>
@@ -14231,7 +15047,7 @@
           <p:cNvPr id="6" name="">
             <a:extLst xmlns:a="http://schemas.openxmlformats.org/drawingml/2006/main">
               <a:ext uri="{FF2B5EF4-FFF2-40B4-BE49-F238E27FC236}">
-                <a16:creationId xmlns:a16="http://schemas.microsoft.com/office/drawing/2014/main" id="{71AE344C-E1CF-49E5-AF12-1A65DA6240DF}"/>
+                <a16:creationId xmlns:a16="http://schemas.microsoft.com/office/drawing/2014/main" id="{3B746B72-B972-4BD9-8582-BE9ACB40E664}"/>
               </a:ext>
             </a:extLst>
           </p:cNvPr>
@@ -14264,7 +15080,7 @@
           <p:cNvPr id="7" name="">
             <a:extLst xmlns:a="http://schemas.openxmlformats.org/drawingml/2006/main">
               <a:ext uri="{FF2B5EF4-FFF2-40B4-BE49-F238E27FC236}">
-                <a16:creationId xmlns:a16="http://schemas.microsoft.com/office/drawing/2014/main" id="{60BCC93C-9408-4301-94F8-9B4C82503BC2}"/>
+                <a16:creationId xmlns:a16="http://schemas.microsoft.com/office/drawing/2014/main" id="{02217C5F-F4C4-4473-99DA-E8071A64F1FF}"/>
               </a:ext>
             </a:extLst>
           </p:cNvPr>
@@ -14322,7 +15138,7 @@
           <p:cNvPr id="8" name="">
             <a:extLst xmlns:a="http://schemas.openxmlformats.org/drawingml/2006/main">
               <a:ext uri="{FF2B5EF4-FFF2-40B4-BE49-F238E27FC236}">
-                <a16:creationId xmlns:a16="http://schemas.microsoft.com/office/drawing/2014/main" id="{24B3AA8E-0C67-43F7-A760-8DAF3A957F2D}"/>
+                <a16:creationId xmlns:a16="http://schemas.microsoft.com/office/drawing/2014/main" id="{5410C5B6-BB94-42C6-853A-12938E40750C}"/>
               </a:ext>
             </a:extLst>
           </p:cNvPr>
@@ -14380,7 +15196,7 @@
           <p:cNvPr id="9" name="">
             <a:extLst xmlns:a="http://schemas.openxmlformats.org/drawingml/2006/main">
               <a:ext uri="{FF2B5EF4-FFF2-40B4-BE49-F238E27FC236}">
-                <a16:creationId xmlns:a16="http://schemas.microsoft.com/office/drawing/2014/main" id="{DA9C14C1-25A6-4C70-883C-66B51117E4F4}"/>
+                <a16:creationId xmlns:a16="http://schemas.microsoft.com/office/drawing/2014/main" id="{F5ED5F10-8242-476B-86ED-4A1A470D2D06}"/>
               </a:ext>
             </a:extLst>
           </p:cNvPr>
@@ -14415,7 +15231,7 @@
           <p:cNvPr id="10" name="">
             <a:extLst xmlns:a="http://schemas.openxmlformats.org/drawingml/2006/main">
               <a:ext uri="{FF2B5EF4-FFF2-40B4-BE49-F238E27FC236}">
-                <a16:creationId xmlns:a16="http://schemas.microsoft.com/office/drawing/2014/main" id="{8C5F8703-1B7A-4A76-9604-1AAB97FFA874}"/>
+                <a16:creationId xmlns:a16="http://schemas.microsoft.com/office/drawing/2014/main" id="{D7FA9AA5-C225-4A26-8174-F0405AFF754D}"/>
               </a:ext>
             </a:extLst>
           </p:cNvPr>
@@ -14448,7 +15264,7 @@
           <p:cNvPr id="11" name="">
             <a:extLst xmlns:a="http://schemas.openxmlformats.org/drawingml/2006/main">
               <a:ext uri="{FF2B5EF4-FFF2-40B4-BE49-F238E27FC236}">
-                <a16:creationId xmlns:a16="http://schemas.microsoft.com/office/drawing/2014/main" id="{05A9330F-FB44-42F3-92E3-BB1808837A30}"/>
+                <a16:creationId xmlns:a16="http://schemas.microsoft.com/office/drawing/2014/main" id="{8FB10513-5634-4A55-A8DF-721970B36DC9}"/>
               </a:ext>
             </a:extLst>
           </p:cNvPr>
@@ -14506,7 +15322,7 @@
           <p:cNvPr id="12" name="">
             <a:extLst xmlns:a="http://schemas.openxmlformats.org/drawingml/2006/main">
               <a:ext uri="{FF2B5EF4-FFF2-40B4-BE49-F238E27FC236}">
-                <a16:creationId xmlns:a16="http://schemas.microsoft.com/office/drawing/2014/main" id="{0D1843F4-7FA2-44E7-8102-AB98519E8D1E}"/>
+                <a16:creationId xmlns:a16="http://schemas.microsoft.com/office/drawing/2014/main" id="{946A1A62-5A50-4156-997D-59DB867820F6}"/>
               </a:ext>
             </a:extLst>
           </p:cNvPr>
@@ -14564,7 +15380,7 @@
           <p:cNvPr id="13" name="">
             <a:extLst xmlns:a="http://schemas.openxmlformats.org/drawingml/2006/main">
               <a:ext uri="{FF2B5EF4-FFF2-40B4-BE49-F238E27FC236}">
-                <a16:creationId xmlns:a16="http://schemas.microsoft.com/office/drawing/2014/main" id="{BA47BC77-66CC-4C0C-89DE-7C7A3A32CAB1}"/>
+                <a16:creationId xmlns:a16="http://schemas.microsoft.com/office/drawing/2014/main" id="{1461949C-AB1F-476C-8CD1-B808A8E1ABB3}"/>
               </a:ext>
             </a:extLst>
           </p:cNvPr>
@@ -14599,7 +15415,7 @@
           <p:cNvPr id="14" name="">
             <a:extLst xmlns:a="http://schemas.openxmlformats.org/drawingml/2006/main">
               <a:ext uri="{FF2B5EF4-FFF2-40B4-BE49-F238E27FC236}">
-                <a16:creationId xmlns:a16="http://schemas.microsoft.com/office/drawing/2014/main" id="{A456BA73-D24B-4F1A-A1E8-0DFF17B2AA41}"/>
+                <a16:creationId xmlns:a16="http://schemas.microsoft.com/office/drawing/2014/main" id="{4BBB8C7B-B4EC-4676-9D3C-D01B5D723399}"/>
               </a:ext>
             </a:extLst>
           </p:cNvPr>
@@ -14632,7 +15448,7 @@
           <p:cNvPr id="15" name="">
             <a:extLst xmlns:a="http://schemas.openxmlformats.org/drawingml/2006/main">
               <a:ext uri="{FF2B5EF4-FFF2-40B4-BE49-F238E27FC236}">
-                <a16:creationId xmlns:a16="http://schemas.microsoft.com/office/drawing/2014/main" id="{F432D82F-936F-47C5-82E7-BF5DB776E84F}"/>
+                <a16:creationId xmlns:a16="http://schemas.microsoft.com/office/drawing/2014/main" id="{269DC408-7AE4-42A3-8D81-266FFD38BD49}"/>
               </a:ext>
             </a:extLst>
           </p:cNvPr>
@@ -14690,7 +15506,7 @@
           <p:cNvPr id="16" name="">
             <a:extLst xmlns:a="http://schemas.openxmlformats.org/drawingml/2006/main">
               <a:ext uri="{FF2B5EF4-FFF2-40B4-BE49-F238E27FC236}">
-                <a16:creationId xmlns:a16="http://schemas.microsoft.com/office/drawing/2014/main" id="{D5B75D71-BD08-4453-ADEA-CF49E25B1C81}"/>
+                <a16:creationId xmlns:a16="http://schemas.microsoft.com/office/drawing/2014/main" id="{CE3D2176-6B70-4B2F-81D2-A0A80024B36D}"/>
               </a:ext>
             </a:extLst>
           </p:cNvPr>
@@ -14748,7 +15564,7 @@
           <p:cNvPr id="17" name="">
             <a:extLst xmlns:a="http://schemas.openxmlformats.org/drawingml/2006/main">
               <a:ext uri="{FF2B5EF4-FFF2-40B4-BE49-F238E27FC236}">
-                <a16:creationId xmlns:a16="http://schemas.microsoft.com/office/drawing/2014/main" id="{ABEC6EE2-94F4-456D-9B12-BCB15143D23A}"/>
+                <a16:creationId xmlns:a16="http://schemas.microsoft.com/office/drawing/2014/main" id="{BBC4289C-8C89-43B3-9BBD-29C9B2ED780C}"/>
               </a:ext>
             </a:extLst>
           </p:cNvPr>
@@ -14783,7 +15599,7 @@
           <p:cNvPr id="18" name="">
             <a:extLst xmlns:a="http://schemas.openxmlformats.org/drawingml/2006/main">
               <a:ext uri="{FF2B5EF4-FFF2-40B4-BE49-F238E27FC236}">
-                <a16:creationId xmlns:a16="http://schemas.microsoft.com/office/drawing/2014/main" id="{C62BC3AD-647F-43B8-9656-7E9DB818801E}"/>
+                <a16:creationId xmlns:a16="http://schemas.microsoft.com/office/drawing/2014/main" id="{A185275D-0AFC-40D5-A9CA-1EBE4C9C7CB1}"/>
               </a:ext>
             </a:extLst>
           </p:cNvPr>
@@ -14816,7 +15632,7 @@
           <p:cNvPr id="19" name="">
             <a:extLst xmlns:a="http://schemas.openxmlformats.org/drawingml/2006/main">
               <a:ext uri="{FF2B5EF4-FFF2-40B4-BE49-F238E27FC236}">
-                <a16:creationId xmlns:a16="http://schemas.microsoft.com/office/drawing/2014/main" id="{B4858349-5CFA-4072-A882-0A72A26A1389}"/>
+                <a16:creationId xmlns:a16="http://schemas.microsoft.com/office/drawing/2014/main" id="{8560EB8F-08F9-48C3-9664-E7D4EF6F33A1}"/>
               </a:ext>
             </a:extLst>
           </p:cNvPr>
@@ -14874,7 +15690,7 @@
           <p:cNvPr id="20" name="">
             <a:extLst xmlns:a="http://schemas.openxmlformats.org/drawingml/2006/main">
               <a:ext uri="{FF2B5EF4-FFF2-40B4-BE49-F238E27FC236}">
-                <a16:creationId xmlns:a16="http://schemas.microsoft.com/office/drawing/2014/main" id="{2DC58946-CBAE-45E3-B6E5-BD8EAD1729F3}"/>
+                <a16:creationId xmlns:a16="http://schemas.microsoft.com/office/drawing/2014/main" id="{6624BED9-CA76-46F2-9087-D723570FCF47}"/>
               </a:ext>
             </a:extLst>
           </p:cNvPr>
@@ -14932,7 +15748,7 @@
           <p:cNvPr id="21" name="">
             <a:extLst xmlns:a="http://schemas.openxmlformats.org/drawingml/2006/main">
               <a:ext uri="{FF2B5EF4-FFF2-40B4-BE49-F238E27FC236}">
-                <a16:creationId xmlns:a16="http://schemas.microsoft.com/office/drawing/2014/main" id="{E52F58AD-7625-4483-8E07-5C6D2F6187F7}"/>
+                <a16:creationId xmlns:a16="http://schemas.microsoft.com/office/drawing/2014/main" id="{B889ED45-B72C-4598-A722-4EC92C6C1EAC}"/>
               </a:ext>
             </a:extLst>
           </p:cNvPr>
@@ -14988,7 +15804,7 @@
     </p:spTree>
     <p:extLst>
       <p:ext uri="{BB962C8B-B14F-4D97-AF65-F5344CB8AC3E}">
-        <p14:creationId xmlns:p14="http://schemas.microsoft.com/office/powerpoint/2010/main" val="1559711052"/>
+        <p14:creationId xmlns:p14="http://schemas.microsoft.com/office/powerpoint/2010/main" val="611138339"/>
       </p:ext>
     </p:extLst>
   </p:cSld>
